--- a/presentation/DraftSAMv1.pptx
+++ b/presentation/DraftSAMv1.pptx
@@ -1,17 +1,25 @@
 
 <file path=ppt/presentation.xml><?xml version="1.0" encoding="utf-8"?>
-<p:presentation xmlns:a="http://schemas.openxmlformats.org/drawingml/2006/main" xmlns:r="http://schemas.openxmlformats.org/officeDocument/2006/relationships" xmlns:p="http://schemas.openxmlformats.org/presentationml/2006/main" saveSubsetFonts="1">
+<p:presentation xmlns:a="http://schemas.openxmlformats.org/drawingml/2006/main" xmlns:r="http://schemas.openxmlformats.org/officeDocument/2006/relationships" xmlns:p="http://schemas.openxmlformats.org/presentationml/2006/main" xmlns:m="http://schemas.openxmlformats.org/officeDocument/2006/math" xmlns:w="http://schemas.openxmlformats.org/wordprocessingml/2006/main" saveSubsetFonts="1">
   <p:sldMasterIdLst>
-    <p:sldMasterId id="2147483660" r:id="rId1"/>
+    <p:sldMasterId id="2147483648" r:id="rId1"/>
   </p:sldMasterIdLst>
+  <p:notesMasterIdLst>
+    <p:notesMasterId r:id="rId16"/>
+  </p:notesMasterIdLst>
   <p:sldIdLst>
-    <p:sldId id="256" r:id="rId2"/>
-    <p:sldId id="260" r:id="rId3"/>
-    <p:sldId id="257" r:id="rId4"/>
-    <p:sldId id="259" r:id="rId5"/>
-    <p:sldId id="261" r:id="rId6"/>
-    <p:sldId id="263" r:id="rId7"/>
-    <p:sldId id="262" r:id="rId8"/>
+    <p:sldId id="256" r:id="rId4"/>
+    <p:sldId id="257" r:id="rId5"/>
+    <p:sldId id="258" r:id="rId6"/>
+    <p:sldId id="259" r:id="rId7"/>
+    <p:sldId id="260" r:id="rId8"/>
+    <p:sldId id="261" r:id="rId9"/>
+    <p:sldId id="262" r:id="rId10"/>
+    <p:sldId id="263" r:id="rId11"/>
+    <p:sldId id="264" r:id="rId12"/>
+    <p:sldId id="265" r:id="rId13"/>
+    <p:sldId id="266" r:id="rId14"/>
+    <p:sldId id="267" r:id="rId15"/>
   </p:sldIdLst>
   <p:sldSz cx="12192000" cy="6858000"/>
   <p:notesSz cx="6858000" cy="9144000"/>
@@ -19,8 +27,8 @@
     <a:defPPr>
       <a:defRPr lang="en-US"/>
     </a:defPPr>
-    <a:lvl1pPr marL="0" algn="l" defTabSz="914400" rtl="0" eaLnBrk="1" latinLnBrk="0" hangingPunct="1">
-      <a:defRPr sz="1800" kern="1200">
+    <a:lvl1pPr marL="0" algn="l" defTabSz="914400" rtl="0">
+      <a:defRPr sz="1800">
         <a:solidFill>
           <a:schemeClr val="tx1"/>
         </a:solidFill>
@@ -29,8 +37,8 @@
         <a:cs typeface="+mn-cs"/>
       </a:defRPr>
     </a:lvl1pPr>
-    <a:lvl2pPr marL="457200" algn="l" defTabSz="914400" rtl="0" eaLnBrk="1" latinLnBrk="0" hangingPunct="1">
-      <a:defRPr sz="1800" kern="1200">
+    <a:lvl2pPr marL="457200" algn="l" defTabSz="914400" rtl="0">
+      <a:defRPr sz="1800">
         <a:solidFill>
           <a:schemeClr val="tx1"/>
         </a:solidFill>
@@ -39,8 +47,8 @@
         <a:cs typeface="+mn-cs"/>
       </a:defRPr>
     </a:lvl2pPr>
-    <a:lvl3pPr marL="914400" algn="l" defTabSz="914400" rtl="0" eaLnBrk="1" latinLnBrk="0" hangingPunct="1">
-      <a:defRPr sz="1800" kern="1200">
+    <a:lvl3pPr marL="914400" algn="l" defTabSz="914400" rtl="0">
+      <a:defRPr sz="1800">
         <a:solidFill>
           <a:schemeClr val="tx1"/>
         </a:solidFill>
@@ -49,8 +57,8 @@
         <a:cs typeface="+mn-cs"/>
       </a:defRPr>
     </a:lvl3pPr>
-    <a:lvl4pPr marL="1371600" algn="l" defTabSz="914400" rtl="0" eaLnBrk="1" latinLnBrk="0" hangingPunct="1">
-      <a:defRPr sz="1800" kern="1200">
+    <a:lvl4pPr marL="1371600" algn="l" defTabSz="914400" rtl="0">
+      <a:defRPr sz="1800">
         <a:solidFill>
           <a:schemeClr val="tx1"/>
         </a:solidFill>
@@ -59,8 +67,8 @@
         <a:cs typeface="+mn-cs"/>
       </a:defRPr>
     </a:lvl4pPr>
-    <a:lvl5pPr marL="1828800" algn="l" defTabSz="914400" rtl="0" eaLnBrk="1" latinLnBrk="0" hangingPunct="1">
-      <a:defRPr sz="1800" kern="1200">
+    <a:lvl5pPr marL="1828800" algn="l" defTabSz="914400" rtl="0">
+      <a:defRPr sz="1800">
         <a:solidFill>
           <a:schemeClr val="tx1"/>
         </a:solidFill>
@@ -69,8 +77,8 @@
         <a:cs typeface="+mn-cs"/>
       </a:defRPr>
     </a:lvl5pPr>
-    <a:lvl6pPr marL="2286000" algn="l" defTabSz="914400" rtl="0" eaLnBrk="1" latinLnBrk="0" hangingPunct="1">
-      <a:defRPr sz="1800" kern="1200">
+    <a:lvl6pPr marL="2286000" algn="l" defTabSz="914400" rtl="0">
+      <a:defRPr sz="1800">
         <a:solidFill>
           <a:schemeClr val="tx1"/>
         </a:solidFill>
@@ -79,8 +87,8 @@
         <a:cs typeface="+mn-cs"/>
       </a:defRPr>
     </a:lvl6pPr>
-    <a:lvl7pPr marL="2743200" algn="l" defTabSz="914400" rtl="0" eaLnBrk="1" latinLnBrk="0" hangingPunct="1">
-      <a:defRPr sz="1800" kern="1200">
+    <a:lvl7pPr marL="2743200" algn="l" defTabSz="914400" rtl="0">
+      <a:defRPr sz="1800">
         <a:solidFill>
           <a:schemeClr val="tx1"/>
         </a:solidFill>
@@ -89,8 +97,8 @@
         <a:cs typeface="+mn-cs"/>
       </a:defRPr>
     </a:lvl7pPr>
-    <a:lvl8pPr marL="3200400" algn="l" defTabSz="914400" rtl="0" eaLnBrk="1" latinLnBrk="0" hangingPunct="1">
-      <a:defRPr sz="1800" kern="1200">
+    <a:lvl8pPr marL="3200400" algn="l" defTabSz="914400" rtl="0">
+      <a:defRPr sz="1800">
         <a:solidFill>
           <a:schemeClr val="tx1"/>
         </a:solidFill>
@@ -99,8 +107,8 @@
         <a:cs typeface="+mn-cs"/>
       </a:defRPr>
     </a:lvl8pPr>
-    <a:lvl9pPr marL="3657600" algn="l" defTabSz="914400" rtl="0" eaLnBrk="1" latinLnBrk="0" hangingPunct="1">
-      <a:defRPr sz="1800" kern="1200">
+    <a:lvl9pPr marL="3657600" algn="l" defTabSz="914400" rtl="0">
+      <a:defRPr sz="1800">
         <a:solidFill>
           <a:schemeClr val="tx1"/>
         </a:solidFill>
@@ -110,25 +118,1351 @@
       </a:defRPr>
     </a:lvl9pPr>
   </p:defaultTextStyle>
-  <p:extLst>
-    <p:ext uri="{EFAFB233-063F-42B5-8137-9DF3F51BA10A}">
-      <p15:sldGuideLst xmlns:p15="http://schemas.microsoft.com/office/powerpoint/2012/main"/>
-    </p:ext>
-  </p:extLst>
 </p:presentation>
 </file>
 
-<file path=ppt/revisionInfo.xml><?xml version="1.0" encoding="utf-8"?>
-<p1510:revInfo xmlns:a="http://schemas.openxmlformats.org/drawingml/2006/main" xmlns:r="http://schemas.openxmlformats.org/officeDocument/2006/relationships" xmlns:p1510="http://schemas.microsoft.com/office/powerpoint/2015/10/main">
-  <p1510:revLst>
-    <p1510:client id="{EF91BFC8-9EC5-9DC5-A2FC-BF327A262F7E}" v="19" dt="2026-05-16T15:25:57.304"/>
-    <p1510:client id="{F1A0913C-D0FA-C169-0FFA-3020A48D0E91}" v="1114" dt="2026-05-16T15:21:56.895"/>
-  </p1510:revLst>
-</p1510:revInfo>
+<file path=ppt/notesMasters/notesMaster1.xml><?xml version="1.0" encoding="utf-8"?>
+<p:notesMaster xmlns:a="http://schemas.openxmlformats.org/drawingml/2006/main" xmlns:r="http://schemas.openxmlformats.org/officeDocument/2006/relationships" xmlns:p="http://schemas.openxmlformats.org/presentationml/2006/main">
+  <p:cSld name="">
+    <p:bg>
+      <p:bgRef idx="1001">
+        <a:schemeClr val="bg1"/>
+      </p:bgRef>
+    </p:bg>
+    <p:spTree>
+      <p:nvGrpSpPr>
+        <p:cNvPr id="1" name=""/>
+        <p:cNvGrpSpPr/>
+        <p:nvPr/>
+      </p:nvGrpSpPr>
+      <p:grpSpPr bwMode="auto">
+        <a:xfrm>
+          <a:off x="0" y="0"/>
+          <a:ext cx="0" cy="0"/>
+          <a:chOff x="0" y="0"/>
+          <a:chExt cx="0" cy="0"/>
+        </a:xfrm>
+      </p:grpSpPr>
+      <p:sp>
+        <p:nvSpPr>
+          <p:cNvPr id="2" name="Header Placeholder 1"/>
+          <p:cNvSpPr>
+            <a:spLocks noGrp="1"/>
+          </p:cNvSpPr>
+          <p:nvPr>
+            <p:ph type="hdr" sz="quarter"/>
+          </p:nvPr>
+        </p:nvSpPr>
+        <p:spPr bwMode="auto">
+          <a:xfrm>
+            <a:off x="0" y="0"/>
+            <a:ext cx="2971800" cy="458788"/>
+          </a:xfrm>
+          <a:prstGeom prst="rect">
+            <a:avLst/>
+          </a:prstGeom>
+        </p:spPr>
+        <p:txBody>
+          <a:bodyPr vert="horz" lIns="91440" tIns="45720" rIns="91440" bIns="45720" rtlCol="0" anchor="ctr"/>
+          <a:lstStyle>
+            <a:lvl1pPr algn="l">
+              <a:defRPr sz="1200"/>
+            </a:lvl1pPr>
+          </a:lstStyle>
+          <a:p>
+            <a:pPr>
+              <a:defRPr/>
+            </a:pPr>
+            <a:endParaRPr/>
+          </a:p>
+        </p:txBody>
+      </p:sp>
+      <p:sp>
+        <p:nvSpPr>
+          <p:cNvPr id="3" name="Date Placeholder 2"/>
+          <p:cNvSpPr>
+            <a:spLocks noGrp="1"/>
+          </p:cNvSpPr>
+          <p:nvPr>
+            <p:ph type="dt" idx="2"/>
+          </p:nvPr>
+        </p:nvSpPr>
+        <p:spPr bwMode="auto">
+          <a:xfrm>
+            <a:off x="3884613" y="0"/>
+            <a:ext cx="2971800" cy="458788"/>
+          </a:xfrm>
+          <a:prstGeom prst="rect">
+            <a:avLst/>
+          </a:prstGeom>
+        </p:spPr>
+        <p:txBody>
+          <a:bodyPr vert="horz" lIns="91440" tIns="45720" rIns="91440" bIns="45720" rtlCol="0" anchor="ctr"/>
+          <a:lstStyle>
+            <a:lvl1pPr algn="r">
+              <a:defRPr sz="1200"/>
+            </a:lvl1pPr>
+          </a:lstStyle>
+          <a:p>
+            <a:pPr>
+              <a:defRPr/>
+            </a:pPr>
+            <a:endParaRPr/>
+          </a:p>
+        </p:txBody>
+      </p:sp>
+      <p:sp>
+        <p:nvSpPr>
+          <p:cNvPr id="3" name="Date Placeholder 2"/>
+          <p:cNvSpPr>
+            <a:spLocks noGrp="1"/>
+          </p:cNvSpPr>
+          <p:nvPr>
+            <p:ph type="dt" idx="3"/>
+          </p:nvPr>
+        </p:nvSpPr>
+        <p:spPr bwMode="auto">
+          <a:xfrm>
+            <a:off x="3884613" y="0"/>
+            <a:ext cx="2971800" cy="458788"/>
+          </a:xfrm>
+          <a:prstGeom prst="rect">
+            <a:avLst/>
+          </a:prstGeom>
+        </p:spPr>
+        <p:txBody>
+          <a:bodyPr vert="horz" lIns="91440" tIns="45720" rIns="91440" bIns="45720" rtlCol="0" anchor="ctr"/>
+          <a:lstStyle>
+            <a:lvl1pPr algn="r">
+              <a:defRPr sz="1200"/>
+            </a:lvl1pPr>
+          </a:lstStyle>
+          <a:p>
+            <a:pPr>
+              <a:defRPr/>
+            </a:pPr>
+            <a:endParaRPr/>
+          </a:p>
+        </p:txBody>
+      </p:sp>
+      <p:sp>
+        <p:nvSpPr>
+          <p:cNvPr id="5" name="Notes Placeholder 4"/>
+          <p:cNvSpPr>
+            <a:spLocks noGrp="1"/>
+          </p:cNvSpPr>
+          <p:nvPr>
+            <p:ph type="body" sz="quarter" idx="1"/>
+          </p:nvPr>
+        </p:nvSpPr>
+        <p:spPr bwMode="auto">
+          <a:xfrm>
+            <a:off x="685800" y="4400550"/>
+            <a:ext cx="5486400" cy="3600450"/>
+          </a:xfrm>
+          <a:prstGeom prst="rect">
+            <a:avLst/>
+          </a:prstGeom>
+        </p:spPr>
+        <p:txBody>
+          <a:bodyPr vert="horz" lIns="91440" tIns="45720" rIns="91440" bIns="45720" rtlCol="0" anchor="ctr"/>
+          <a:lstStyle/>
+          <a:p>
+            <a:pPr>
+              <a:defRPr/>
+            </a:pPr>
+            <a:endParaRPr/>
+          </a:p>
+        </p:txBody>
+      </p:sp>
+      <p:sp>
+        <p:nvSpPr>
+          <p:cNvPr id="6" name="Footer Placeholder 5"/>
+          <p:cNvSpPr>
+            <a:spLocks noGrp="1"/>
+          </p:cNvSpPr>
+          <p:nvPr>
+            <p:ph type="ftr" sz="quarter" idx="4"/>
+          </p:nvPr>
+        </p:nvSpPr>
+        <p:spPr bwMode="auto">
+          <a:xfrm>
+            <a:off x="0" y="8685213"/>
+            <a:ext cx="2971800" cy="458787"/>
+          </a:xfrm>
+          <a:prstGeom prst="rect">
+            <a:avLst/>
+          </a:prstGeom>
+        </p:spPr>
+        <p:txBody>
+          <a:bodyPr vert="horz" lIns="91440" tIns="45720" rIns="91440" bIns="45720" rtlCol="0" anchor="b"/>
+          <a:lstStyle>
+            <a:lvl1pPr algn="l">
+              <a:defRPr sz="1200"/>
+            </a:lvl1pPr>
+          </a:lstStyle>
+          <a:p>
+            <a:pPr>
+              <a:defRPr/>
+            </a:pPr>
+            <a:endParaRPr/>
+          </a:p>
+        </p:txBody>
+      </p:sp>
+      <p:sp>
+        <p:nvSpPr>
+          <p:cNvPr id="7" name="Slide Number Placeholder 6"/>
+          <p:cNvSpPr>
+            <a:spLocks noGrp="1"/>
+          </p:cNvSpPr>
+          <p:nvPr>
+            <p:ph type="sldNum" sz="quarter" idx="10"/>
+          </p:nvPr>
+        </p:nvSpPr>
+        <p:spPr bwMode="auto">
+          <a:xfrm>
+            <a:off x="3884613" y="8685213"/>
+            <a:ext cx="2971800" cy="458787"/>
+          </a:xfrm>
+          <a:prstGeom prst="rect">
+            <a:avLst/>
+          </a:prstGeom>
+        </p:spPr>
+        <p:txBody>
+          <a:bodyPr vert="horz" lIns="91440" tIns="45720" rIns="91440" bIns="45720" rtlCol="0" anchor="b"/>
+          <a:lstStyle>
+            <a:lvl1pPr algn="r">
+              <a:defRPr sz="1200"/>
+            </a:lvl1pPr>
+          </a:lstStyle>
+          <a:p>
+            <a:pPr>
+              <a:defRPr/>
+            </a:pPr>
+            <a:endParaRPr/>
+          </a:p>
+        </p:txBody>
+      </p:sp>
+    </p:spTree>
+  </p:cSld>
+  <p:clrMap bg1="lt1" tx1="dk1" bg2="lt2" tx2="dk2" accent1="accent1" accent2="accent2" accent3="accent3" accent4="accent4" accent5="accent5" accent6="accent6" hlink="hlink" folHlink="folHlink"/>
+  <p:notesStyle>
+    <a:lvl1pPr marL="0" algn="l" defTabSz="914400">
+      <a:defRPr sz="1200">
+        <a:solidFill>
+          <a:schemeClr val="tx1"/>
+        </a:solidFill>
+        <a:latin typeface="+mn-lt"/>
+        <a:ea typeface="+mn-ea"/>
+        <a:cs typeface="+mn-cs"/>
+      </a:defRPr>
+    </a:lvl1pPr>
+    <a:lvl2pPr marL="457200" algn="l" defTabSz="914400">
+      <a:defRPr sz="1200">
+        <a:solidFill>
+          <a:schemeClr val="tx1"/>
+        </a:solidFill>
+        <a:latin typeface="+mn-lt"/>
+        <a:ea typeface="+mn-ea"/>
+        <a:cs typeface="+mn-cs"/>
+      </a:defRPr>
+    </a:lvl2pPr>
+    <a:lvl3pPr marL="914400" algn="l" defTabSz="914400">
+      <a:defRPr sz="1200">
+        <a:solidFill>
+          <a:schemeClr val="tx1"/>
+        </a:solidFill>
+        <a:latin typeface="+mn-lt"/>
+        <a:ea typeface="+mn-ea"/>
+        <a:cs typeface="+mn-cs"/>
+      </a:defRPr>
+    </a:lvl3pPr>
+    <a:lvl4pPr marL="1371600" algn="l" defTabSz="914400">
+      <a:defRPr sz="1200">
+        <a:solidFill>
+          <a:schemeClr val="tx1"/>
+        </a:solidFill>
+        <a:latin typeface="+mn-lt"/>
+        <a:ea typeface="+mn-ea"/>
+        <a:cs typeface="+mn-cs"/>
+      </a:defRPr>
+    </a:lvl4pPr>
+    <a:lvl5pPr marL="1828800" algn="l" defTabSz="914400">
+      <a:defRPr sz="1200">
+        <a:solidFill>
+          <a:schemeClr val="tx1"/>
+        </a:solidFill>
+        <a:latin typeface="+mn-lt"/>
+        <a:ea typeface="+mn-ea"/>
+        <a:cs typeface="+mn-cs"/>
+      </a:defRPr>
+    </a:lvl5pPr>
+    <a:lvl6pPr marL="2286000" algn="l" defTabSz="914400">
+      <a:defRPr sz="1200">
+        <a:solidFill>
+          <a:schemeClr val="tx1"/>
+        </a:solidFill>
+        <a:latin typeface="+mn-lt"/>
+        <a:ea typeface="+mn-ea"/>
+        <a:cs typeface="+mn-cs"/>
+      </a:defRPr>
+    </a:lvl6pPr>
+    <a:lvl7pPr marL="2743200" algn="l" defTabSz="914400">
+      <a:defRPr sz="1200">
+        <a:solidFill>
+          <a:schemeClr val="tx1"/>
+        </a:solidFill>
+        <a:latin typeface="+mn-lt"/>
+        <a:ea typeface="+mn-ea"/>
+        <a:cs typeface="+mn-cs"/>
+      </a:defRPr>
+    </a:lvl7pPr>
+    <a:lvl8pPr marL="3200400" algn="l" defTabSz="914400">
+      <a:defRPr sz="1200">
+        <a:solidFill>
+          <a:schemeClr val="tx1"/>
+        </a:solidFill>
+        <a:latin typeface="+mn-lt"/>
+        <a:ea typeface="+mn-ea"/>
+        <a:cs typeface="+mn-cs"/>
+      </a:defRPr>
+    </a:lvl8pPr>
+    <a:lvl9pPr marL="3657600" algn="l" defTabSz="914400">
+      <a:defRPr sz="1200">
+        <a:solidFill>
+          <a:schemeClr val="tx1"/>
+        </a:solidFill>
+        <a:latin typeface="+mn-lt"/>
+        <a:ea typeface="+mn-ea"/>
+        <a:cs typeface="+mn-cs"/>
+      </a:defRPr>
+    </a:lvl9pPr>
+  </p:notesStyle>
+</p:notesMaster>
+</file>
+
+<file path=ppt/notesSlides/notesSlide1.xml><?xml version="1.0" encoding="utf-8"?>
+<p:notes xmlns:a="http://schemas.openxmlformats.org/drawingml/2006/main" xmlns:r="http://schemas.openxmlformats.org/officeDocument/2006/relationships" xmlns:p="http://schemas.openxmlformats.org/presentationml/2006/main" xmlns:m="http://schemas.openxmlformats.org/officeDocument/2006/math" xmlns:w="http://schemas.openxmlformats.org/wordprocessingml/2006/main">
+  <p:cSld name="">
+    <p:spTree>
+      <p:nvGrpSpPr>
+        <p:cNvPr id="1" name=""/>
+        <p:cNvGrpSpPr/>
+        <p:nvPr/>
+      </p:nvGrpSpPr>
+      <p:grpSpPr bwMode="auto">
+        <a:xfrm>
+          <a:off x="0" y="0"/>
+          <a:ext cx="0" cy="0"/>
+          <a:chOff x="0" y="0"/>
+          <a:chExt cx="0" cy="0"/>
+        </a:xfrm>
+      </p:grpSpPr>
+      <p:sp>
+        <p:nvSpPr>
+          <p:cNvPr id="2" name="Slide Image Placeholder 1"/>
+          <p:cNvSpPr>
+            <a:spLocks noChangeAspect="1" noGrp="1" noRot="1"/>
+          </p:cNvSpPr>
+          <p:nvPr>
+            <p:ph type="sldImg"/>
+          </p:nvPr>
+        </p:nvSpPr>
+        <p:spPr bwMode="auto"/>
+      </p:sp>
+      <p:sp>
+        <p:nvSpPr>
+          <p:cNvPr id="3" name="Notes Placeholder 2"/>
+          <p:cNvSpPr>
+            <a:spLocks noGrp="1"/>
+          </p:cNvSpPr>
+          <p:nvPr>
+            <p:ph type="body" idx="1"/>
+          </p:nvPr>
+        </p:nvSpPr>
+        <p:spPr bwMode="auto"/>
+        <p:txBody>
+          <a:bodyPr/>
+          <a:lstStyle/>
+          <a:p>
+            <a:pPr>
+              <a:defRPr/>
+            </a:pPr>
+            <a:endParaRPr/>
+          </a:p>
+        </p:txBody>
+      </p:sp>
+      <p:sp>
+        <p:nvSpPr>
+          <p:cNvPr id="4" name="Slide Number Placeholder 3"/>
+          <p:cNvSpPr>
+            <a:spLocks noGrp="1"/>
+          </p:cNvSpPr>
+          <p:nvPr>
+            <p:ph type="sldNum" sz="quarter" idx="10"/>
+          </p:nvPr>
+        </p:nvSpPr>
+        <p:spPr bwMode="auto"/>
+        <p:txBody>
+          <a:bodyPr/>
+          <a:lstStyle/>
+          <a:p>
+            <a:pPr>
+              <a:defRPr/>
+            </a:pPr>
+            <a:fld id="{81D50A13-F7F8-C8EB-FAA5-73023992F5ED}" type="slidenum">
+              <a:rPr/>
+              <a:t/>
+            </a:fld>
+            <a:endParaRPr/>
+          </a:p>
+        </p:txBody>
+      </p:sp>
+    </p:spTree>
+  </p:cSld>
+  <p:clrMapOvr>
+    <a:masterClrMapping/>
+  </p:clrMapOvr>
+</p:notes>
+</file>
+
+<file path=ppt/notesSlides/notesSlide10.xml><?xml version="1.0" encoding="utf-8"?>
+<p:notes xmlns:a="http://schemas.openxmlformats.org/drawingml/2006/main" xmlns:r="http://schemas.openxmlformats.org/officeDocument/2006/relationships" xmlns:p="http://schemas.openxmlformats.org/presentationml/2006/main" xmlns:m="http://schemas.openxmlformats.org/officeDocument/2006/math" xmlns:w="http://schemas.openxmlformats.org/wordprocessingml/2006/main">
+  <p:cSld name="">
+    <p:spTree>
+      <p:nvGrpSpPr>
+        <p:cNvPr id="1" name=""/>
+        <p:cNvGrpSpPr/>
+        <p:nvPr/>
+      </p:nvGrpSpPr>
+      <p:grpSpPr bwMode="auto">
+        <a:xfrm>
+          <a:off x="0" y="0"/>
+          <a:ext cx="0" cy="0"/>
+          <a:chOff x="0" y="0"/>
+          <a:chExt cx="0" cy="0"/>
+        </a:xfrm>
+      </p:grpSpPr>
+      <p:sp>
+        <p:nvSpPr>
+          <p:cNvPr id="2" name="Slide Image Placeholder 1"/>
+          <p:cNvSpPr>
+            <a:spLocks noChangeAspect="1" noGrp="1" noRot="1"/>
+          </p:cNvSpPr>
+          <p:nvPr>
+            <p:ph type="sldImg"/>
+          </p:nvPr>
+        </p:nvSpPr>
+        <p:spPr bwMode="auto"/>
+      </p:sp>
+      <p:sp>
+        <p:nvSpPr>
+          <p:cNvPr id="3" name="Notes Placeholder 2"/>
+          <p:cNvSpPr>
+            <a:spLocks noGrp="1"/>
+          </p:cNvSpPr>
+          <p:nvPr>
+            <p:ph type="body" idx="1"/>
+          </p:nvPr>
+        </p:nvSpPr>
+        <p:spPr bwMode="auto"/>
+        <p:txBody>
+          <a:bodyPr/>
+          <a:lstStyle/>
+          <a:p>
+            <a:pPr>
+              <a:defRPr/>
+            </a:pPr>
+            <a:endParaRPr/>
+          </a:p>
+        </p:txBody>
+      </p:sp>
+      <p:sp>
+        <p:nvSpPr>
+          <p:cNvPr id="4" name="Slide Number Placeholder 3"/>
+          <p:cNvSpPr>
+            <a:spLocks noGrp="1"/>
+          </p:cNvSpPr>
+          <p:nvPr>
+            <p:ph type="sldNum" sz="quarter" idx="10"/>
+          </p:nvPr>
+        </p:nvSpPr>
+        <p:spPr bwMode="auto"/>
+        <p:txBody>
+          <a:bodyPr/>
+          <a:lstStyle/>
+          <a:p>
+            <a:pPr>
+              <a:defRPr/>
+            </a:pPr>
+            <a:fld id="{F0B228FC-3282-C4D1-801C-2EDD5808FA27}" type="slidenum">
+              <a:rPr/>
+              <a:t/>
+            </a:fld>
+            <a:endParaRPr/>
+          </a:p>
+        </p:txBody>
+      </p:sp>
+    </p:spTree>
+  </p:cSld>
+  <p:clrMapOvr>
+    <a:masterClrMapping/>
+  </p:clrMapOvr>
+</p:notes>
+</file>
+
+<file path=ppt/notesSlides/notesSlide11.xml><?xml version="1.0" encoding="utf-8"?>
+<p:notes xmlns:a="http://schemas.openxmlformats.org/drawingml/2006/main" xmlns:r="http://schemas.openxmlformats.org/officeDocument/2006/relationships" xmlns:p="http://schemas.openxmlformats.org/presentationml/2006/main" xmlns:m="http://schemas.openxmlformats.org/officeDocument/2006/math" xmlns:w="http://schemas.openxmlformats.org/wordprocessingml/2006/main">
+  <p:cSld name="">
+    <p:spTree>
+      <p:nvGrpSpPr>
+        <p:cNvPr id="1" name=""/>
+        <p:cNvGrpSpPr/>
+        <p:nvPr/>
+      </p:nvGrpSpPr>
+      <p:grpSpPr bwMode="auto">
+        <a:xfrm>
+          <a:off x="0" y="0"/>
+          <a:ext cx="0" cy="0"/>
+          <a:chOff x="0" y="0"/>
+          <a:chExt cx="0" cy="0"/>
+        </a:xfrm>
+      </p:grpSpPr>
+      <p:sp>
+        <p:nvSpPr>
+          <p:cNvPr id="2" name="Slide Image Placeholder 1"/>
+          <p:cNvSpPr>
+            <a:spLocks noChangeAspect="1" noGrp="1" noRot="1"/>
+          </p:cNvSpPr>
+          <p:nvPr>
+            <p:ph type="sldImg"/>
+          </p:nvPr>
+        </p:nvSpPr>
+        <p:spPr bwMode="auto"/>
+      </p:sp>
+      <p:sp>
+        <p:nvSpPr>
+          <p:cNvPr id="3" name="Notes Placeholder 2"/>
+          <p:cNvSpPr>
+            <a:spLocks noGrp="1"/>
+          </p:cNvSpPr>
+          <p:nvPr>
+            <p:ph type="body" idx="1"/>
+          </p:nvPr>
+        </p:nvSpPr>
+        <p:spPr bwMode="auto"/>
+        <p:txBody>
+          <a:bodyPr/>
+          <a:lstStyle/>
+          <a:p>
+            <a:pPr>
+              <a:defRPr/>
+            </a:pPr>
+            <a:endParaRPr/>
+          </a:p>
+        </p:txBody>
+      </p:sp>
+      <p:sp>
+        <p:nvSpPr>
+          <p:cNvPr id="4" name="Slide Number Placeholder 3"/>
+          <p:cNvSpPr>
+            <a:spLocks noGrp="1"/>
+          </p:cNvSpPr>
+          <p:nvPr>
+            <p:ph type="sldNum" sz="quarter" idx="10"/>
+          </p:nvPr>
+        </p:nvSpPr>
+        <p:spPr bwMode="auto"/>
+        <p:txBody>
+          <a:bodyPr/>
+          <a:lstStyle/>
+          <a:p>
+            <a:pPr>
+              <a:defRPr/>
+            </a:pPr>
+            <a:fld id="{016C2373-59C3-65A7-3BD3-EADB983E2DA8}" type="slidenum">
+              <a:rPr/>
+              <a:t/>
+            </a:fld>
+            <a:endParaRPr/>
+          </a:p>
+        </p:txBody>
+      </p:sp>
+    </p:spTree>
+  </p:cSld>
+  <p:clrMapOvr>
+    <a:masterClrMapping/>
+  </p:clrMapOvr>
+</p:notes>
+</file>
+
+<file path=ppt/notesSlides/notesSlide12.xml><?xml version="1.0" encoding="utf-8"?>
+<p:notes xmlns:a="http://schemas.openxmlformats.org/drawingml/2006/main" xmlns:r="http://schemas.openxmlformats.org/officeDocument/2006/relationships" xmlns:p="http://schemas.openxmlformats.org/presentationml/2006/main" xmlns:m="http://schemas.openxmlformats.org/officeDocument/2006/math" xmlns:w="http://schemas.openxmlformats.org/wordprocessingml/2006/main">
+  <p:cSld name="">
+    <p:spTree>
+      <p:nvGrpSpPr>
+        <p:cNvPr id="1" name=""/>
+        <p:cNvGrpSpPr/>
+        <p:nvPr/>
+      </p:nvGrpSpPr>
+      <p:grpSpPr bwMode="auto">
+        <a:xfrm>
+          <a:off x="0" y="0"/>
+          <a:ext cx="0" cy="0"/>
+          <a:chOff x="0" y="0"/>
+          <a:chExt cx="0" cy="0"/>
+        </a:xfrm>
+      </p:grpSpPr>
+      <p:sp>
+        <p:nvSpPr>
+          <p:cNvPr id="2" name="Slide Image Placeholder 1"/>
+          <p:cNvSpPr>
+            <a:spLocks noChangeAspect="1" noGrp="1" noRot="1"/>
+          </p:cNvSpPr>
+          <p:nvPr>
+            <p:ph type="sldImg"/>
+          </p:nvPr>
+        </p:nvSpPr>
+        <p:spPr bwMode="auto"/>
+      </p:sp>
+      <p:sp>
+        <p:nvSpPr>
+          <p:cNvPr id="3" name="Notes Placeholder 2"/>
+          <p:cNvSpPr>
+            <a:spLocks noGrp="1"/>
+          </p:cNvSpPr>
+          <p:nvPr>
+            <p:ph type="body" idx="1"/>
+          </p:nvPr>
+        </p:nvSpPr>
+        <p:spPr bwMode="auto"/>
+        <p:txBody>
+          <a:bodyPr/>
+          <a:lstStyle/>
+          <a:p>
+            <a:pPr>
+              <a:defRPr/>
+            </a:pPr>
+            <a:endParaRPr/>
+          </a:p>
+        </p:txBody>
+      </p:sp>
+      <p:sp>
+        <p:nvSpPr>
+          <p:cNvPr id="4" name="Slide Number Placeholder 3"/>
+          <p:cNvSpPr>
+            <a:spLocks noGrp="1"/>
+          </p:cNvSpPr>
+          <p:nvPr>
+            <p:ph type="sldNum" sz="quarter" idx="10"/>
+          </p:nvPr>
+        </p:nvSpPr>
+        <p:spPr bwMode="auto"/>
+        <p:txBody>
+          <a:bodyPr/>
+          <a:lstStyle/>
+          <a:p>
+            <a:pPr>
+              <a:defRPr/>
+            </a:pPr>
+            <a:fld id="{73DEFC21-1ED7-11F7-272F-1F411061170C}" type="slidenum">
+              <a:rPr/>
+              <a:t/>
+            </a:fld>
+            <a:endParaRPr/>
+          </a:p>
+        </p:txBody>
+      </p:sp>
+    </p:spTree>
+  </p:cSld>
+  <p:clrMapOvr>
+    <a:masterClrMapping/>
+  </p:clrMapOvr>
+</p:notes>
+</file>
+
+<file path=ppt/notesSlides/notesSlide2.xml><?xml version="1.0" encoding="utf-8"?>
+<p:notes xmlns:a="http://schemas.openxmlformats.org/drawingml/2006/main" xmlns:r="http://schemas.openxmlformats.org/officeDocument/2006/relationships" xmlns:p="http://schemas.openxmlformats.org/presentationml/2006/main" xmlns:m="http://schemas.openxmlformats.org/officeDocument/2006/math" xmlns:w="http://schemas.openxmlformats.org/wordprocessingml/2006/main">
+  <p:cSld name="">
+    <p:spTree>
+      <p:nvGrpSpPr>
+        <p:cNvPr id="1" name=""/>
+        <p:cNvGrpSpPr/>
+        <p:nvPr/>
+      </p:nvGrpSpPr>
+      <p:grpSpPr bwMode="auto">
+        <a:xfrm>
+          <a:off x="0" y="0"/>
+          <a:ext cx="0" cy="0"/>
+          <a:chOff x="0" y="0"/>
+          <a:chExt cx="0" cy="0"/>
+        </a:xfrm>
+      </p:grpSpPr>
+      <p:sp>
+        <p:nvSpPr>
+          <p:cNvPr id="2" name="Slide Image Placeholder 1"/>
+          <p:cNvSpPr>
+            <a:spLocks noChangeAspect="1" noGrp="1" noRot="1"/>
+          </p:cNvSpPr>
+          <p:nvPr>
+            <p:ph type="sldImg"/>
+          </p:nvPr>
+        </p:nvSpPr>
+        <p:spPr bwMode="auto"/>
+      </p:sp>
+      <p:sp>
+        <p:nvSpPr>
+          <p:cNvPr id="3" name="Notes Placeholder 2"/>
+          <p:cNvSpPr>
+            <a:spLocks noGrp="1"/>
+          </p:cNvSpPr>
+          <p:nvPr>
+            <p:ph type="body" idx="1"/>
+          </p:nvPr>
+        </p:nvSpPr>
+        <p:spPr bwMode="auto"/>
+        <p:txBody>
+          <a:bodyPr/>
+          <a:lstStyle/>
+          <a:p>
+            <a:pPr>
+              <a:defRPr/>
+            </a:pPr>
+            <a:endParaRPr/>
+          </a:p>
+        </p:txBody>
+      </p:sp>
+      <p:sp>
+        <p:nvSpPr>
+          <p:cNvPr id="4" name="Slide Number Placeholder 3"/>
+          <p:cNvSpPr>
+            <a:spLocks noGrp="1"/>
+          </p:cNvSpPr>
+          <p:nvPr>
+            <p:ph type="sldNum" sz="quarter" idx="10"/>
+          </p:nvPr>
+        </p:nvSpPr>
+        <p:spPr bwMode="auto"/>
+        <p:txBody>
+          <a:bodyPr/>
+          <a:lstStyle/>
+          <a:p>
+            <a:pPr>
+              <a:defRPr/>
+            </a:pPr>
+            <a:fld id="{21DD9E21-7D81-24C4-F184-EDA8BE625910}" type="slidenum">
+              <a:rPr/>
+              <a:t/>
+            </a:fld>
+            <a:endParaRPr/>
+          </a:p>
+        </p:txBody>
+      </p:sp>
+    </p:spTree>
+  </p:cSld>
+  <p:clrMapOvr>
+    <a:masterClrMapping/>
+  </p:clrMapOvr>
+</p:notes>
+</file>
+
+<file path=ppt/notesSlides/notesSlide3.xml><?xml version="1.0" encoding="utf-8"?>
+<p:notes xmlns:a="http://schemas.openxmlformats.org/drawingml/2006/main" xmlns:r="http://schemas.openxmlformats.org/officeDocument/2006/relationships" xmlns:p="http://schemas.openxmlformats.org/presentationml/2006/main" xmlns:m="http://schemas.openxmlformats.org/officeDocument/2006/math" xmlns:w="http://schemas.openxmlformats.org/wordprocessingml/2006/main">
+  <p:cSld name="">
+    <p:spTree>
+      <p:nvGrpSpPr>
+        <p:cNvPr id="1" name=""/>
+        <p:cNvGrpSpPr/>
+        <p:nvPr/>
+      </p:nvGrpSpPr>
+      <p:grpSpPr bwMode="auto">
+        <a:xfrm>
+          <a:off x="0" y="0"/>
+          <a:ext cx="0" cy="0"/>
+          <a:chOff x="0" y="0"/>
+          <a:chExt cx="0" cy="0"/>
+        </a:xfrm>
+      </p:grpSpPr>
+      <p:sp>
+        <p:nvSpPr>
+          <p:cNvPr id="2" name="Slide Image Placeholder 1"/>
+          <p:cNvSpPr>
+            <a:spLocks noChangeAspect="1" noGrp="1" noRot="1"/>
+          </p:cNvSpPr>
+          <p:nvPr>
+            <p:ph type="sldImg"/>
+          </p:nvPr>
+        </p:nvSpPr>
+        <p:spPr bwMode="auto"/>
+      </p:sp>
+      <p:sp>
+        <p:nvSpPr>
+          <p:cNvPr id="3" name="Notes Placeholder 2"/>
+          <p:cNvSpPr>
+            <a:spLocks noGrp="1"/>
+          </p:cNvSpPr>
+          <p:nvPr>
+            <p:ph type="body" idx="1"/>
+          </p:nvPr>
+        </p:nvSpPr>
+        <p:spPr bwMode="auto"/>
+        <p:txBody>
+          <a:bodyPr/>
+          <a:lstStyle/>
+          <a:p>
+            <a:pPr>
+              <a:defRPr/>
+            </a:pPr>
+            <a:endParaRPr/>
+          </a:p>
+        </p:txBody>
+      </p:sp>
+      <p:sp>
+        <p:nvSpPr>
+          <p:cNvPr id="4" name="Slide Number Placeholder 3"/>
+          <p:cNvSpPr>
+            <a:spLocks noGrp="1"/>
+          </p:cNvSpPr>
+          <p:nvPr>
+            <p:ph type="sldNum" sz="quarter" idx="10"/>
+          </p:nvPr>
+        </p:nvSpPr>
+        <p:spPr bwMode="auto"/>
+        <p:txBody>
+          <a:bodyPr/>
+          <a:lstStyle/>
+          <a:p>
+            <a:pPr>
+              <a:defRPr/>
+            </a:pPr>
+            <a:fld id="{994AE41E-BAA7-E192-3C10-D761C7C20479}" type="slidenum">
+              <a:rPr/>
+              <a:t/>
+            </a:fld>
+            <a:endParaRPr/>
+          </a:p>
+        </p:txBody>
+      </p:sp>
+    </p:spTree>
+  </p:cSld>
+  <p:clrMapOvr>
+    <a:masterClrMapping/>
+  </p:clrMapOvr>
+</p:notes>
+</file>
+
+<file path=ppt/notesSlides/notesSlide4.xml><?xml version="1.0" encoding="utf-8"?>
+<p:notes xmlns:a="http://schemas.openxmlformats.org/drawingml/2006/main" xmlns:r="http://schemas.openxmlformats.org/officeDocument/2006/relationships" xmlns:p="http://schemas.openxmlformats.org/presentationml/2006/main" xmlns:m="http://schemas.openxmlformats.org/officeDocument/2006/math" xmlns:w="http://schemas.openxmlformats.org/wordprocessingml/2006/main">
+  <p:cSld name="">
+    <p:spTree>
+      <p:nvGrpSpPr>
+        <p:cNvPr id="1" name=""/>
+        <p:cNvGrpSpPr/>
+        <p:nvPr/>
+      </p:nvGrpSpPr>
+      <p:grpSpPr bwMode="auto">
+        <a:xfrm>
+          <a:off x="0" y="0"/>
+          <a:ext cx="0" cy="0"/>
+          <a:chOff x="0" y="0"/>
+          <a:chExt cx="0" cy="0"/>
+        </a:xfrm>
+      </p:grpSpPr>
+      <p:sp>
+        <p:nvSpPr>
+          <p:cNvPr id="2" name="Slide Image Placeholder 1"/>
+          <p:cNvSpPr>
+            <a:spLocks noChangeAspect="1" noGrp="1" noRot="1"/>
+          </p:cNvSpPr>
+          <p:nvPr>
+            <p:ph type="sldImg"/>
+          </p:nvPr>
+        </p:nvSpPr>
+        <p:spPr bwMode="auto"/>
+      </p:sp>
+      <p:sp>
+        <p:nvSpPr>
+          <p:cNvPr id="3" name="Notes Placeholder 2"/>
+          <p:cNvSpPr>
+            <a:spLocks noGrp="1"/>
+          </p:cNvSpPr>
+          <p:nvPr>
+            <p:ph type="body" idx="1"/>
+          </p:nvPr>
+        </p:nvSpPr>
+        <p:spPr bwMode="auto"/>
+        <p:txBody>
+          <a:bodyPr/>
+          <a:lstStyle/>
+          <a:p>
+            <a:pPr>
+              <a:defRPr/>
+            </a:pPr>
+            <a:endParaRPr/>
+          </a:p>
+        </p:txBody>
+      </p:sp>
+      <p:sp>
+        <p:nvSpPr>
+          <p:cNvPr id="4" name="Slide Number Placeholder 3"/>
+          <p:cNvSpPr>
+            <a:spLocks noGrp="1"/>
+          </p:cNvSpPr>
+          <p:nvPr>
+            <p:ph type="sldNum" sz="quarter" idx="10"/>
+          </p:nvPr>
+        </p:nvSpPr>
+        <p:spPr bwMode="auto"/>
+        <p:txBody>
+          <a:bodyPr/>
+          <a:lstStyle/>
+          <a:p>
+            <a:pPr>
+              <a:defRPr/>
+            </a:pPr>
+            <a:fld id="{C1D6A00D-25E7-E371-98E3-96043B0A1ED1}" type="slidenum">
+              <a:rPr/>
+              <a:t/>
+            </a:fld>
+            <a:endParaRPr/>
+          </a:p>
+        </p:txBody>
+      </p:sp>
+    </p:spTree>
+  </p:cSld>
+  <p:clrMapOvr>
+    <a:masterClrMapping/>
+  </p:clrMapOvr>
+</p:notes>
+</file>
+
+<file path=ppt/notesSlides/notesSlide5.xml><?xml version="1.0" encoding="utf-8"?>
+<p:notes xmlns:a="http://schemas.openxmlformats.org/drawingml/2006/main" xmlns:r="http://schemas.openxmlformats.org/officeDocument/2006/relationships" xmlns:p="http://schemas.openxmlformats.org/presentationml/2006/main" xmlns:m="http://schemas.openxmlformats.org/officeDocument/2006/math" xmlns:w="http://schemas.openxmlformats.org/wordprocessingml/2006/main">
+  <p:cSld name="">
+    <p:spTree>
+      <p:nvGrpSpPr>
+        <p:cNvPr id="1" name=""/>
+        <p:cNvGrpSpPr/>
+        <p:nvPr/>
+      </p:nvGrpSpPr>
+      <p:grpSpPr bwMode="auto">
+        <a:xfrm>
+          <a:off x="0" y="0"/>
+          <a:ext cx="0" cy="0"/>
+          <a:chOff x="0" y="0"/>
+          <a:chExt cx="0" cy="0"/>
+        </a:xfrm>
+      </p:grpSpPr>
+      <p:sp>
+        <p:nvSpPr>
+          <p:cNvPr id="2" name="Slide Image Placeholder 1"/>
+          <p:cNvSpPr>
+            <a:spLocks noChangeAspect="1" noGrp="1" noRot="1"/>
+          </p:cNvSpPr>
+          <p:nvPr>
+            <p:ph type="sldImg"/>
+          </p:nvPr>
+        </p:nvSpPr>
+        <p:spPr bwMode="auto"/>
+      </p:sp>
+      <p:sp>
+        <p:nvSpPr>
+          <p:cNvPr id="3" name="Notes Placeholder 2"/>
+          <p:cNvSpPr>
+            <a:spLocks noGrp="1"/>
+          </p:cNvSpPr>
+          <p:nvPr>
+            <p:ph type="body" idx="1"/>
+          </p:nvPr>
+        </p:nvSpPr>
+        <p:spPr bwMode="auto"/>
+        <p:txBody>
+          <a:bodyPr/>
+          <a:lstStyle/>
+          <a:p>
+            <a:pPr>
+              <a:defRPr/>
+            </a:pPr>
+            <a:endParaRPr/>
+          </a:p>
+        </p:txBody>
+      </p:sp>
+      <p:sp>
+        <p:nvSpPr>
+          <p:cNvPr id="4" name="Slide Number Placeholder 3"/>
+          <p:cNvSpPr>
+            <a:spLocks noGrp="1"/>
+          </p:cNvSpPr>
+          <p:nvPr>
+            <p:ph type="sldNum" sz="quarter" idx="10"/>
+          </p:nvPr>
+        </p:nvSpPr>
+        <p:spPr bwMode="auto"/>
+        <p:txBody>
+          <a:bodyPr/>
+          <a:lstStyle/>
+          <a:p>
+            <a:pPr>
+              <a:defRPr/>
+            </a:pPr>
+            <a:fld id="{5CEDE4CC-651A-F199-3794-129D30CAB571}" type="slidenum">
+              <a:rPr/>
+              <a:t/>
+            </a:fld>
+            <a:endParaRPr/>
+          </a:p>
+        </p:txBody>
+      </p:sp>
+    </p:spTree>
+  </p:cSld>
+  <p:clrMapOvr>
+    <a:masterClrMapping/>
+  </p:clrMapOvr>
+</p:notes>
+</file>
+
+<file path=ppt/notesSlides/notesSlide6.xml><?xml version="1.0" encoding="utf-8"?>
+<p:notes xmlns:a="http://schemas.openxmlformats.org/drawingml/2006/main" xmlns:r="http://schemas.openxmlformats.org/officeDocument/2006/relationships" xmlns:p="http://schemas.openxmlformats.org/presentationml/2006/main" xmlns:m="http://schemas.openxmlformats.org/officeDocument/2006/math" xmlns:w="http://schemas.openxmlformats.org/wordprocessingml/2006/main">
+  <p:cSld name="">
+    <p:spTree>
+      <p:nvGrpSpPr>
+        <p:cNvPr id="1" name=""/>
+        <p:cNvGrpSpPr/>
+        <p:nvPr/>
+      </p:nvGrpSpPr>
+      <p:grpSpPr bwMode="auto">
+        <a:xfrm>
+          <a:off x="0" y="0"/>
+          <a:ext cx="0" cy="0"/>
+          <a:chOff x="0" y="0"/>
+          <a:chExt cx="0" cy="0"/>
+        </a:xfrm>
+      </p:grpSpPr>
+      <p:sp>
+        <p:nvSpPr>
+          <p:cNvPr id="2" name="Slide Image Placeholder 1"/>
+          <p:cNvSpPr>
+            <a:spLocks noChangeAspect="1" noGrp="1" noRot="1"/>
+          </p:cNvSpPr>
+          <p:nvPr>
+            <p:ph type="sldImg"/>
+          </p:nvPr>
+        </p:nvSpPr>
+        <p:spPr bwMode="auto"/>
+      </p:sp>
+      <p:sp>
+        <p:nvSpPr>
+          <p:cNvPr id="3" name="Notes Placeholder 2"/>
+          <p:cNvSpPr>
+            <a:spLocks noGrp="1"/>
+          </p:cNvSpPr>
+          <p:nvPr>
+            <p:ph type="body" idx="1"/>
+          </p:nvPr>
+        </p:nvSpPr>
+        <p:spPr bwMode="auto"/>
+        <p:txBody>
+          <a:bodyPr/>
+          <a:lstStyle/>
+          <a:p>
+            <a:pPr>
+              <a:defRPr/>
+            </a:pPr>
+            <a:endParaRPr/>
+          </a:p>
+        </p:txBody>
+      </p:sp>
+      <p:sp>
+        <p:nvSpPr>
+          <p:cNvPr id="4" name="Slide Number Placeholder 3"/>
+          <p:cNvSpPr>
+            <a:spLocks noGrp="1"/>
+          </p:cNvSpPr>
+          <p:nvPr>
+            <p:ph type="sldNum" sz="quarter" idx="10"/>
+          </p:nvPr>
+        </p:nvSpPr>
+        <p:spPr bwMode="auto"/>
+        <p:txBody>
+          <a:bodyPr/>
+          <a:lstStyle/>
+          <a:p>
+            <a:pPr>
+              <a:defRPr/>
+            </a:pPr>
+            <a:fld id="{5012382F-5111-7A62-9F4C-C88CF4335F4B}" type="slidenum">
+              <a:rPr/>
+              <a:t/>
+            </a:fld>
+            <a:endParaRPr/>
+          </a:p>
+        </p:txBody>
+      </p:sp>
+    </p:spTree>
+  </p:cSld>
+  <p:clrMapOvr>
+    <a:masterClrMapping/>
+  </p:clrMapOvr>
+</p:notes>
+</file>
+
+<file path=ppt/notesSlides/notesSlide7.xml><?xml version="1.0" encoding="utf-8"?>
+<p:notes xmlns:a="http://schemas.openxmlformats.org/drawingml/2006/main" xmlns:r="http://schemas.openxmlformats.org/officeDocument/2006/relationships" xmlns:p="http://schemas.openxmlformats.org/presentationml/2006/main" xmlns:m="http://schemas.openxmlformats.org/officeDocument/2006/math" xmlns:w="http://schemas.openxmlformats.org/wordprocessingml/2006/main">
+  <p:cSld name="">
+    <p:spTree>
+      <p:nvGrpSpPr>
+        <p:cNvPr id="1" name=""/>
+        <p:cNvGrpSpPr/>
+        <p:nvPr/>
+      </p:nvGrpSpPr>
+      <p:grpSpPr bwMode="auto">
+        <a:xfrm>
+          <a:off x="0" y="0"/>
+          <a:ext cx="0" cy="0"/>
+          <a:chOff x="0" y="0"/>
+          <a:chExt cx="0" cy="0"/>
+        </a:xfrm>
+      </p:grpSpPr>
+      <p:sp>
+        <p:nvSpPr>
+          <p:cNvPr id="2" name="Slide Image Placeholder 1"/>
+          <p:cNvSpPr>
+            <a:spLocks noChangeAspect="1" noGrp="1" noRot="1"/>
+          </p:cNvSpPr>
+          <p:nvPr>
+            <p:ph type="sldImg"/>
+          </p:nvPr>
+        </p:nvSpPr>
+        <p:spPr bwMode="auto"/>
+      </p:sp>
+      <p:sp>
+        <p:nvSpPr>
+          <p:cNvPr id="3" name="Notes Placeholder 2"/>
+          <p:cNvSpPr>
+            <a:spLocks noGrp="1"/>
+          </p:cNvSpPr>
+          <p:nvPr>
+            <p:ph type="body" idx="1"/>
+          </p:nvPr>
+        </p:nvSpPr>
+        <p:spPr bwMode="auto"/>
+        <p:txBody>
+          <a:bodyPr/>
+          <a:lstStyle/>
+          <a:p>
+            <a:pPr>
+              <a:defRPr/>
+            </a:pPr>
+            <a:endParaRPr/>
+          </a:p>
+        </p:txBody>
+      </p:sp>
+      <p:sp>
+        <p:nvSpPr>
+          <p:cNvPr id="4" name="Slide Number Placeholder 3"/>
+          <p:cNvSpPr>
+            <a:spLocks noGrp="1"/>
+          </p:cNvSpPr>
+          <p:nvPr>
+            <p:ph type="sldNum" sz="quarter" idx="10"/>
+          </p:nvPr>
+        </p:nvSpPr>
+        <p:spPr bwMode="auto"/>
+        <p:txBody>
+          <a:bodyPr/>
+          <a:lstStyle/>
+          <a:p>
+            <a:pPr>
+              <a:defRPr/>
+            </a:pPr>
+            <a:fld id="{2026E90B-3431-0D67-1756-3377BD47F8C0}" type="slidenum">
+              <a:rPr/>
+              <a:t/>
+            </a:fld>
+            <a:endParaRPr/>
+          </a:p>
+        </p:txBody>
+      </p:sp>
+    </p:spTree>
+  </p:cSld>
+  <p:clrMapOvr>
+    <a:masterClrMapping/>
+  </p:clrMapOvr>
+</p:notes>
+</file>
+
+<file path=ppt/notesSlides/notesSlide8.xml><?xml version="1.0" encoding="utf-8"?>
+<p:notes xmlns:a="http://schemas.openxmlformats.org/drawingml/2006/main" xmlns:r="http://schemas.openxmlformats.org/officeDocument/2006/relationships" xmlns:p="http://schemas.openxmlformats.org/presentationml/2006/main" xmlns:m="http://schemas.openxmlformats.org/officeDocument/2006/math" xmlns:w="http://schemas.openxmlformats.org/wordprocessingml/2006/main">
+  <p:cSld name="">
+    <p:spTree>
+      <p:nvGrpSpPr>
+        <p:cNvPr id="1" name=""/>
+        <p:cNvGrpSpPr/>
+        <p:nvPr/>
+      </p:nvGrpSpPr>
+      <p:grpSpPr bwMode="auto">
+        <a:xfrm>
+          <a:off x="0" y="0"/>
+          <a:ext cx="0" cy="0"/>
+          <a:chOff x="0" y="0"/>
+          <a:chExt cx="0" cy="0"/>
+        </a:xfrm>
+      </p:grpSpPr>
+      <p:sp>
+        <p:nvSpPr>
+          <p:cNvPr id="2" name="Slide Image Placeholder 1"/>
+          <p:cNvSpPr>
+            <a:spLocks noChangeAspect="1" noGrp="1" noRot="1"/>
+          </p:cNvSpPr>
+          <p:nvPr>
+            <p:ph type="sldImg"/>
+          </p:nvPr>
+        </p:nvSpPr>
+        <p:spPr bwMode="auto"/>
+      </p:sp>
+      <p:sp>
+        <p:nvSpPr>
+          <p:cNvPr id="3" name="Notes Placeholder 2"/>
+          <p:cNvSpPr>
+            <a:spLocks noGrp="1"/>
+          </p:cNvSpPr>
+          <p:nvPr>
+            <p:ph type="body" idx="1"/>
+          </p:nvPr>
+        </p:nvSpPr>
+        <p:spPr bwMode="auto"/>
+        <p:txBody>
+          <a:bodyPr/>
+          <a:lstStyle/>
+          <a:p>
+            <a:pPr>
+              <a:defRPr/>
+            </a:pPr>
+            <a:endParaRPr/>
+          </a:p>
+        </p:txBody>
+      </p:sp>
+      <p:sp>
+        <p:nvSpPr>
+          <p:cNvPr id="4" name="Slide Number Placeholder 3"/>
+          <p:cNvSpPr>
+            <a:spLocks noGrp="1"/>
+          </p:cNvSpPr>
+          <p:nvPr>
+            <p:ph type="sldNum" sz="quarter" idx="10"/>
+          </p:nvPr>
+        </p:nvSpPr>
+        <p:spPr bwMode="auto"/>
+        <p:txBody>
+          <a:bodyPr/>
+          <a:lstStyle/>
+          <a:p>
+            <a:pPr>
+              <a:defRPr/>
+            </a:pPr>
+            <a:fld id="{ECAC1574-5586-50D0-794B-091D483F51F9}" type="slidenum">
+              <a:rPr/>
+              <a:t/>
+            </a:fld>
+            <a:endParaRPr/>
+          </a:p>
+        </p:txBody>
+      </p:sp>
+    </p:spTree>
+  </p:cSld>
+  <p:clrMapOvr>
+    <a:masterClrMapping/>
+  </p:clrMapOvr>
+</p:notes>
+</file>
+
+<file path=ppt/notesSlides/notesSlide9.xml><?xml version="1.0" encoding="utf-8"?>
+<p:notes xmlns:a="http://schemas.openxmlformats.org/drawingml/2006/main" xmlns:r="http://schemas.openxmlformats.org/officeDocument/2006/relationships" xmlns:p="http://schemas.openxmlformats.org/presentationml/2006/main" xmlns:m="http://schemas.openxmlformats.org/officeDocument/2006/math" xmlns:w="http://schemas.openxmlformats.org/wordprocessingml/2006/main">
+  <p:cSld name="">
+    <p:spTree>
+      <p:nvGrpSpPr>
+        <p:cNvPr id="1" name=""/>
+        <p:cNvGrpSpPr/>
+        <p:nvPr/>
+      </p:nvGrpSpPr>
+      <p:grpSpPr bwMode="auto">
+        <a:xfrm>
+          <a:off x="0" y="0"/>
+          <a:ext cx="0" cy="0"/>
+          <a:chOff x="0" y="0"/>
+          <a:chExt cx="0" cy="0"/>
+        </a:xfrm>
+      </p:grpSpPr>
+      <p:sp>
+        <p:nvSpPr>
+          <p:cNvPr id="2" name="Slide Image Placeholder 1"/>
+          <p:cNvSpPr>
+            <a:spLocks noChangeAspect="1" noGrp="1" noRot="1"/>
+          </p:cNvSpPr>
+          <p:nvPr>
+            <p:ph type="sldImg"/>
+          </p:nvPr>
+        </p:nvSpPr>
+        <p:spPr bwMode="auto"/>
+      </p:sp>
+      <p:sp>
+        <p:nvSpPr>
+          <p:cNvPr id="3" name="Notes Placeholder 2"/>
+          <p:cNvSpPr>
+            <a:spLocks noGrp="1"/>
+          </p:cNvSpPr>
+          <p:nvPr>
+            <p:ph type="body" idx="1"/>
+          </p:nvPr>
+        </p:nvSpPr>
+        <p:spPr bwMode="auto"/>
+        <p:txBody>
+          <a:bodyPr/>
+          <a:lstStyle/>
+          <a:p>
+            <a:pPr>
+              <a:defRPr/>
+            </a:pPr>
+            <a:endParaRPr/>
+          </a:p>
+        </p:txBody>
+      </p:sp>
+      <p:sp>
+        <p:nvSpPr>
+          <p:cNvPr id="4" name="Slide Number Placeholder 3"/>
+          <p:cNvSpPr>
+            <a:spLocks noGrp="1"/>
+          </p:cNvSpPr>
+          <p:nvPr>
+            <p:ph type="sldNum" sz="quarter" idx="10"/>
+          </p:nvPr>
+        </p:nvSpPr>
+        <p:spPr bwMode="auto"/>
+        <p:txBody>
+          <a:bodyPr/>
+          <a:lstStyle/>
+          <a:p>
+            <a:pPr>
+              <a:defRPr/>
+            </a:pPr>
+            <a:fld id="{CC297816-FF2F-6652-4C99-83BFE3275C83}" type="slidenum">
+              <a:rPr/>
+              <a:t/>
+            </a:fld>
+            <a:endParaRPr/>
+          </a:p>
+        </p:txBody>
+      </p:sp>
+    </p:spTree>
+  </p:cSld>
+  <p:clrMapOvr>
+    <a:masterClrMapping/>
+  </p:clrMapOvr>
+</p:notes>
 </file>
 
 <file path=ppt/slideLayouts/slideLayout1.xml><?xml version="1.0" encoding="utf-8"?>
-<p:sldLayout xmlns:a="http://schemas.openxmlformats.org/drawingml/2006/main" xmlns:r="http://schemas.openxmlformats.org/officeDocument/2006/relationships" xmlns:p="http://schemas.openxmlformats.org/presentationml/2006/main" type="title" preserve="1">
+<p:sldLayout xmlns:a="http://schemas.openxmlformats.org/drawingml/2006/main" xmlns:r="http://schemas.openxmlformats.org/officeDocument/2006/relationships" xmlns:p="http://schemas.openxmlformats.org/presentationml/2006/main" xmlns:m="http://schemas.openxmlformats.org/officeDocument/2006/math" xmlns:w="http://schemas.openxmlformats.org/wordprocessingml/2006/main" matchingName="" preserve="1" showMasterPhAnim="0" showMasterSp="1" type="title" userDrawn="1">
   <p:cSld name="Title Slide">
     <p:spTree>
       <p:nvGrpSpPr>
@@ -136,7 +1470,7 @@
         <p:cNvGrpSpPr/>
         <p:nvPr/>
       </p:nvGrpSpPr>
-      <p:grpSpPr>
+      <p:grpSpPr bwMode="auto">
         <a:xfrm>
           <a:off x="0" y="0"/>
           <a:ext cx="0" cy="0"/>
@@ -146,7 +1480,7 @@
       </p:grpSpPr>
       <p:sp>
         <p:nvSpPr>
-          <p:cNvPr id="2" name="Title 1"/>
+          <p:cNvPr id="138270321" name="Title 1"/>
           <p:cNvSpPr>
             <a:spLocks noGrp="1"/>
           </p:cNvSpPr>
@@ -154,7 +1488,7 @@
             <p:ph type="ctrTitle"/>
           </p:nvPr>
         </p:nvSpPr>
-        <p:spPr>
+        <p:spPr bwMode="auto">
           <a:xfrm>
             <a:off x="1524000" y="1122363"/>
             <a:ext cx="9144000" cy="2387600"/>
@@ -168,17 +1502,20 @@
             </a:lvl1pPr>
           </a:lstStyle>
           <a:p>
+            <a:pPr>
+              <a:defRPr/>
+            </a:pPr>
             <a:r>
               <a:rPr lang="en-US"/>
               <a:t>Click to edit Master title style</a:t>
             </a:r>
-            <a:endParaRPr lang="en-US" dirty="0"/>
-          </a:p>
-        </p:txBody>
-      </p:sp>
-      <p:sp>
-        <p:nvSpPr>
-          <p:cNvPr id="3" name="Subtitle 2"/>
+            <a:endParaRPr lang="en-US"/>
+          </a:p>
+        </p:txBody>
+      </p:sp>
+      <p:sp>
+        <p:nvSpPr>
+          <p:cNvPr id="93917814" name="Subtitle 2"/>
           <p:cNvSpPr>
             <a:spLocks noGrp="1"/>
           </p:cNvSpPr>
@@ -186,7 +1523,7 @@
             <p:ph type="subTitle" idx="1"/>
           </p:nvPr>
         </p:nvSpPr>
-        <p:spPr>
+        <p:spPr bwMode="auto">
           <a:xfrm>
             <a:off x="1524000" y="3602038"/>
             <a:ext cx="9144000" cy="1655762"/>
@@ -233,17 +1570,20 @@
             </a:lvl9pPr>
           </a:lstStyle>
           <a:p>
+            <a:pPr>
+              <a:defRPr/>
+            </a:pPr>
             <a:r>
               <a:rPr lang="en-US"/>
               <a:t>Click to edit Master subtitle style</a:t>
             </a:r>
-            <a:endParaRPr lang="en-US" dirty="0"/>
-          </a:p>
-        </p:txBody>
-      </p:sp>
-      <p:sp>
-        <p:nvSpPr>
-          <p:cNvPr id="4" name="Date Placeholder 3"/>
+            <a:endParaRPr lang="en-US"/>
+          </a:p>
+        </p:txBody>
+      </p:sp>
+      <p:sp>
+        <p:nvSpPr>
+          <p:cNvPr id="451244109" name="Date Placeholder 3"/>
           <p:cNvSpPr>
             <a:spLocks noGrp="1"/>
           </p:cNvSpPr>
@@ -251,13 +1591,16 @@
             <p:ph type="dt" sz="half" idx="10"/>
           </p:nvPr>
         </p:nvSpPr>
-        <p:spPr/>
-        <p:txBody>
-          <a:bodyPr/>
-          <a:lstStyle/>
-          <a:p>
+        <p:spPr bwMode="auto"/>
+        <p:txBody>
+          <a:bodyPr/>
+          <a:lstStyle/>
+          <a:p>
+            <a:pPr>
+              <a:defRPr/>
+            </a:pPr>
             <a:fld id="{846CE7D5-CF57-46EF-B807-FDD0502418D4}" type="datetimeFigureOut">
-              <a:rPr lang="en-US" smtClean="0"/>
+              <a:rPr lang="en-US"/>
               <a:t>5/16/2026</a:t>
             </a:fld>
             <a:endParaRPr lang="en-US"/>
@@ -266,7 +1609,7 @@
       </p:sp>
       <p:sp>
         <p:nvSpPr>
-          <p:cNvPr id="5" name="Footer Placeholder 4"/>
+          <p:cNvPr id="1585971204" name="Footer Placeholder 4"/>
           <p:cNvSpPr>
             <a:spLocks noGrp="1"/>
           </p:cNvSpPr>
@@ -274,18 +1617,21 @@
             <p:ph type="ftr" sz="quarter" idx="11"/>
           </p:nvPr>
         </p:nvSpPr>
-        <p:spPr/>
-        <p:txBody>
-          <a:bodyPr/>
-          <a:lstStyle/>
-          <a:p>
-            <a:endParaRPr lang="en-US"/>
-          </a:p>
-        </p:txBody>
-      </p:sp>
-      <p:sp>
-        <p:nvSpPr>
-          <p:cNvPr id="6" name="Slide Number Placeholder 5"/>
+        <p:spPr bwMode="auto"/>
+        <p:txBody>
+          <a:bodyPr/>
+          <a:lstStyle/>
+          <a:p>
+            <a:pPr>
+              <a:defRPr/>
+            </a:pPr>
+            <a:endParaRPr lang="en-US"/>
+          </a:p>
+        </p:txBody>
+      </p:sp>
+      <p:sp>
+        <p:nvSpPr>
+          <p:cNvPr id="1913215343" name="Slide Number Placeholder 5"/>
           <p:cNvSpPr>
             <a:spLocks noGrp="1"/>
           </p:cNvSpPr>
@@ -293,13 +1639,16 @@
             <p:ph type="sldNum" sz="quarter" idx="12"/>
           </p:nvPr>
         </p:nvSpPr>
-        <p:spPr/>
-        <p:txBody>
-          <a:bodyPr/>
-          <a:lstStyle/>
-          <a:p>
+        <p:spPr bwMode="auto"/>
+        <p:txBody>
+          <a:bodyPr/>
+          <a:lstStyle/>
+          <a:p>
+            <a:pPr>
+              <a:defRPr/>
+            </a:pPr>
             <a:fld id="{330EA680-D336-4FF7-8B7A-9848BB0A1C32}" type="slidenum">
-              <a:rPr lang="en-US" smtClean="0"/>
+              <a:rPr lang="en-US"/>
               <a:t>‹#›</a:t>
             </a:fld>
             <a:endParaRPr lang="en-US"/>
@@ -307,11 +1656,6 @@
         </p:txBody>
       </p:sp>
     </p:spTree>
-    <p:extLst>
-      <p:ext uri="{BB962C8B-B14F-4D97-AF65-F5344CB8AC3E}">
-        <p14:creationId xmlns:p14="http://schemas.microsoft.com/office/powerpoint/2010/main" val="2385387890"/>
-      </p:ext>
-    </p:extLst>
   </p:cSld>
   <p:clrMapOvr>
     <a:masterClrMapping/>
@@ -320,7 +1664,7 @@
 </file>
 
 <file path=ppt/slideLayouts/slideLayout10.xml><?xml version="1.0" encoding="utf-8"?>
-<p:sldLayout xmlns:a="http://schemas.openxmlformats.org/drawingml/2006/main" xmlns:r="http://schemas.openxmlformats.org/officeDocument/2006/relationships" xmlns:p="http://schemas.openxmlformats.org/presentationml/2006/main" type="vertTx" preserve="1">
+<p:sldLayout xmlns:a="http://schemas.openxmlformats.org/drawingml/2006/main" xmlns:r="http://schemas.openxmlformats.org/officeDocument/2006/relationships" xmlns:p="http://schemas.openxmlformats.org/presentationml/2006/main" xmlns:m="http://schemas.openxmlformats.org/officeDocument/2006/math" xmlns:w="http://schemas.openxmlformats.org/wordprocessingml/2006/main" matchingName="" preserve="1" showMasterPhAnim="0" showMasterSp="1" type="vertTx" userDrawn="1">
   <p:cSld name="Title and Vertical Text">
     <p:spTree>
       <p:nvGrpSpPr>
@@ -328,7 +1672,7 @@
         <p:cNvGrpSpPr/>
         <p:nvPr/>
       </p:nvGrpSpPr>
-      <p:grpSpPr>
+      <p:grpSpPr bwMode="auto">
         <a:xfrm>
           <a:off x="0" y="0"/>
           <a:ext cx="0" cy="0"/>
@@ -338,7 +1682,7 @@
       </p:grpSpPr>
       <p:sp>
         <p:nvSpPr>
-          <p:cNvPr id="2" name="Title 1"/>
+          <p:cNvPr id="1332958981" name="Title 1"/>
           <p:cNvSpPr>
             <a:spLocks noGrp="1"/>
           </p:cNvSpPr>
@@ -346,22 +1690,25 @@
             <p:ph type="title"/>
           </p:nvPr>
         </p:nvSpPr>
-        <p:spPr/>
-        <p:txBody>
-          <a:bodyPr/>
-          <a:lstStyle/>
-          <a:p>
+        <p:spPr bwMode="auto"/>
+        <p:txBody>
+          <a:bodyPr/>
+          <a:lstStyle/>
+          <a:p>
+            <a:pPr>
+              <a:defRPr/>
+            </a:pPr>
             <a:r>
               <a:rPr lang="en-US"/>
               <a:t>Click to edit Master title style</a:t>
             </a:r>
-            <a:endParaRPr lang="en-US" dirty="0"/>
-          </a:p>
-        </p:txBody>
-      </p:sp>
-      <p:sp>
-        <p:nvSpPr>
-          <p:cNvPr id="3" name="Vertical Text Placeholder 2"/>
+            <a:endParaRPr lang="en-US"/>
+          </a:p>
+        </p:txBody>
+      </p:sp>
+      <p:sp>
+        <p:nvSpPr>
+          <p:cNvPr id="247954118" name="Vertical Text Placeholder 2"/>
           <p:cNvSpPr>
             <a:spLocks noGrp="1"/>
           </p:cNvSpPr>
@@ -369,51 +1716,65 @@
             <p:ph type="body" orient="vert" idx="1"/>
           </p:nvPr>
         </p:nvSpPr>
-        <p:spPr/>
+        <p:spPr bwMode="auto"/>
         <p:txBody>
           <a:bodyPr vert="eaVert"/>
           <a:lstStyle/>
           <a:p>
-            <a:pPr lvl="0"/>
+            <a:pPr lvl="0">
+              <a:defRPr/>
+            </a:pPr>
             <a:r>
               <a:rPr lang="en-US"/>
               <a:t>Click to edit Master text styles</a:t>
             </a:r>
-          </a:p>
-          <a:p>
-            <a:pPr lvl="1"/>
+            <a:endParaRPr/>
+          </a:p>
+          <a:p>
+            <a:pPr lvl="1">
+              <a:defRPr/>
+            </a:pPr>
             <a:r>
               <a:rPr lang="en-US"/>
               <a:t>Second level</a:t>
             </a:r>
-          </a:p>
-          <a:p>
-            <a:pPr lvl="2"/>
+            <a:endParaRPr/>
+          </a:p>
+          <a:p>
+            <a:pPr lvl="2">
+              <a:defRPr/>
+            </a:pPr>
             <a:r>
               <a:rPr lang="en-US"/>
               <a:t>Third level</a:t>
             </a:r>
-          </a:p>
-          <a:p>
-            <a:pPr lvl="3"/>
+            <a:endParaRPr/>
+          </a:p>
+          <a:p>
+            <a:pPr lvl="3">
+              <a:defRPr/>
+            </a:pPr>
             <a:r>
               <a:rPr lang="en-US"/>
               <a:t>Fourth level</a:t>
             </a:r>
-          </a:p>
-          <a:p>
-            <a:pPr lvl="4"/>
+            <a:endParaRPr/>
+          </a:p>
+          <a:p>
+            <a:pPr lvl="4">
+              <a:defRPr/>
+            </a:pPr>
             <a:r>
               <a:rPr lang="en-US"/>
               <a:t>Fifth level</a:t>
             </a:r>
-            <a:endParaRPr lang="en-US" dirty="0"/>
-          </a:p>
-        </p:txBody>
-      </p:sp>
-      <p:sp>
-        <p:nvSpPr>
-          <p:cNvPr id="4" name="Date Placeholder 3"/>
+            <a:endParaRPr lang="en-US"/>
+          </a:p>
+        </p:txBody>
+      </p:sp>
+      <p:sp>
+        <p:nvSpPr>
+          <p:cNvPr id="9626538" name="Date Placeholder 3"/>
           <p:cNvSpPr>
             <a:spLocks noGrp="1"/>
           </p:cNvSpPr>
@@ -421,13 +1782,16 @@
             <p:ph type="dt" sz="half" idx="10"/>
           </p:nvPr>
         </p:nvSpPr>
-        <p:spPr/>
-        <p:txBody>
-          <a:bodyPr/>
-          <a:lstStyle/>
-          <a:p>
+        <p:spPr bwMode="auto"/>
+        <p:txBody>
+          <a:bodyPr/>
+          <a:lstStyle/>
+          <a:p>
+            <a:pPr>
+              <a:defRPr/>
+            </a:pPr>
             <a:fld id="{846CE7D5-CF57-46EF-B807-FDD0502418D4}" type="datetimeFigureOut">
-              <a:rPr lang="en-US" smtClean="0"/>
+              <a:rPr lang="en-US"/>
               <a:t>5/16/2026</a:t>
             </a:fld>
             <a:endParaRPr lang="en-US"/>
@@ -436,7 +1800,7 @@
       </p:sp>
       <p:sp>
         <p:nvSpPr>
-          <p:cNvPr id="5" name="Footer Placeholder 4"/>
+          <p:cNvPr id="2051712459" name="Footer Placeholder 4"/>
           <p:cNvSpPr>
             <a:spLocks noGrp="1"/>
           </p:cNvSpPr>
@@ -444,18 +1808,21 @@
             <p:ph type="ftr" sz="quarter" idx="11"/>
           </p:nvPr>
         </p:nvSpPr>
-        <p:spPr/>
-        <p:txBody>
-          <a:bodyPr/>
-          <a:lstStyle/>
-          <a:p>
-            <a:endParaRPr lang="en-US"/>
-          </a:p>
-        </p:txBody>
-      </p:sp>
-      <p:sp>
-        <p:nvSpPr>
-          <p:cNvPr id="6" name="Slide Number Placeholder 5"/>
+        <p:spPr bwMode="auto"/>
+        <p:txBody>
+          <a:bodyPr/>
+          <a:lstStyle/>
+          <a:p>
+            <a:pPr>
+              <a:defRPr/>
+            </a:pPr>
+            <a:endParaRPr lang="en-US"/>
+          </a:p>
+        </p:txBody>
+      </p:sp>
+      <p:sp>
+        <p:nvSpPr>
+          <p:cNvPr id="590094568" name="Slide Number Placeholder 5"/>
           <p:cNvSpPr>
             <a:spLocks noGrp="1"/>
           </p:cNvSpPr>
@@ -463,13 +1830,16 @@
             <p:ph type="sldNum" sz="quarter" idx="12"/>
           </p:nvPr>
         </p:nvSpPr>
-        <p:spPr/>
-        <p:txBody>
-          <a:bodyPr/>
-          <a:lstStyle/>
-          <a:p>
+        <p:spPr bwMode="auto"/>
+        <p:txBody>
+          <a:bodyPr/>
+          <a:lstStyle/>
+          <a:p>
+            <a:pPr>
+              <a:defRPr/>
+            </a:pPr>
             <a:fld id="{330EA680-D336-4FF7-8B7A-9848BB0A1C32}" type="slidenum">
-              <a:rPr lang="en-US" smtClean="0"/>
+              <a:rPr lang="en-US"/>
               <a:t>‹#›</a:t>
             </a:fld>
             <a:endParaRPr lang="en-US"/>
@@ -477,11 +1847,6 @@
         </p:txBody>
       </p:sp>
     </p:spTree>
-    <p:extLst>
-      <p:ext uri="{BB962C8B-B14F-4D97-AF65-F5344CB8AC3E}">
-        <p14:creationId xmlns:p14="http://schemas.microsoft.com/office/powerpoint/2010/main" val="2202905451"/>
-      </p:ext>
-    </p:extLst>
   </p:cSld>
   <p:clrMapOvr>
     <a:masterClrMapping/>
@@ -490,7 +1855,7 @@
 </file>
 
 <file path=ppt/slideLayouts/slideLayout11.xml><?xml version="1.0" encoding="utf-8"?>
-<p:sldLayout xmlns:a="http://schemas.openxmlformats.org/drawingml/2006/main" xmlns:r="http://schemas.openxmlformats.org/officeDocument/2006/relationships" xmlns:p="http://schemas.openxmlformats.org/presentationml/2006/main" type="vertTitleAndTx" preserve="1">
+<p:sldLayout xmlns:a="http://schemas.openxmlformats.org/drawingml/2006/main" xmlns:r="http://schemas.openxmlformats.org/officeDocument/2006/relationships" xmlns:p="http://schemas.openxmlformats.org/presentationml/2006/main" xmlns:m="http://schemas.openxmlformats.org/officeDocument/2006/math" xmlns:w="http://schemas.openxmlformats.org/wordprocessingml/2006/main" matchingName="" preserve="1" showMasterPhAnim="0" showMasterSp="1" type="vertTitleAndTx" userDrawn="1">
   <p:cSld name="Vertical Title and Text">
     <p:spTree>
       <p:nvGrpSpPr>
@@ -498,7 +1863,7 @@
         <p:cNvGrpSpPr/>
         <p:nvPr/>
       </p:nvGrpSpPr>
-      <p:grpSpPr>
+      <p:grpSpPr bwMode="auto">
         <a:xfrm>
           <a:off x="0" y="0"/>
           <a:ext cx="0" cy="0"/>
@@ -508,7 +1873,7 @@
       </p:grpSpPr>
       <p:sp>
         <p:nvSpPr>
-          <p:cNvPr id="2" name="Vertical Title 1"/>
+          <p:cNvPr id="554382075" name="Vertical Title 1"/>
           <p:cNvSpPr>
             <a:spLocks noGrp="1"/>
           </p:cNvSpPr>
@@ -516,7 +1881,7 @@
             <p:ph type="title" orient="vert"/>
           </p:nvPr>
         </p:nvSpPr>
-        <p:spPr>
+        <p:spPr bwMode="auto">
           <a:xfrm>
             <a:off x="8724900" y="365125"/>
             <a:ext cx="2628900" cy="5811838"/>
@@ -526,17 +1891,20 @@
           <a:bodyPr vert="eaVert"/>
           <a:lstStyle/>
           <a:p>
+            <a:pPr>
+              <a:defRPr/>
+            </a:pPr>
             <a:r>
               <a:rPr lang="en-US"/>
               <a:t>Click to edit Master title style</a:t>
             </a:r>
-            <a:endParaRPr lang="en-US" dirty="0"/>
-          </a:p>
-        </p:txBody>
-      </p:sp>
-      <p:sp>
-        <p:nvSpPr>
-          <p:cNvPr id="3" name="Vertical Text Placeholder 2"/>
+            <a:endParaRPr lang="en-US"/>
+          </a:p>
+        </p:txBody>
+      </p:sp>
+      <p:sp>
+        <p:nvSpPr>
+          <p:cNvPr id="1593010735" name="Vertical Text Placeholder 2"/>
           <p:cNvSpPr>
             <a:spLocks noGrp="1"/>
           </p:cNvSpPr>
@@ -544,7 +1912,7 @@
             <p:ph type="body" orient="vert" idx="1"/>
           </p:nvPr>
         </p:nvSpPr>
-        <p:spPr>
+        <p:spPr bwMode="auto">
           <a:xfrm>
             <a:off x="838200" y="365125"/>
             <a:ext cx="7734300" cy="5811838"/>
@@ -554,46 +1922,60 @@
           <a:bodyPr vert="eaVert"/>
           <a:lstStyle/>
           <a:p>
-            <a:pPr lvl="0"/>
+            <a:pPr lvl="0">
+              <a:defRPr/>
+            </a:pPr>
             <a:r>
               <a:rPr lang="en-US"/>
               <a:t>Click to edit Master text styles</a:t>
             </a:r>
-          </a:p>
-          <a:p>
-            <a:pPr lvl="1"/>
+            <a:endParaRPr/>
+          </a:p>
+          <a:p>
+            <a:pPr lvl="1">
+              <a:defRPr/>
+            </a:pPr>
             <a:r>
               <a:rPr lang="en-US"/>
               <a:t>Second level</a:t>
             </a:r>
-          </a:p>
-          <a:p>
-            <a:pPr lvl="2"/>
+            <a:endParaRPr/>
+          </a:p>
+          <a:p>
+            <a:pPr lvl="2">
+              <a:defRPr/>
+            </a:pPr>
             <a:r>
               <a:rPr lang="en-US"/>
               <a:t>Third level</a:t>
             </a:r>
-          </a:p>
-          <a:p>
-            <a:pPr lvl="3"/>
+            <a:endParaRPr/>
+          </a:p>
+          <a:p>
+            <a:pPr lvl="3">
+              <a:defRPr/>
+            </a:pPr>
             <a:r>
               <a:rPr lang="en-US"/>
               <a:t>Fourth level</a:t>
             </a:r>
-          </a:p>
-          <a:p>
-            <a:pPr lvl="4"/>
+            <a:endParaRPr/>
+          </a:p>
+          <a:p>
+            <a:pPr lvl="4">
+              <a:defRPr/>
+            </a:pPr>
             <a:r>
               <a:rPr lang="en-US"/>
               <a:t>Fifth level</a:t>
             </a:r>
-            <a:endParaRPr lang="en-US" dirty="0"/>
-          </a:p>
-        </p:txBody>
-      </p:sp>
-      <p:sp>
-        <p:nvSpPr>
-          <p:cNvPr id="4" name="Date Placeholder 3"/>
+            <a:endParaRPr lang="en-US"/>
+          </a:p>
+        </p:txBody>
+      </p:sp>
+      <p:sp>
+        <p:nvSpPr>
+          <p:cNvPr id="1070801270" name="Date Placeholder 3"/>
           <p:cNvSpPr>
             <a:spLocks noGrp="1"/>
           </p:cNvSpPr>
@@ -601,13 +1983,16 @@
             <p:ph type="dt" sz="half" idx="10"/>
           </p:nvPr>
         </p:nvSpPr>
-        <p:spPr/>
-        <p:txBody>
-          <a:bodyPr/>
-          <a:lstStyle/>
-          <a:p>
+        <p:spPr bwMode="auto"/>
+        <p:txBody>
+          <a:bodyPr/>
+          <a:lstStyle/>
+          <a:p>
+            <a:pPr>
+              <a:defRPr/>
+            </a:pPr>
             <a:fld id="{846CE7D5-CF57-46EF-B807-FDD0502418D4}" type="datetimeFigureOut">
-              <a:rPr lang="en-US" smtClean="0"/>
+              <a:rPr lang="en-US"/>
               <a:t>5/16/2026</a:t>
             </a:fld>
             <a:endParaRPr lang="en-US"/>
@@ -616,7 +2001,7 @@
       </p:sp>
       <p:sp>
         <p:nvSpPr>
-          <p:cNvPr id="5" name="Footer Placeholder 4"/>
+          <p:cNvPr id="1516842567" name="Footer Placeholder 4"/>
           <p:cNvSpPr>
             <a:spLocks noGrp="1"/>
           </p:cNvSpPr>
@@ -624,18 +2009,21 @@
             <p:ph type="ftr" sz="quarter" idx="11"/>
           </p:nvPr>
         </p:nvSpPr>
-        <p:spPr/>
-        <p:txBody>
-          <a:bodyPr/>
-          <a:lstStyle/>
-          <a:p>
-            <a:endParaRPr lang="en-US"/>
-          </a:p>
-        </p:txBody>
-      </p:sp>
-      <p:sp>
-        <p:nvSpPr>
-          <p:cNvPr id="6" name="Slide Number Placeholder 5"/>
+        <p:spPr bwMode="auto"/>
+        <p:txBody>
+          <a:bodyPr/>
+          <a:lstStyle/>
+          <a:p>
+            <a:pPr>
+              <a:defRPr/>
+            </a:pPr>
+            <a:endParaRPr lang="en-US"/>
+          </a:p>
+        </p:txBody>
+      </p:sp>
+      <p:sp>
+        <p:nvSpPr>
+          <p:cNvPr id="1665644430" name="Slide Number Placeholder 5"/>
           <p:cNvSpPr>
             <a:spLocks noGrp="1"/>
           </p:cNvSpPr>
@@ -643,13 +2031,16 @@
             <p:ph type="sldNum" sz="quarter" idx="12"/>
           </p:nvPr>
         </p:nvSpPr>
-        <p:spPr/>
-        <p:txBody>
-          <a:bodyPr/>
-          <a:lstStyle/>
-          <a:p>
+        <p:spPr bwMode="auto"/>
+        <p:txBody>
+          <a:bodyPr/>
+          <a:lstStyle/>
+          <a:p>
+            <a:pPr>
+              <a:defRPr/>
+            </a:pPr>
             <a:fld id="{330EA680-D336-4FF7-8B7A-9848BB0A1C32}" type="slidenum">
-              <a:rPr lang="en-US" smtClean="0"/>
+              <a:rPr lang="en-US"/>
               <a:t>‹#›</a:t>
             </a:fld>
             <a:endParaRPr lang="en-US"/>
@@ -657,11 +2048,6 @@
         </p:txBody>
       </p:sp>
     </p:spTree>
-    <p:extLst>
-      <p:ext uri="{BB962C8B-B14F-4D97-AF65-F5344CB8AC3E}">
-        <p14:creationId xmlns:p14="http://schemas.microsoft.com/office/powerpoint/2010/main" val="3479445657"/>
-      </p:ext>
-    </p:extLst>
   </p:cSld>
   <p:clrMapOvr>
     <a:masterClrMapping/>
@@ -670,7 +2056,7 @@
 </file>
 
 <file path=ppt/slideLayouts/slideLayout2.xml><?xml version="1.0" encoding="utf-8"?>
-<p:sldLayout xmlns:a="http://schemas.openxmlformats.org/drawingml/2006/main" xmlns:r="http://schemas.openxmlformats.org/officeDocument/2006/relationships" xmlns:p="http://schemas.openxmlformats.org/presentationml/2006/main" type="obj" preserve="1">
+<p:sldLayout xmlns:a="http://schemas.openxmlformats.org/drawingml/2006/main" xmlns:r="http://schemas.openxmlformats.org/officeDocument/2006/relationships" xmlns:p="http://schemas.openxmlformats.org/presentationml/2006/main" xmlns:m="http://schemas.openxmlformats.org/officeDocument/2006/math" xmlns:w="http://schemas.openxmlformats.org/wordprocessingml/2006/main" matchingName="" preserve="1" showMasterPhAnim="0" showMasterSp="1" type="obj" userDrawn="1">
   <p:cSld name="Title and Content">
     <p:spTree>
       <p:nvGrpSpPr>
@@ -678,7 +2064,7 @@
         <p:cNvGrpSpPr/>
         <p:nvPr/>
       </p:nvGrpSpPr>
-      <p:grpSpPr>
+      <p:grpSpPr bwMode="auto">
         <a:xfrm>
           <a:off x="0" y="0"/>
           <a:ext cx="0" cy="0"/>
@@ -688,7 +2074,7 @@
       </p:grpSpPr>
       <p:sp>
         <p:nvSpPr>
-          <p:cNvPr id="2" name="Title 1"/>
+          <p:cNvPr id="1330082492" name="Title 1"/>
           <p:cNvSpPr>
             <a:spLocks noGrp="1"/>
           </p:cNvSpPr>
@@ -696,22 +2082,25 @@
             <p:ph type="title"/>
           </p:nvPr>
         </p:nvSpPr>
-        <p:spPr/>
-        <p:txBody>
-          <a:bodyPr/>
-          <a:lstStyle/>
-          <a:p>
+        <p:spPr bwMode="auto"/>
+        <p:txBody>
+          <a:bodyPr/>
+          <a:lstStyle/>
+          <a:p>
+            <a:pPr>
+              <a:defRPr/>
+            </a:pPr>
             <a:r>
               <a:rPr lang="en-US"/>
               <a:t>Click to edit Master title style</a:t>
             </a:r>
-            <a:endParaRPr lang="en-US" dirty="0"/>
-          </a:p>
-        </p:txBody>
-      </p:sp>
-      <p:sp>
-        <p:nvSpPr>
-          <p:cNvPr id="3" name="Content Placeholder 2"/>
+            <a:endParaRPr lang="en-US"/>
+          </a:p>
+        </p:txBody>
+      </p:sp>
+      <p:sp>
+        <p:nvSpPr>
+          <p:cNvPr id="1187242053" name="Content Placeholder 2"/>
           <p:cNvSpPr>
             <a:spLocks noGrp="1"/>
           </p:cNvSpPr>
@@ -719,51 +2108,65 @@
             <p:ph idx="1"/>
           </p:nvPr>
         </p:nvSpPr>
-        <p:spPr/>
-        <p:txBody>
-          <a:bodyPr/>
-          <a:lstStyle/>
-          <a:p>
-            <a:pPr lvl="0"/>
+        <p:spPr bwMode="auto"/>
+        <p:txBody>
+          <a:bodyPr/>
+          <a:lstStyle/>
+          <a:p>
+            <a:pPr lvl="0">
+              <a:defRPr/>
+            </a:pPr>
             <a:r>
               <a:rPr lang="en-US"/>
               <a:t>Click to edit Master text styles</a:t>
             </a:r>
-          </a:p>
-          <a:p>
-            <a:pPr lvl="1"/>
+            <a:endParaRPr/>
+          </a:p>
+          <a:p>
+            <a:pPr lvl="1">
+              <a:defRPr/>
+            </a:pPr>
             <a:r>
               <a:rPr lang="en-US"/>
               <a:t>Second level</a:t>
             </a:r>
-          </a:p>
-          <a:p>
-            <a:pPr lvl="2"/>
+            <a:endParaRPr/>
+          </a:p>
+          <a:p>
+            <a:pPr lvl="2">
+              <a:defRPr/>
+            </a:pPr>
             <a:r>
               <a:rPr lang="en-US"/>
               <a:t>Third level</a:t>
             </a:r>
-          </a:p>
-          <a:p>
-            <a:pPr lvl="3"/>
+            <a:endParaRPr/>
+          </a:p>
+          <a:p>
+            <a:pPr lvl="3">
+              <a:defRPr/>
+            </a:pPr>
             <a:r>
               <a:rPr lang="en-US"/>
               <a:t>Fourth level</a:t>
             </a:r>
-          </a:p>
-          <a:p>
-            <a:pPr lvl="4"/>
+            <a:endParaRPr/>
+          </a:p>
+          <a:p>
+            <a:pPr lvl="4">
+              <a:defRPr/>
+            </a:pPr>
             <a:r>
               <a:rPr lang="en-US"/>
               <a:t>Fifth level</a:t>
             </a:r>
-            <a:endParaRPr lang="en-US" dirty="0"/>
-          </a:p>
-        </p:txBody>
-      </p:sp>
-      <p:sp>
-        <p:nvSpPr>
-          <p:cNvPr id="4" name="Date Placeholder 3"/>
+            <a:endParaRPr lang="en-US"/>
+          </a:p>
+        </p:txBody>
+      </p:sp>
+      <p:sp>
+        <p:nvSpPr>
+          <p:cNvPr id="2008162297" name="Date Placeholder 3"/>
           <p:cNvSpPr>
             <a:spLocks noGrp="1"/>
           </p:cNvSpPr>
@@ -771,13 +2174,16 @@
             <p:ph type="dt" sz="half" idx="10"/>
           </p:nvPr>
         </p:nvSpPr>
-        <p:spPr/>
-        <p:txBody>
-          <a:bodyPr/>
-          <a:lstStyle/>
-          <a:p>
+        <p:spPr bwMode="auto"/>
+        <p:txBody>
+          <a:bodyPr/>
+          <a:lstStyle/>
+          <a:p>
+            <a:pPr>
+              <a:defRPr/>
+            </a:pPr>
             <a:fld id="{846CE7D5-CF57-46EF-B807-FDD0502418D4}" type="datetimeFigureOut">
-              <a:rPr lang="en-US" smtClean="0"/>
+              <a:rPr lang="en-US"/>
               <a:t>5/16/2026</a:t>
             </a:fld>
             <a:endParaRPr lang="en-US"/>
@@ -786,7 +2192,7 @@
       </p:sp>
       <p:sp>
         <p:nvSpPr>
-          <p:cNvPr id="5" name="Footer Placeholder 4"/>
+          <p:cNvPr id="1420642735" name="Footer Placeholder 4"/>
           <p:cNvSpPr>
             <a:spLocks noGrp="1"/>
           </p:cNvSpPr>
@@ -794,18 +2200,21 @@
             <p:ph type="ftr" sz="quarter" idx="11"/>
           </p:nvPr>
         </p:nvSpPr>
-        <p:spPr/>
-        <p:txBody>
-          <a:bodyPr/>
-          <a:lstStyle/>
-          <a:p>
-            <a:endParaRPr lang="en-US"/>
-          </a:p>
-        </p:txBody>
-      </p:sp>
-      <p:sp>
-        <p:nvSpPr>
-          <p:cNvPr id="6" name="Slide Number Placeholder 5"/>
+        <p:spPr bwMode="auto"/>
+        <p:txBody>
+          <a:bodyPr/>
+          <a:lstStyle/>
+          <a:p>
+            <a:pPr>
+              <a:defRPr/>
+            </a:pPr>
+            <a:endParaRPr lang="en-US"/>
+          </a:p>
+        </p:txBody>
+      </p:sp>
+      <p:sp>
+        <p:nvSpPr>
+          <p:cNvPr id="1819276632" name="Slide Number Placeholder 5"/>
           <p:cNvSpPr>
             <a:spLocks noGrp="1"/>
           </p:cNvSpPr>
@@ -813,13 +2222,16 @@
             <p:ph type="sldNum" sz="quarter" idx="12"/>
           </p:nvPr>
         </p:nvSpPr>
-        <p:spPr/>
-        <p:txBody>
-          <a:bodyPr/>
-          <a:lstStyle/>
-          <a:p>
+        <p:spPr bwMode="auto"/>
+        <p:txBody>
+          <a:bodyPr/>
+          <a:lstStyle/>
+          <a:p>
+            <a:pPr>
+              <a:defRPr/>
+            </a:pPr>
             <a:fld id="{330EA680-D336-4FF7-8B7A-9848BB0A1C32}" type="slidenum">
-              <a:rPr lang="en-US" smtClean="0"/>
+              <a:rPr lang="en-US"/>
               <a:t>‹#›</a:t>
             </a:fld>
             <a:endParaRPr lang="en-US"/>
@@ -827,11 +2239,6 @@
         </p:txBody>
       </p:sp>
     </p:spTree>
-    <p:extLst>
-      <p:ext uri="{BB962C8B-B14F-4D97-AF65-F5344CB8AC3E}">
-        <p14:creationId xmlns:p14="http://schemas.microsoft.com/office/powerpoint/2010/main" val="949138452"/>
-      </p:ext>
-    </p:extLst>
   </p:cSld>
   <p:clrMapOvr>
     <a:masterClrMapping/>
@@ -840,7 +2247,7 @@
 </file>
 
 <file path=ppt/slideLayouts/slideLayout3.xml><?xml version="1.0" encoding="utf-8"?>
-<p:sldLayout xmlns:a="http://schemas.openxmlformats.org/drawingml/2006/main" xmlns:r="http://schemas.openxmlformats.org/officeDocument/2006/relationships" xmlns:p="http://schemas.openxmlformats.org/presentationml/2006/main" type="secHead" preserve="1">
+<p:sldLayout xmlns:a="http://schemas.openxmlformats.org/drawingml/2006/main" xmlns:r="http://schemas.openxmlformats.org/officeDocument/2006/relationships" xmlns:p="http://schemas.openxmlformats.org/presentationml/2006/main" xmlns:m="http://schemas.openxmlformats.org/officeDocument/2006/math" xmlns:w="http://schemas.openxmlformats.org/wordprocessingml/2006/main" matchingName="" preserve="1" showMasterPhAnim="0" showMasterSp="1" type="secHead" userDrawn="1">
   <p:cSld name="Section Header">
     <p:spTree>
       <p:nvGrpSpPr>
@@ -848,7 +2255,7 @@
         <p:cNvGrpSpPr/>
         <p:nvPr/>
       </p:nvGrpSpPr>
-      <p:grpSpPr>
+      <p:grpSpPr bwMode="auto">
         <a:xfrm>
           <a:off x="0" y="0"/>
           <a:ext cx="0" cy="0"/>
@@ -858,7 +2265,7 @@
       </p:grpSpPr>
       <p:sp>
         <p:nvSpPr>
-          <p:cNvPr id="2" name="Title 1"/>
+          <p:cNvPr id="2098328816" name="Title 1"/>
           <p:cNvSpPr>
             <a:spLocks noGrp="1"/>
           </p:cNvSpPr>
@@ -866,7 +2273,7 @@
             <p:ph type="title"/>
           </p:nvPr>
         </p:nvSpPr>
-        <p:spPr>
+        <p:spPr bwMode="auto">
           <a:xfrm>
             <a:off x="831850" y="1709738"/>
             <a:ext cx="10515600" cy="2852737"/>
@@ -880,17 +2287,20 @@
             </a:lvl1pPr>
           </a:lstStyle>
           <a:p>
+            <a:pPr>
+              <a:defRPr/>
+            </a:pPr>
             <a:r>
               <a:rPr lang="en-US"/>
               <a:t>Click to edit Master title style</a:t>
             </a:r>
-            <a:endParaRPr lang="en-US" dirty="0"/>
-          </a:p>
-        </p:txBody>
-      </p:sp>
-      <p:sp>
-        <p:nvSpPr>
-          <p:cNvPr id="3" name="Text Placeholder 2"/>
+            <a:endParaRPr lang="en-US"/>
+          </a:p>
+        </p:txBody>
+      </p:sp>
+      <p:sp>
+        <p:nvSpPr>
+          <p:cNvPr id="1989291251" name="Text Placeholder 2"/>
           <p:cNvSpPr>
             <a:spLocks noGrp="1"/>
           </p:cNvSpPr>
@@ -898,7 +2308,7 @@
             <p:ph type="body" idx="1"/>
           </p:nvPr>
         </p:nvSpPr>
-        <p:spPr>
+        <p:spPr bwMode="auto">
           <a:xfrm>
             <a:off x="831850" y="4589463"/>
             <a:ext cx="10515600" cy="1500187"/>
@@ -999,17 +2409,20 @@
             </a:lvl9pPr>
           </a:lstStyle>
           <a:p>
-            <a:pPr lvl="0"/>
+            <a:pPr lvl="0">
+              <a:defRPr/>
+            </a:pPr>
             <a:r>
               <a:rPr lang="en-US"/>
               <a:t>Click to edit Master text styles</a:t>
             </a:r>
-          </a:p>
-        </p:txBody>
-      </p:sp>
-      <p:sp>
-        <p:nvSpPr>
-          <p:cNvPr id="4" name="Date Placeholder 3"/>
+            <a:endParaRPr/>
+          </a:p>
+        </p:txBody>
+      </p:sp>
+      <p:sp>
+        <p:nvSpPr>
+          <p:cNvPr id="2074619934" name="Date Placeholder 3"/>
           <p:cNvSpPr>
             <a:spLocks noGrp="1"/>
           </p:cNvSpPr>
@@ -1017,13 +2430,16 @@
             <p:ph type="dt" sz="half" idx="10"/>
           </p:nvPr>
         </p:nvSpPr>
-        <p:spPr/>
-        <p:txBody>
-          <a:bodyPr/>
-          <a:lstStyle/>
-          <a:p>
+        <p:spPr bwMode="auto"/>
+        <p:txBody>
+          <a:bodyPr/>
+          <a:lstStyle/>
+          <a:p>
+            <a:pPr>
+              <a:defRPr/>
+            </a:pPr>
             <a:fld id="{846CE7D5-CF57-46EF-B807-FDD0502418D4}" type="datetimeFigureOut">
-              <a:rPr lang="en-US" smtClean="0"/>
+              <a:rPr lang="en-US"/>
               <a:t>5/16/2026</a:t>
             </a:fld>
             <a:endParaRPr lang="en-US"/>
@@ -1032,7 +2448,7 @@
       </p:sp>
       <p:sp>
         <p:nvSpPr>
-          <p:cNvPr id="5" name="Footer Placeholder 4"/>
+          <p:cNvPr id="1738306437" name="Footer Placeholder 4"/>
           <p:cNvSpPr>
             <a:spLocks noGrp="1"/>
           </p:cNvSpPr>
@@ -1040,18 +2456,21 @@
             <p:ph type="ftr" sz="quarter" idx="11"/>
           </p:nvPr>
         </p:nvSpPr>
-        <p:spPr/>
-        <p:txBody>
-          <a:bodyPr/>
-          <a:lstStyle/>
-          <a:p>
-            <a:endParaRPr lang="en-US"/>
-          </a:p>
-        </p:txBody>
-      </p:sp>
-      <p:sp>
-        <p:nvSpPr>
-          <p:cNvPr id="6" name="Slide Number Placeholder 5"/>
+        <p:spPr bwMode="auto"/>
+        <p:txBody>
+          <a:bodyPr/>
+          <a:lstStyle/>
+          <a:p>
+            <a:pPr>
+              <a:defRPr/>
+            </a:pPr>
+            <a:endParaRPr lang="en-US"/>
+          </a:p>
+        </p:txBody>
+      </p:sp>
+      <p:sp>
+        <p:nvSpPr>
+          <p:cNvPr id="806356135" name="Slide Number Placeholder 5"/>
           <p:cNvSpPr>
             <a:spLocks noGrp="1"/>
           </p:cNvSpPr>
@@ -1059,13 +2478,16 @@
             <p:ph type="sldNum" sz="quarter" idx="12"/>
           </p:nvPr>
         </p:nvSpPr>
-        <p:spPr/>
-        <p:txBody>
-          <a:bodyPr/>
-          <a:lstStyle/>
-          <a:p>
+        <p:spPr bwMode="auto"/>
+        <p:txBody>
+          <a:bodyPr/>
+          <a:lstStyle/>
+          <a:p>
+            <a:pPr>
+              <a:defRPr/>
+            </a:pPr>
             <a:fld id="{330EA680-D336-4FF7-8B7A-9848BB0A1C32}" type="slidenum">
-              <a:rPr lang="en-US" smtClean="0"/>
+              <a:rPr lang="en-US"/>
               <a:t>‹#›</a:t>
             </a:fld>
             <a:endParaRPr lang="en-US"/>
@@ -1073,11 +2495,6 @@
         </p:txBody>
       </p:sp>
     </p:spTree>
-    <p:extLst>
-      <p:ext uri="{BB962C8B-B14F-4D97-AF65-F5344CB8AC3E}">
-        <p14:creationId xmlns:p14="http://schemas.microsoft.com/office/powerpoint/2010/main" val="2591524520"/>
-      </p:ext>
-    </p:extLst>
   </p:cSld>
   <p:clrMapOvr>
     <a:masterClrMapping/>
@@ -1086,7 +2503,7 @@
 </file>
 
 <file path=ppt/slideLayouts/slideLayout4.xml><?xml version="1.0" encoding="utf-8"?>
-<p:sldLayout xmlns:a="http://schemas.openxmlformats.org/drawingml/2006/main" xmlns:r="http://schemas.openxmlformats.org/officeDocument/2006/relationships" xmlns:p="http://schemas.openxmlformats.org/presentationml/2006/main" type="twoObj" preserve="1">
+<p:sldLayout xmlns:a="http://schemas.openxmlformats.org/drawingml/2006/main" xmlns:r="http://schemas.openxmlformats.org/officeDocument/2006/relationships" xmlns:p="http://schemas.openxmlformats.org/presentationml/2006/main" xmlns:m="http://schemas.openxmlformats.org/officeDocument/2006/math" xmlns:w="http://schemas.openxmlformats.org/wordprocessingml/2006/main" matchingName="" preserve="1" showMasterPhAnim="0" showMasterSp="1" type="twoObj" userDrawn="1">
   <p:cSld name="Two Content">
     <p:spTree>
       <p:nvGrpSpPr>
@@ -1094,7 +2511,7 @@
         <p:cNvGrpSpPr/>
         <p:nvPr/>
       </p:nvGrpSpPr>
-      <p:grpSpPr>
+      <p:grpSpPr bwMode="auto">
         <a:xfrm>
           <a:off x="0" y="0"/>
           <a:ext cx="0" cy="0"/>
@@ -1104,7 +2521,7 @@
       </p:grpSpPr>
       <p:sp>
         <p:nvSpPr>
-          <p:cNvPr id="2" name="Title 1"/>
+          <p:cNvPr id="1919141862" name="Title 1"/>
           <p:cNvSpPr>
             <a:spLocks noGrp="1"/>
           </p:cNvSpPr>
@@ -1112,22 +2529,25 @@
             <p:ph type="title"/>
           </p:nvPr>
         </p:nvSpPr>
-        <p:spPr/>
-        <p:txBody>
-          <a:bodyPr/>
-          <a:lstStyle/>
-          <a:p>
+        <p:spPr bwMode="auto"/>
+        <p:txBody>
+          <a:bodyPr/>
+          <a:lstStyle/>
+          <a:p>
+            <a:pPr>
+              <a:defRPr/>
+            </a:pPr>
             <a:r>
               <a:rPr lang="en-US"/>
               <a:t>Click to edit Master title style</a:t>
             </a:r>
-            <a:endParaRPr lang="en-US" dirty="0"/>
-          </a:p>
-        </p:txBody>
-      </p:sp>
-      <p:sp>
-        <p:nvSpPr>
-          <p:cNvPr id="3" name="Content Placeholder 2"/>
+            <a:endParaRPr lang="en-US"/>
+          </a:p>
+        </p:txBody>
+      </p:sp>
+      <p:sp>
+        <p:nvSpPr>
+          <p:cNvPr id="1580792492" name="Content Placeholder 2"/>
           <p:cNvSpPr>
             <a:spLocks noGrp="1"/>
           </p:cNvSpPr>
@@ -1135,7 +2555,7 @@
             <p:ph sz="half" idx="1"/>
           </p:nvPr>
         </p:nvSpPr>
-        <p:spPr>
+        <p:spPr bwMode="auto">
           <a:xfrm>
             <a:off x="838200" y="1825625"/>
             <a:ext cx="5181600" cy="4351338"/>
@@ -1145,46 +2565,60 @@
           <a:bodyPr/>
           <a:lstStyle/>
           <a:p>
-            <a:pPr lvl="0"/>
+            <a:pPr lvl="0">
+              <a:defRPr/>
+            </a:pPr>
             <a:r>
               <a:rPr lang="en-US"/>
               <a:t>Click to edit Master text styles</a:t>
             </a:r>
-          </a:p>
-          <a:p>
-            <a:pPr lvl="1"/>
+            <a:endParaRPr/>
+          </a:p>
+          <a:p>
+            <a:pPr lvl="1">
+              <a:defRPr/>
+            </a:pPr>
             <a:r>
               <a:rPr lang="en-US"/>
               <a:t>Second level</a:t>
             </a:r>
-          </a:p>
-          <a:p>
-            <a:pPr lvl="2"/>
+            <a:endParaRPr/>
+          </a:p>
+          <a:p>
+            <a:pPr lvl="2">
+              <a:defRPr/>
+            </a:pPr>
             <a:r>
               <a:rPr lang="en-US"/>
               <a:t>Third level</a:t>
             </a:r>
-          </a:p>
-          <a:p>
-            <a:pPr lvl="3"/>
+            <a:endParaRPr/>
+          </a:p>
+          <a:p>
+            <a:pPr lvl="3">
+              <a:defRPr/>
+            </a:pPr>
             <a:r>
               <a:rPr lang="en-US"/>
               <a:t>Fourth level</a:t>
             </a:r>
-          </a:p>
-          <a:p>
-            <a:pPr lvl="4"/>
+            <a:endParaRPr/>
+          </a:p>
+          <a:p>
+            <a:pPr lvl="4">
+              <a:defRPr/>
+            </a:pPr>
             <a:r>
               <a:rPr lang="en-US"/>
               <a:t>Fifth level</a:t>
             </a:r>
-            <a:endParaRPr lang="en-US" dirty="0"/>
-          </a:p>
-        </p:txBody>
-      </p:sp>
-      <p:sp>
-        <p:nvSpPr>
-          <p:cNvPr id="4" name="Content Placeholder 3"/>
+            <a:endParaRPr lang="en-US"/>
+          </a:p>
+        </p:txBody>
+      </p:sp>
+      <p:sp>
+        <p:nvSpPr>
+          <p:cNvPr id="1918621353" name="Content Placeholder 3"/>
           <p:cNvSpPr>
             <a:spLocks noGrp="1"/>
           </p:cNvSpPr>
@@ -1192,7 +2626,7 @@
             <p:ph sz="half" idx="2"/>
           </p:nvPr>
         </p:nvSpPr>
-        <p:spPr>
+        <p:spPr bwMode="auto">
           <a:xfrm>
             <a:off x="6172200" y="1825625"/>
             <a:ext cx="5181600" cy="4351338"/>
@@ -1202,46 +2636,60 @@
           <a:bodyPr/>
           <a:lstStyle/>
           <a:p>
-            <a:pPr lvl="0"/>
+            <a:pPr lvl="0">
+              <a:defRPr/>
+            </a:pPr>
             <a:r>
               <a:rPr lang="en-US"/>
               <a:t>Click to edit Master text styles</a:t>
             </a:r>
-          </a:p>
-          <a:p>
-            <a:pPr lvl="1"/>
+            <a:endParaRPr/>
+          </a:p>
+          <a:p>
+            <a:pPr lvl="1">
+              <a:defRPr/>
+            </a:pPr>
             <a:r>
               <a:rPr lang="en-US"/>
               <a:t>Second level</a:t>
             </a:r>
-          </a:p>
-          <a:p>
-            <a:pPr lvl="2"/>
+            <a:endParaRPr/>
+          </a:p>
+          <a:p>
+            <a:pPr lvl="2">
+              <a:defRPr/>
+            </a:pPr>
             <a:r>
               <a:rPr lang="en-US"/>
               <a:t>Third level</a:t>
             </a:r>
-          </a:p>
-          <a:p>
-            <a:pPr lvl="3"/>
+            <a:endParaRPr/>
+          </a:p>
+          <a:p>
+            <a:pPr lvl="3">
+              <a:defRPr/>
+            </a:pPr>
             <a:r>
               <a:rPr lang="en-US"/>
               <a:t>Fourth level</a:t>
             </a:r>
-          </a:p>
-          <a:p>
-            <a:pPr lvl="4"/>
+            <a:endParaRPr/>
+          </a:p>
+          <a:p>
+            <a:pPr lvl="4">
+              <a:defRPr/>
+            </a:pPr>
             <a:r>
               <a:rPr lang="en-US"/>
               <a:t>Fifth level</a:t>
             </a:r>
-            <a:endParaRPr lang="en-US" dirty="0"/>
-          </a:p>
-        </p:txBody>
-      </p:sp>
-      <p:sp>
-        <p:nvSpPr>
-          <p:cNvPr id="5" name="Date Placeholder 4"/>
+            <a:endParaRPr lang="en-US"/>
+          </a:p>
+        </p:txBody>
+      </p:sp>
+      <p:sp>
+        <p:nvSpPr>
+          <p:cNvPr id="1187654741" name="Date Placeholder 4"/>
           <p:cNvSpPr>
             <a:spLocks noGrp="1"/>
           </p:cNvSpPr>
@@ -1249,13 +2697,16 @@
             <p:ph type="dt" sz="half" idx="10"/>
           </p:nvPr>
         </p:nvSpPr>
-        <p:spPr/>
-        <p:txBody>
-          <a:bodyPr/>
-          <a:lstStyle/>
-          <a:p>
+        <p:spPr bwMode="auto"/>
+        <p:txBody>
+          <a:bodyPr/>
+          <a:lstStyle/>
+          <a:p>
+            <a:pPr>
+              <a:defRPr/>
+            </a:pPr>
             <a:fld id="{846CE7D5-CF57-46EF-B807-FDD0502418D4}" type="datetimeFigureOut">
-              <a:rPr lang="en-US" smtClean="0"/>
+              <a:rPr lang="en-US"/>
               <a:t>5/16/2026</a:t>
             </a:fld>
             <a:endParaRPr lang="en-US"/>
@@ -1264,7 +2715,7 @@
       </p:sp>
       <p:sp>
         <p:nvSpPr>
-          <p:cNvPr id="6" name="Footer Placeholder 5"/>
+          <p:cNvPr id="1721974091" name="Footer Placeholder 5"/>
           <p:cNvSpPr>
             <a:spLocks noGrp="1"/>
           </p:cNvSpPr>
@@ -1272,18 +2723,21 @@
             <p:ph type="ftr" sz="quarter" idx="11"/>
           </p:nvPr>
         </p:nvSpPr>
-        <p:spPr/>
-        <p:txBody>
-          <a:bodyPr/>
-          <a:lstStyle/>
-          <a:p>
-            <a:endParaRPr lang="en-US"/>
-          </a:p>
-        </p:txBody>
-      </p:sp>
-      <p:sp>
-        <p:nvSpPr>
-          <p:cNvPr id="7" name="Slide Number Placeholder 6"/>
+        <p:spPr bwMode="auto"/>
+        <p:txBody>
+          <a:bodyPr/>
+          <a:lstStyle/>
+          <a:p>
+            <a:pPr>
+              <a:defRPr/>
+            </a:pPr>
+            <a:endParaRPr lang="en-US"/>
+          </a:p>
+        </p:txBody>
+      </p:sp>
+      <p:sp>
+        <p:nvSpPr>
+          <p:cNvPr id="318677855" name="Slide Number Placeholder 6"/>
           <p:cNvSpPr>
             <a:spLocks noGrp="1"/>
           </p:cNvSpPr>
@@ -1291,13 +2745,16 @@
             <p:ph type="sldNum" sz="quarter" idx="12"/>
           </p:nvPr>
         </p:nvSpPr>
-        <p:spPr/>
-        <p:txBody>
-          <a:bodyPr/>
-          <a:lstStyle/>
-          <a:p>
+        <p:spPr bwMode="auto"/>
+        <p:txBody>
+          <a:bodyPr/>
+          <a:lstStyle/>
+          <a:p>
+            <a:pPr>
+              <a:defRPr/>
+            </a:pPr>
             <a:fld id="{330EA680-D336-4FF7-8B7A-9848BB0A1C32}" type="slidenum">
-              <a:rPr lang="en-US" smtClean="0"/>
+              <a:rPr lang="en-US"/>
               <a:t>‹#›</a:t>
             </a:fld>
             <a:endParaRPr lang="en-US"/>
@@ -1305,11 +2762,6 @@
         </p:txBody>
       </p:sp>
     </p:spTree>
-    <p:extLst>
-      <p:ext uri="{BB962C8B-B14F-4D97-AF65-F5344CB8AC3E}">
-        <p14:creationId xmlns:p14="http://schemas.microsoft.com/office/powerpoint/2010/main" val="1203092039"/>
-      </p:ext>
-    </p:extLst>
   </p:cSld>
   <p:clrMapOvr>
     <a:masterClrMapping/>
@@ -1318,7 +2770,7 @@
 </file>
 
 <file path=ppt/slideLayouts/slideLayout5.xml><?xml version="1.0" encoding="utf-8"?>
-<p:sldLayout xmlns:a="http://schemas.openxmlformats.org/drawingml/2006/main" xmlns:r="http://schemas.openxmlformats.org/officeDocument/2006/relationships" xmlns:p="http://schemas.openxmlformats.org/presentationml/2006/main" type="twoTxTwoObj" preserve="1">
+<p:sldLayout xmlns:a="http://schemas.openxmlformats.org/drawingml/2006/main" xmlns:r="http://schemas.openxmlformats.org/officeDocument/2006/relationships" xmlns:p="http://schemas.openxmlformats.org/presentationml/2006/main" xmlns:m="http://schemas.openxmlformats.org/officeDocument/2006/math" xmlns:w="http://schemas.openxmlformats.org/wordprocessingml/2006/main" matchingName="" preserve="1" showMasterPhAnim="0" showMasterSp="1" type="twoTxTwoObj" userDrawn="1">
   <p:cSld name="Comparison">
     <p:spTree>
       <p:nvGrpSpPr>
@@ -1326,7 +2778,7 @@
         <p:cNvGrpSpPr/>
         <p:nvPr/>
       </p:nvGrpSpPr>
-      <p:grpSpPr>
+      <p:grpSpPr bwMode="auto">
         <a:xfrm>
           <a:off x="0" y="0"/>
           <a:ext cx="0" cy="0"/>
@@ -1336,7 +2788,7 @@
       </p:grpSpPr>
       <p:sp>
         <p:nvSpPr>
-          <p:cNvPr id="2" name="Title 1"/>
+          <p:cNvPr id="1917199480" name="Title 1"/>
           <p:cNvSpPr>
             <a:spLocks noGrp="1"/>
           </p:cNvSpPr>
@@ -1344,7 +2796,7 @@
             <p:ph type="title"/>
           </p:nvPr>
         </p:nvSpPr>
-        <p:spPr>
+        <p:spPr bwMode="auto">
           <a:xfrm>
             <a:off x="839788" y="365125"/>
             <a:ext cx="10515600" cy="1325563"/>
@@ -1354,17 +2806,20 @@
           <a:bodyPr/>
           <a:lstStyle/>
           <a:p>
+            <a:pPr>
+              <a:defRPr/>
+            </a:pPr>
             <a:r>
               <a:rPr lang="en-US"/>
               <a:t>Click to edit Master title style</a:t>
             </a:r>
-            <a:endParaRPr lang="en-US" dirty="0"/>
-          </a:p>
-        </p:txBody>
-      </p:sp>
-      <p:sp>
-        <p:nvSpPr>
-          <p:cNvPr id="3" name="Text Placeholder 2"/>
+            <a:endParaRPr lang="en-US"/>
+          </a:p>
+        </p:txBody>
+      </p:sp>
+      <p:sp>
+        <p:nvSpPr>
+          <p:cNvPr id="2001651679" name="Text Placeholder 2"/>
           <p:cNvSpPr>
             <a:spLocks noGrp="1"/>
           </p:cNvSpPr>
@@ -1372,7 +2827,7 @@
             <p:ph type="body" idx="1"/>
           </p:nvPr>
         </p:nvSpPr>
-        <p:spPr>
+        <p:spPr bwMode="auto">
           <a:xfrm>
             <a:off x="839788" y="1681163"/>
             <a:ext cx="5157787" cy="823912"/>
@@ -1419,17 +2874,20 @@
             </a:lvl9pPr>
           </a:lstStyle>
           <a:p>
-            <a:pPr lvl="0"/>
+            <a:pPr lvl="0">
+              <a:defRPr/>
+            </a:pPr>
             <a:r>
               <a:rPr lang="en-US"/>
               <a:t>Click to edit Master text styles</a:t>
             </a:r>
-          </a:p>
-        </p:txBody>
-      </p:sp>
-      <p:sp>
-        <p:nvSpPr>
-          <p:cNvPr id="4" name="Content Placeholder 3"/>
+            <a:endParaRPr/>
+          </a:p>
+        </p:txBody>
+      </p:sp>
+      <p:sp>
+        <p:nvSpPr>
+          <p:cNvPr id="1260583257" name="Content Placeholder 3"/>
           <p:cNvSpPr>
             <a:spLocks noGrp="1"/>
           </p:cNvSpPr>
@@ -1437,9 +2895,9 @@
             <p:ph sz="half" idx="2"/>
           </p:nvPr>
         </p:nvSpPr>
-        <p:spPr>
+        <p:spPr bwMode="auto">
           <a:xfrm>
-            <a:off x="839788" y="2505075"/>
+            <a:off x="839788" y="2505074"/>
             <a:ext cx="5157787" cy="3684588"/>
           </a:xfrm>
         </p:spPr>
@@ -1447,46 +2905,60 @@
           <a:bodyPr/>
           <a:lstStyle/>
           <a:p>
-            <a:pPr lvl="0"/>
+            <a:pPr lvl="0">
+              <a:defRPr/>
+            </a:pPr>
             <a:r>
               <a:rPr lang="en-US"/>
               <a:t>Click to edit Master text styles</a:t>
             </a:r>
-          </a:p>
-          <a:p>
-            <a:pPr lvl="1"/>
+            <a:endParaRPr/>
+          </a:p>
+          <a:p>
+            <a:pPr lvl="1">
+              <a:defRPr/>
+            </a:pPr>
             <a:r>
               <a:rPr lang="en-US"/>
               <a:t>Second level</a:t>
             </a:r>
-          </a:p>
-          <a:p>
-            <a:pPr lvl="2"/>
+            <a:endParaRPr/>
+          </a:p>
+          <a:p>
+            <a:pPr lvl="2">
+              <a:defRPr/>
+            </a:pPr>
             <a:r>
               <a:rPr lang="en-US"/>
               <a:t>Third level</a:t>
             </a:r>
-          </a:p>
-          <a:p>
-            <a:pPr lvl="3"/>
+            <a:endParaRPr/>
+          </a:p>
+          <a:p>
+            <a:pPr lvl="3">
+              <a:defRPr/>
+            </a:pPr>
             <a:r>
               <a:rPr lang="en-US"/>
               <a:t>Fourth level</a:t>
             </a:r>
-          </a:p>
-          <a:p>
-            <a:pPr lvl="4"/>
+            <a:endParaRPr/>
+          </a:p>
+          <a:p>
+            <a:pPr lvl="4">
+              <a:defRPr/>
+            </a:pPr>
             <a:r>
               <a:rPr lang="en-US"/>
               <a:t>Fifth level</a:t>
             </a:r>
-            <a:endParaRPr lang="en-US" dirty="0"/>
-          </a:p>
-        </p:txBody>
-      </p:sp>
-      <p:sp>
-        <p:nvSpPr>
-          <p:cNvPr id="5" name="Text Placeholder 4"/>
+            <a:endParaRPr lang="en-US"/>
+          </a:p>
+        </p:txBody>
+      </p:sp>
+      <p:sp>
+        <p:nvSpPr>
+          <p:cNvPr id="1035117057" name="Text Placeholder 4"/>
           <p:cNvSpPr>
             <a:spLocks noGrp="1"/>
           </p:cNvSpPr>
@@ -1494,7 +2966,7 @@
             <p:ph type="body" sz="quarter" idx="3"/>
           </p:nvPr>
         </p:nvSpPr>
-        <p:spPr>
+        <p:spPr bwMode="auto">
           <a:xfrm>
             <a:off x="6172200" y="1681163"/>
             <a:ext cx="5183188" cy="823912"/>
@@ -1541,17 +3013,20 @@
             </a:lvl9pPr>
           </a:lstStyle>
           <a:p>
-            <a:pPr lvl="0"/>
+            <a:pPr lvl="0">
+              <a:defRPr/>
+            </a:pPr>
             <a:r>
               <a:rPr lang="en-US"/>
               <a:t>Click to edit Master text styles</a:t>
             </a:r>
-          </a:p>
-        </p:txBody>
-      </p:sp>
-      <p:sp>
-        <p:nvSpPr>
-          <p:cNvPr id="6" name="Content Placeholder 5"/>
+            <a:endParaRPr/>
+          </a:p>
+        </p:txBody>
+      </p:sp>
+      <p:sp>
+        <p:nvSpPr>
+          <p:cNvPr id="1235196557" name="Content Placeholder 5"/>
           <p:cNvSpPr>
             <a:spLocks noGrp="1"/>
           </p:cNvSpPr>
@@ -1559,9 +3034,9 @@
             <p:ph sz="quarter" idx="4"/>
           </p:nvPr>
         </p:nvSpPr>
-        <p:spPr>
+        <p:spPr bwMode="auto">
           <a:xfrm>
-            <a:off x="6172200" y="2505075"/>
+            <a:off x="6172200" y="2505074"/>
             <a:ext cx="5183188" cy="3684588"/>
           </a:xfrm>
         </p:spPr>
@@ -1569,46 +3044,60 @@
           <a:bodyPr/>
           <a:lstStyle/>
           <a:p>
-            <a:pPr lvl="0"/>
+            <a:pPr lvl="0">
+              <a:defRPr/>
+            </a:pPr>
             <a:r>
               <a:rPr lang="en-US"/>
               <a:t>Click to edit Master text styles</a:t>
             </a:r>
-          </a:p>
-          <a:p>
-            <a:pPr lvl="1"/>
+            <a:endParaRPr/>
+          </a:p>
+          <a:p>
+            <a:pPr lvl="1">
+              <a:defRPr/>
+            </a:pPr>
             <a:r>
               <a:rPr lang="en-US"/>
               <a:t>Second level</a:t>
             </a:r>
-          </a:p>
-          <a:p>
-            <a:pPr lvl="2"/>
+            <a:endParaRPr/>
+          </a:p>
+          <a:p>
+            <a:pPr lvl="2">
+              <a:defRPr/>
+            </a:pPr>
             <a:r>
               <a:rPr lang="en-US"/>
               <a:t>Third level</a:t>
             </a:r>
-          </a:p>
-          <a:p>
-            <a:pPr lvl="3"/>
+            <a:endParaRPr/>
+          </a:p>
+          <a:p>
+            <a:pPr lvl="3">
+              <a:defRPr/>
+            </a:pPr>
             <a:r>
               <a:rPr lang="en-US"/>
               <a:t>Fourth level</a:t>
             </a:r>
-          </a:p>
-          <a:p>
-            <a:pPr lvl="4"/>
+            <a:endParaRPr/>
+          </a:p>
+          <a:p>
+            <a:pPr lvl="4">
+              <a:defRPr/>
+            </a:pPr>
             <a:r>
               <a:rPr lang="en-US"/>
               <a:t>Fifth level</a:t>
             </a:r>
-            <a:endParaRPr lang="en-US" dirty="0"/>
-          </a:p>
-        </p:txBody>
-      </p:sp>
-      <p:sp>
-        <p:nvSpPr>
-          <p:cNvPr id="7" name="Date Placeholder 6"/>
+            <a:endParaRPr lang="en-US"/>
+          </a:p>
+        </p:txBody>
+      </p:sp>
+      <p:sp>
+        <p:nvSpPr>
+          <p:cNvPr id="1396281578" name="Date Placeholder 6"/>
           <p:cNvSpPr>
             <a:spLocks noGrp="1"/>
           </p:cNvSpPr>
@@ -1616,13 +3105,16 @@
             <p:ph type="dt" sz="half" idx="10"/>
           </p:nvPr>
         </p:nvSpPr>
-        <p:spPr/>
-        <p:txBody>
-          <a:bodyPr/>
-          <a:lstStyle/>
-          <a:p>
+        <p:spPr bwMode="auto"/>
+        <p:txBody>
+          <a:bodyPr/>
+          <a:lstStyle/>
+          <a:p>
+            <a:pPr>
+              <a:defRPr/>
+            </a:pPr>
             <a:fld id="{846CE7D5-CF57-46EF-B807-FDD0502418D4}" type="datetimeFigureOut">
-              <a:rPr lang="en-US" smtClean="0"/>
+              <a:rPr lang="en-US"/>
               <a:t>5/16/2026</a:t>
             </a:fld>
             <a:endParaRPr lang="en-US"/>
@@ -1631,7 +3123,7 @@
       </p:sp>
       <p:sp>
         <p:nvSpPr>
-          <p:cNvPr id="8" name="Footer Placeholder 7"/>
+          <p:cNvPr id="1204417020" name="Footer Placeholder 7"/>
           <p:cNvSpPr>
             <a:spLocks noGrp="1"/>
           </p:cNvSpPr>
@@ -1639,18 +3131,21 @@
             <p:ph type="ftr" sz="quarter" idx="11"/>
           </p:nvPr>
         </p:nvSpPr>
-        <p:spPr/>
-        <p:txBody>
-          <a:bodyPr/>
-          <a:lstStyle/>
-          <a:p>
-            <a:endParaRPr lang="en-US"/>
-          </a:p>
-        </p:txBody>
-      </p:sp>
-      <p:sp>
-        <p:nvSpPr>
-          <p:cNvPr id="9" name="Slide Number Placeholder 8"/>
+        <p:spPr bwMode="auto"/>
+        <p:txBody>
+          <a:bodyPr/>
+          <a:lstStyle/>
+          <a:p>
+            <a:pPr>
+              <a:defRPr/>
+            </a:pPr>
+            <a:endParaRPr lang="en-US"/>
+          </a:p>
+        </p:txBody>
+      </p:sp>
+      <p:sp>
+        <p:nvSpPr>
+          <p:cNvPr id="913679878" name="Slide Number Placeholder 8"/>
           <p:cNvSpPr>
             <a:spLocks noGrp="1"/>
           </p:cNvSpPr>
@@ -1658,13 +3153,16 @@
             <p:ph type="sldNum" sz="quarter" idx="12"/>
           </p:nvPr>
         </p:nvSpPr>
-        <p:spPr/>
-        <p:txBody>
-          <a:bodyPr/>
-          <a:lstStyle/>
-          <a:p>
+        <p:spPr bwMode="auto"/>
+        <p:txBody>
+          <a:bodyPr/>
+          <a:lstStyle/>
+          <a:p>
+            <a:pPr>
+              <a:defRPr/>
+            </a:pPr>
             <a:fld id="{330EA680-D336-4FF7-8B7A-9848BB0A1C32}" type="slidenum">
-              <a:rPr lang="en-US" smtClean="0"/>
+              <a:rPr lang="en-US"/>
               <a:t>‹#›</a:t>
             </a:fld>
             <a:endParaRPr lang="en-US"/>
@@ -1672,11 +3170,6 @@
         </p:txBody>
       </p:sp>
     </p:spTree>
-    <p:extLst>
-      <p:ext uri="{BB962C8B-B14F-4D97-AF65-F5344CB8AC3E}">
-        <p14:creationId xmlns:p14="http://schemas.microsoft.com/office/powerpoint/2010/main" val="3733172339"/>
-      </p:ext>
-    </p:extLst>
   </p:cSld>
   <p:clrMapOvr>
     <a:masterClrMapping/>
@@ -1685,7 +3178,7 @@
 </file>
 
 <file path=ppt/slideLayouts/slideLayout6.xml><?xml version="1.0" encoding="utf-8"?>
-<p:sldLayout xmlns:a="http://schemas.openxmlformats.org/drawingml/2006/main" xmlns:r="http://schemas.openxmlformats.org/officeDocument/2006/relationships" xmlns:p="http://schemas.openxmlformats.org/presentationml/2006/main" type="titleOnly" preserve="1">
+<p:sldLayout xmlns:a="http://schemas.openxmlformats.org/drawingml/2006/main" xmlns:r="http://schemas.openxmlformats.org/officeDocument/2006/relationships" xmlns:p="http://schemas.openxmlformats.org/presentationml/2006/main" xmlns:m="http://schemas.openxmlformats.org/officeDocument/2006/math" xmlns:w="http://schemas.openxmlformats.org/wordprocessingml/2006/main" matchingName="" preserve="1" showMasterPhAnim="0" showMasterSp="1" type="titleOnly" userDrawn="1">
   <p:cSld name="Title Only">
     <p:spTree>
       <p:nvGrpSpPr>
@@ -1693,7 +3186,7 @@
         <p:cNvGrpSpPr/>
         <p:nvPr/>
       </p:nvGrpSpPr>
-      <p:grpSpPr>
+      <p:grpSpPr bwMode="auto">
         <a:xfrm>
           <a:off x="0" y="0"/>
           <a:ext cx="0" cy="0"/>
@@ -1703,7 +3196,7 @@
       </p:grpSpPr>
       <p:sp>
         <p:nvSpPr>
-          <p:cNvPr id="2" name="Title 1"/>
+          <p:cNvPr id="2048168704" name="Title 1"/>
           <p:cNvSpPr>
             <a:spLocks noGrp="1"/>
           </p:cNvSpPr>
@@ -1711,22 +3204,25 @@
             <p:ph type="title"/>
           </p:nvPr>
         </p:nvSpPr>
-        <p:spPr/>
-        <p:txBody>
-          <a:bodyPr/>
-          <a:lstStyle/>
-          <a:p>
+        <p:spPr bwMode="auto"/>
+        <p:txBody>
+          <a:bodyPr/>
+          <a:lstStyle/>
+          <a:p>
+            <a:pPr>
+              <a:defRPr/>
+            </a:pPr>
             <a:r>
               <a:rPr lang="en-US"/>
               <a:t>Click to edit Master title style</a:t>
             </a:r>
-            <a:endParaRPr lang="en-US" dirty="0"/>
-          </a:p>
-        </p:txBody>
-      </p:sp>
-      <p:sp>
-        <p:nvSpPr>
-          <p:cNvPr id="3" name="Date Placeholder 2"/>
+            <a:endParaRPr lang="en-US"/>
+          </a:p>
+        </p:txBody>
+      </p:sp>
+      <p:sp>
+        <p:nvSpPr>
+          <p:cNvPr id="1748910361" name="Date Placeholder 2"/>
           <p:cNvSpPr>
             <a:spLocks noGrp="1"/>
           </p:cNvSpPr>
@@ -1734,13 +3230,16 @@
             <p:ph type="dt" sz="half" idx="10"/>
           </p:nvPr>
         </p:nvSpPr>
-        <p:spPr/>
-        <p:txBody>
-          <a:bodyPr/>
-          <a:lstStyle/>
-          <a:p>
+        <p:spPr bwMode="auto"/>
+        <p:txBody>
+          <a:bodyPr/>
+          <a:lstStyle/>
+          <a:p>
+            <a:pPr>
+              <a:defRPr/>
+            </a:pPr>
             <a:fld id="{846CE7D5-CF57-46EF-B807-FDD0502418D4}" type="datetimeFigureOut">
-              <a:rPr lang="en-US" smtClean="0"/>
+              <a:rPr lang="en-US"/>
               <a:t>5/16/2026</a:t>
             </a:fld>
             <a:endParaRPr lang="en-US"/>
@@ -1749,7 +3248,7 @@
       </p:sp>
       <p:sp>
         <p:nvSpPr>
-          <p:cNvPr id="4" name="Footer Placeholder 3"/>
+          <p:cNvPr id="202644750" name="Footer Placeholder 3"/>
           <p:cNvSpPr>
             <a:spLocks noGrp="1"/>
           </p:cNvSpPr>
@@ -1757,18 +3256,21 @@
             <p:ph type="ftr" sz="quarter" idx="11"/>
           </p:nvPr>
         </p:nvSpPr>
-        <p:spPr/>
-        <p:txBody>
-          <a:bodyPr/>
-          <a:lstStyle/>
-          <a:p>
-            <a:endParaRPr lang="en-US"/>
-          </a:p>
-        </p:txBody>
-      </p:sp>
-      <p:sp>
-        <p:nvSpPr>
-          <p:cNvPr id="5" name="Slide Number Placeholder 4"/>
+        <p:spPr bwMode="auto"/>
+        <p:txBody>
+          <a:bodyPr/>
+          <a:lstStyle/>
+          <a:p>
+            <a:pPr>
+              <a:defRPr/>
+            </a:pPr>
+            <a:endParaRPr lang="en-US"/>
+          </a:p>
+        </p:txBody>
+      </p:sp>
+      <p:sp>
+        <p:nvSpPr>
+          <p:cNvPr id="1313147532" name="Slide Number Placeholder 4"/>
           <p:cNvSpPr>
             <a:spLocks noGrp="1"/>
           </p:cNvSpPr>
@@ -1776,13 +3278,16 @@
             <p:ph type="sldNum" sz="quarter" idx="12"/>
           </p:nvPr>
         </p:nvSpPr>
-        <p:spPr/>
-        <p:txBody>
-          <a:bodyPr/>
-          <a:lstStyle/>
-          <a:p>
+        <p:spPr bwMode="auto"/>
+        <p:txBody>
+          <a:bodyPr/>
+          <a:lstStyle/>
+          <a:p>
+            <a:pPr>
+              <a:defRPr/>
+            </a:pPr>
             <a:fld id="{330EA680-D336-4FF7-8B7A-9848BB0A1C32}" type="slidenum">
-              <a:rPr lang="en-US" smtClean="0"/>
+              <a:rPr lang="en-US"/>
               <a:t>‹#›</a:t>
             </a:fld>
             <a:endParaRPr lang="en-US"/>
@@ -1790,11 +3295,6 @@
         </p:txBody>
       </p:sp>
     </p:spTree>
-    <p:extLst>
-      <p:ext uri="{BB962C8B-B14F-4D97-AF65-F5344CB8AC3E}">
-        <p14:creationId xmlns:p14="http://schemas.microsoft.com/office/powerpoint/2010/main" val="3210312558"/>
-      </p:ext>
-    </p:extLst>
   </p:cSld>
   <p:clrMapOvr>
     <a:masterClrMapping/>
@@ -1803,7 +3303,7 @@
 </file>
 
 <file path=ppt/slideLayouts/slideLayout7.xml><?xml version="1.0" encoding="utf-8"?>
-<p:sldLayout xmlns:a="http://schemas.openxmlformats.org/drawingml/2006/main" xmlns:r="http://schemas.openxmlformats.org/officeDocument/2006/relationships" xmlns:p="http://schemas.openxmlformats.org/presentationml/2006/main" type="blank" preserve="1">
+<p:sldLayout xmlns:a="http://schemas.openxmlformats.org/drawingml/2006/main" xmlns:r="http://schemas.openxmlformats.org/officeDocument/2006/relationships" xmlns:p="http://schemas.openxmlformats.org/presentationml/2006/main" xmlns:m="http://schemas.openxmlformats.org/officeDocument/2006/math" xmlns:w="http://schemas.openxmlformats.org/wordprocessingml/2006/main" matchingName="" preserve="1" showMasterPhAnim="0" showMasterSp="1" type="blank" userDrawn="1">
   <p:cSld name="Blank">
     <p:spTree>
       <p:nvGrpSpPr>
@@ -1811,7 +3311,7 @@
         <p:cNvGrpSpPr/>
         <p:nvPr/>
       </p:nvGrpSpPr>
-      <p:grpSpPr>
+      <p:grpSpPr bwMode="auto">
         <a:xfrm>
           <a:off x="0" y="0"/>
           <a:ext cx="0" cy="0"/>
@@ -1821,7 +3321,7 @@
       </p:grpSpPr>
       <p:sp>
         <p:nvSpPr>
-          <p:cNvPr id="2" name="Date Placeholder 1"/>
+          <p:cNvPr id="1275832127" name="Date Placeholder 1"/>
           <p:cNvSpPr>
             <a:spLocks noGrp="1"/>
           </p:cNvSpPr>
@@ -1829,13 +3329,16 @@
             <p:ph type="dt" sz="half" idx="10"/>
           </p:nvPr>
         </p:nvSpPr>
-        <p:spPr/>
-        <p:txBody>
-          <a:bodyPr/>
-          <a:lstStyle/>
-          <a:p>
+        <p:spPr bwMode="auto"/>
+        <p:txBody>
+          <a:bodyPr/>
+          <a:lstStyle/>
+          <a:p>
+            <a:pPr>
+              <a:defRPr/>
+            </a:pPr>
             <a:fld id="{846CE7D5-CF57-46EF-B807-FDD0502418D4}" type="datetimeFigureOut">
-              <a:rPr lang="en-US" smtClean="0"/>
+              <a:rPr lang="en-US"/>
               <a:t>5/16/2026</a:t>
             </a:fld>
             <a:endParaRPr lang="en-US"/>
@@ -1844,7 +3347,7 @@
       </p:sp>
       <p:sp>
         <p:nvSpPr>
-          <p:cNvPr id="3" name="Footer Placeholder 2"/>
+          <p:cNvPr id="1481775749" name="Footer Placeholder 2"/>
           <p:cNvSpPr>
             <a:spLocks noGrp="1"/>
           </p:cNvSpPr>
@@ -1852,18 +3355,21 @@
             <p:ph type="ftr" sz="quarter" idx="11"/>
           </p:nvPr>
         </p:nvSpPr>
-        <p:spPr/>
-        <p:txBody>
-          <a:bodyPr/>
-          <a:lstStyle/>
-          <a:p>
-            <a:endParaRPr lang="en-US"/>
-          </a:p>
-        </p:txBody>
-      </p:sp>
-      <p:sp>
-        <p:nvSpPr>
-          <p:cNvPr id="4" name="Slide Number Placeholder 3"/>
+        <p:spPr bwMode="auto"/>
+        <p:txBody>
+          <a:bodyPr/>
+          <a:lstStyle/>
+          <a:p>
+            <a:pPr>
+              <a:defRPr/>
+            </a:pPr>
+            <a:endParaRPr lang="en-US"/>
+          </a:p>
+        </p:txBody>
+      </p:sp>
+      <p:sp>
+        <p:nvSpPr>
+          <p:cNvPr id="177889459" name="Slide Number Placeholder 3"/>
           <p:cNvSpPr>
             <a:spLocks noGrp="1"/>
           </p:cNvSpPr>
@@ -1871,13 +3377,16 @@
             <p:ph type="sldNum" sz="quarter" idx="12"/>
           </p:nvPr>
         </p:nvSpPr>
-        <p:spPr/>
-        <p:txBody>
-          <a:bodyPr/>
-          <a:lstStyle/>
-          <a:p>
+        <p:spPr bwMode="auto"/>
+        <p:txBody>
+          <a:bodyPr/>
+          <a:lstStyle/>
+          <a:p>
+            <a:pPr>
+              <a:defRPr/>
+            </a:pPr>
             <a:fld id="{330EA680-D336-4FF7-8B7A-9848BB0A1C32}" type="slidenum">
-              <a:rPr lang="en-US" smtClean="0"/>
+              <a:rPr lang="en-US"/>
               <a:t>‹#›</a:t>
             </a:fld>
             <a:endParaRPr lang="en-US"/>
@@ -1885,11 +3394,6 @@
         </p:txBody>
       </p:sp>
     </p:spTree>
-    <p:extLst>
-      <p:ext uri="{BB962C8B-B14F-4D97-AF65-F5344CB8AC3E}">
-        <p14:creationId xmlns:p14="http://schemas.microsoft.com/office/powerpoint/2010/main" val="3146388984"/>
-      </p:ext>
-    </p:extLst>
   </p:cSld>
   <p:clrMapOvr>
     <a:masterClrMapping/>
@@ -1898,7 +3402,7 @@
 </file>
 
 <file path=ppt/slideLayouts/slideLayout8.xml><?xml version="1.0" encoding="utf-8"?>
-<p:sldLayout xmlns:a="http://schemas.openxmlformats.org/drawingml/2006/main" xmlns:r="http://schemas.openxmlformats.org/officeDocument/2006/relationships" xmlns:p="http://schemas.openxmlformats.org/presentationml/2006/main" type="objTx" preserve="1">
+<p:sldLayout xmlns:a="http://schemas.openxmlformats.org/drawingml/2006/main" xmlns:r="http://schemas.openxmlformats.org/officeDocument/2006/relationships" xmlns:p="http://schemas.openxmlformats.org/presentationml/2006/main" xmlns:m="http://schemas.openxmlformats.org/officeDocument/2006/math" xmlns:w="http://schemas.openxmlformats.org/wordprocessingml/2006/main" matchingName="" preserve="1" showMasterPhAnim="0" showMasterSp="1" type="objTx" userDrawn="1">
   <p:cSld name="Content with Caption">
     <p:spTree>
       <p:nvGrpSpPr>
@@ -1906,7 +3410,7 @@
         <p:cNvGrpSpPr/>
         <p:nvPr/>
       </p:nvGrpSpPr>
-      <p:grpSpPr>
+      <p:grpSpPr bwMode="auto">
         <a:xfrm>
           <a:off x="0" y="0"/>
           <a:ext cx="0" cy="0"/>
@@ -1916,7 +3420,7 @@
       </p:grpSpPr>
       <p:sp>
         <p:nvSpPr>
-          <p:cNvPr id="2" name="Title 1"/>
+          <p:cNvPr id="339172006" name="Title 1"/>
           <p:cNvSpPr>
             <a:spLocks noGrp="1"/>
           </p:cNvSpPr>
@@ -1924,7 +3428,7 @@
             <p:ph type="title"/>
           </p:nvPr>
         </p:nvSpPr>
-        <p:spPr>
+        <p:spPr bwMode="auto">
           <a:xfrm>
             <a:off x="839788" y="457200"/>
             <a:ext cx="3932237" cy="1600200"/>
@@ -1938,17 +3442,20 @@
             </a:lvl1pPr>
           </a:lstStyle>
           <a:p>
+            <a:pPr>
+              <a:defRPr/>
+            </a:pPr>
             <a:r>
               <a:rPr lang="en-US"/>
               <a:t>Click to edit Master title style</a:t>
             </a:r>
-            <a:endParaRPr lang="en-US" dirty="0"/>
-          </a:p>
-        </p:txBody>
-      </p:sp>
-      <p:sp>
-        <p:nvSpPr>
-          <p:cNvPr id="3" name="Content Placeholder 2"/>
+            <a:endParaRPr lang="en-US"/>
+          </a:p>
+        </p:txBody>
+      </p:sp>
+      <p:sp>
+        <p:nvSpPr>
+          <p:cNvPr id="2102908821" name="Content Placeholder 2"/>
           <p:cNvSpPr>
             <a:spLocks noGrp="1"/>
           </p:cNvSpPr>
@@ -1956,7 +3463,7 @@
             <p:ph idx="1"/>
           </p:nvPr>
         </p:nvSpPr>
-        <p:spPr>
+        <p:spPr bwMode="auto">
           <a:xfrm>
             <a:off x="5183188" y="987425"/>
             <a:ext cx="6172200" cy="4873625"/>
@@ -1994,46 +3501,60 @@
             </a:lvl9pPr>
           </a:lstStyle>
           <a:p>
-            <a:pPr lvl="0"/>
+            <a:pPr lvl="0">
+              <a:defRPr/>
+            </a:pPr>
             <a:r>
               <a:rPr lang="en-US"/>
               <a:t>Click to edit Master text styles</a:t>
             </a:r>
-          </a:p>
-          <a:p>
-            <a:pPr lvl="1"/>
+            <a:endParaRPr/>
+          </a:p>
+          <a:p>
+            <a:pPr lvl="1">
+              <a:defRPr/>
+            </a:pPr>
             <a:r>
               <a:rPr lang="en-US"/>
               <a:t>Second level</a:t>
             </a:r>
-          </a:p>
-          <a:p>
-            <a:pPr lvl="2"/>
+            <a:endParaRPr/>
+          </a:p>
+          <a:p>
+            <a:pPr lvl="2">
+              <a:defRPr/>
+            </a:pPr>
             <a:r>
               <a:rPr lang="en-US"/>
               <a:t>Third level</a:t>
             </a:r>
-          </a:p>
-          <a:p>
-            <a:pPr lvl="3"/>
+            <a:endParaRPr/>
+          </a:p>
+          <a:p>
+            <a:pPr lvl="3">
+              <a:defRPr/>
+            </a:pPr>
             <a:r>
               <a:rPr lang="en-US"/>
               <a:t>Fourth level</a:t>
             </a:r>
-          </a:p>
-          <a:p>
-            <a:pPr lvl="4"/>
+            <a:endParaRPr/>
+          </a:p>
+          <a:p>
+            <a:pPr lvl="4">
+              <a:defRPr/>
+            </a:pPr>
             <a:r>
               <a:rPr lang="en-US"/>
               <a:t>Fifth level</a:t>
             </a:r>
-            <a:endParaRPr lang="en-US" dirty="0"/>
-          </a:p>
-        </p:txBody>
-      </p:sp>
-      <p:sp>
-        <p:nvSpPr>
-          <p:cNvPr id="4" name="Text Placeholder 3"/>
+            <a:endParaRPr lang="en-US"/>
+          </a:p>
+        </p:txBody>
+      </p:sp>
+      <p:sp>
+        <p:nvSpPr>
+          <p:cNvPr id="1419424816" name="Text Placeholder 3"/>
           <p:cNvSpPr>
             <a:spLocks noGrp="1"/>
           </p:cNvSpPr>
@@ -2041,7 +3562,7 @@
             <p:ph type="body" sz="half" idx="2"/>
           </p:nvPr>
         </p:nvSpPr>
-        <p:spPr>
+        <p:spPr bwMode="auto">
           <a:xfrm>
             <a:off x="839788" y="2057400"/>
             <a:ext cx="3932237" cy="3811588"/>
@@ -2088,17 +3609,20 @@
             </a:lvl9pPr>
           </a:lstStyle>
           <a:p>
-            <a:pPr lvl="0"/>
+            <a:pPr lvl="0">
+              <a:defRPr/>
+            </a:pPr>
             <a:r>
               <a:rPr lang="en-US"/>
               <a:t>Click to edit Master text styles</a:t>
             </a:r>
-          </a:p>
-        </p:txBody>
-      </p:sp>
-      <p:sp>
-        <p:nvSpPr>
-          <p:cNvPr id="5" name="Date Placeholder 4"/>
+            <a:endParaRPr/>
+          </a:p>
+        </p:txBody>
+      </p:sp>
+      <p:sp>
+        <p:nvSpPr>
+          <p:cNvPr id="1633924284" name="Date Placeholder 4"/>
           <p:cNvSpPr>
             <a:spLocks noGrp="1"/>
           </p:cNvSpPr>
@@ -2106,13 +3630,16 @@
             <p:ph type="dt" sz="half" idx="10"/>
           </p:nvPr>
         </p:nvSpPr>
-        <p:spPr/>
-        <p:txBody>
-          <a:bodyPr/>
-          <a:lstStyle/>
-          <a:p>
+        <p:spPr bwMode="auto"/>
+        <p:txBody>
+          <a:bodyPr/>
+          <a:lstStyle/>
+          <a:p>
+            <a:pPr>
+              <a:defRPr/>
+            </a:pPr>
             <a:fld id="{846CE7D5-CF57-46EF-B807-FDD0502418D4}" type="datetimeFigureOut">
-              <a:rPr lang="en-US" smtClean="0"/>
+              <a:rPr lang="en-US"/>
               <a:t>5/16/2026</a:t>
             </a:fld>
             <a:endParaRPr lang="en-US"/>
@@ -2121,7 +3648,7 @@
       </p:sp>
       <p:sp>
         <p:nvSpPr>
-          <p:cNvPr id="6" name="Footer Placeholder 5"/>
+          <p:cNvPr id="1795901787" name="Footer Placeholder 5"/>
           <p:cNvSpPr>
             <a:spLocks noGrp="1"/>
           </p:cNvSpPr>
@@ -2129,18 +3656,21 @@
             <p:ph type="ftr" sz="quarter" idx="11"/>
           </p:nvPr>
         </p:nvSpPr>
-        <p:spPr/>
-        <p:txBody>
-          <a:bodyPr/>
-          <a:lstStyle/>
-          <a:p>
-            <a:endParaRPr lang="en-US"/>
-          </a:p>
-        </p:txBody>
-      </p:sp>
-      <p:sp>
-        <p:nvSpPr>
-          <p:cNvPr id="7" name="Slide Number Placeholder 6"/>
+        <p:spPr bwMode="auto"/>
+        <p:txBody>
+          <a:bodyPr/>
+          <a:lstStyle/>
+          <a:p>
+            <a:pPr>
+              <a:defRPr/>
+            </a:pPr>
+            <a:endParaRPr lang="en-US"/>
+          </a:p>
+        </p:txBody>
+      </p:sp>
+      <p:sp>
+        <p:nvSpPr>
+          <p:cNvPr id="1705974733" name="Slide Number Placeholder 6"/>
           <p:cNvSpPr>
             <a:spLocks noGrp="1"/>
           </p:cNvSpPr>
@@ -2148,13 +3678,16 @@
             <p:ph type="sldNum" sz="quarter" idx="12"/>
           </p:nvPr>
         </p:nvSpPr>
-        <p:spPr/>
-        <p:txBody>
-          <a:bodyPr/>
-          <a:lstStyle/>
-          <a:p>
+        <p:spPr bwMode="auto"/>
+        <p:txBody>
+          <a:bodyPr/>
+          <a:lstStyle/>
+          <a:p>
+            <a:pPr>
+              <a:defRPr/>
+            </a:pPr>
             <a:fld id="{330EA680-D336-4FF7-8B7A-9848BB0A1C32}" type="slidenum">
-              <a:rPr lang="en-US" smtClean="0"/>
+              <a:rPr lang="en-US"/>
               <a:t>‹#›</a:t>
             </a:fld>
             <a:endParaRPr lang="en-US"/>
@@ -2162,11 +3695,6 @@
         </p:txBody>
       </p:sp>
     </p:spTree>
-    <p:extLst>
-      <p:ext uri="{BB962C8B-B14F-4D97-AF65-F5344CB8AC3E}">
-        <p14:creationId xmlns:p14="http://schemas.microsoft.com/office/powerpoint/2010/main" val="3171841454"/>
-      </p:ext>
-    </p:extLst>
   </p:cSld>
   <p:clrMapOvr>
     <a:masterClrMapping/>
@@ -2175,7 +3703,7 @@
 </file>
 
 <file path=ppt/slideLayouts/slideLayout9.xml><?xml version="1.0" encoding="utf-8"?>
-<p:sldLayout xmlns:a="http://schemas.openxmlformats.org/drawingml/2006/main" xmlns:r="http://schemas.openxmlformats.org/officeDocument/2006/relationships" xmlns:p="http://schemas.openxmlformats.org/presentationml/2006/main" type="picTx" preserve="1">
+<p:sldLayout xmlns:a="http://schemas.openxmlformats.org/drawingml/2006/main" xmlns:r="http://schemas.openxmlformats.org/officeDocument/2006/relationships" xmlns:p="http://schemas.openxmlformats.org/presentationml/2006/main" xmlns:m="http://schemas.openxmlformats.org/officeDocument/2006/math" xmlns:w="http://schemas.openxmlformats.org/wordprocessingml/2006/main" matchingName="" preserve="1" showMasterPhAnim="0" showMasterSp="1" type="picTx" userDrawn="1">
   <p:cSld name="Picture with Caption">
     <p:spTree>
       <p:nvGrpSpPr>
@@ -2183,7 +3711,7 @@
         <p:cNvGrpSpPr/>
         <p:nvPr/>
       </p:nvGrpSpPr>
-      <p:grpSpPr>
+      <p:grpSpPr bwMode="auto">
         <a:xfrm>
           <a:off x="0" y="0"/>
           <a:ext cx="0" cy="0"/>
@@ -2193,7 +3721,7 @@
       </p:grpSpPr>
       <p:sp>
         <p:nvSpPr>
-          <p:cNvPr id="2" name="Title 1"/>
+          <p:cNvPr id="1565341317" name="Title 1"/>
           <p:cNvSpPr>
             <a:spLocks noGrp="1"/>
           </p:cNvSpPr>
@@ -2201,7 +3729,7 @@
             <p:ph type="title"/>
           </p:nvPr>
         </p:nvSpPr>
-        <p:spPr>
+        <p:spPr bwMode="auto">
           <a:xfrm>
             <a:off x="839788" y="457200"/>
             <a:ext cx="3932237" cy="1600200"/>
@@ -2215,25 +3743,28 @@
             </a:lvl1pPr>
           </a:lstStyle>
           <a:p>
+            <a:pPr>
+              <a:defRPr/>
+            </a:pPr>
             <a:r>
               <a:rPr lang="en-US"/>
               <a:t>Click to edit Master title style</a:t>
             </a:r>
-            <a:endParaRPr lang="en-US" dirty="0"/>
-          </a:p>
-        </p:txBody>
-      </p:sp>
-      <p:sp>
-        <p:nvSpPr>
-          <p:cNvPr id="3" name="Picture Placeholder 2"/>
-          <p:cNvSpPr>
-            <a:spLocks noGrp="1" noChangeAspect="1"/>
+            <a:endParaRPr lang="en-US"/>
+          </a:p>
+        </p:txBody>
+      </p:sp>
+      <p:sp>
+        <p:nvSpPr>
+          <p:cNvPr id="126188785" name="Picture Placeholder 2"/>
+          <p:cNvSpPr>
+            <a:spLocks noChangeAspect="1" noGrp="1"/>
           </p:cNvSpPr>
           <p:nvPr>
             <p:ph type="pic" idx="1"/>
           </p:nvPr>
         </p:nvSpPr>
-        <p:spPr>
+        <p:spPr bwMode="auto">
           <a:xfrm>
             <a:off x="5183188" y="987425"/>
             <a:ext cx="6172200" cy="4873625"/>
@@ -2280,17 +3811,20 @@
             </a:lvl9pPr>
           </a:lstStyle>
           <a:p>
+            <a:pPr>
+              <a:defRPr/>
+            </a:pPr>
             <a:r>
               <a:rPr lang="en-US"/>
               <a:t>Click icon to add picture</a:t>
             </a:r>
-            <a:endParaRPr lang="en-US" dirty="0"/>
-          </a:p>
-        </p:txBody>
-      </p:sp>
-      <p:sp>
-        <p:nvSpPr>
-          <p:cNvPr id="4" name="Text Placeholder 3"/>
+            <a:endParaRPr lang="en-US"/>
+          </a:p>
+        </p:txBody>
+      </p:sp>
+      <p:sp>
+        <p:nvSpPr>
+          <p:cNvPr id="1375731182" name="Text Placeholder 3"/>
           <p:cNvSpPr>
             <a:spLocks noGrp="1"/>
           </p:cNvSpPr>
@@ -2298,7 +3832,7 @@
             <p:ph type="body" sz="half" idx="2"/>
           </p:nvPr>
         </p:nvSpPr>
-        <p:spPr>
+        <p:spPr bwMode="auto">
           <a:xfrm>
             <a:off x="839788" y="2057400"/>
             <a:ext cx="3932237" cy="3811588"/>
@@ -2345,17 +3879,20 @@
             </a:lvl9pPr>
           </a:lstStyle>
           <a:p>
-            <a:pPr lvl="0"/>
+            <a:pPr lvl="0">
+              <a:defRPr/>
+            </a:pPr>
             <a:r>
               <a:rPr lang="en-US"/>
               <a:t>Click to edit Master text styles</a:t>
             </a:r>
-          </a:p>
-        </p:txBody>
-      </p:sp>
-      <p:sp>
-        <p:nvSpPr>
-          <p:cNvPr id="5" name="Date Placeholder 4"/>
+            <a:endParaRPr/>
+          </a:p>
+        </p:txBody>
+      </p:sp>
+      <p:sp>
+        <p:nvSpPr>
+          <p:cNvPr id="866835503" name="Date Placeholder 4"/>
           <p:cNvSpPr>
             <a:spLocks noGrp="1"/>
           </p:cNvSpPr>
@@ -2363,13 +3900,16 @@
             <p:ph type="dt" sz="half" idx="10"/>
           </p:nvPr>
         </p:nvSpPr>
-        <p:spPr/>
-        <p:txBody>
-          <a:bodyPr/>
-          <a:lstStyle/>
-          <a:p>
+        <p:spPr bwMode="auto"/>
+        <p:txBody>
+          <a:bodyPr/>
+          <a:lstStyle/>
+          <a:p>
+            <a:pPr>
+              <a:defRPr/>
+            </a:pPr>
             <a:fld id="{846CE7D5-CF57-46EF-B807-FDD0502418D4}" type="datetimeFigureOut">
-              <a:rPr lang="en-US" smtClean="0"/>
+              <a:rPr lang="en-US"/>
               <a:t>5/16/2026</a:t>
             </a:fld>
             <a:endParaRPr lang="en-US"/>
@@ -2378,7 +3918,7 @@
       </p:sp>
       <p:sp>
         <p:nvSpPr>
-          <p:cNvPr id="6" name="Footer Placeholder 5"/>
+          <p:cNvPr id="2084382823" name="Footer Placeholder 5"/>
           <p:cNvSpPr>
             <a:spLocks noGrp="1"/>
           </p:cNvSpPr>
@@ -2386,18 +3926,21 @@
             <p:ph type="ftr" sz="quarter" idx="11"/>
           </p:nvPr>
         </p:nvSpPr>
-        <p:spPr/>
-        <p:txBody>
-          <a:bodyPr/>
-          <a:lstStyle/>
-          <a:p>
-            <a:endParaRPr lang="en-US"/>
-          </a:p>
-        </p:txBody>
-      </p:sp>
-      <p:sp>
-        <p:nvSpPr>
-          <p:cNvPr id="7" name="Slide Number Placeholder 6"/>
+        <p:spPr bwMode="auto"/>
+        <p:txBody>
+          <a:bodyPr/>
+          <a:lstStyle/>
+          <a:p>
+            <a:pPr>
+              <a:defRPr/>
+            </a:pPr>
+            <a:endParaRPr lang="en-US"/>
+          </a:p>
+        </p:txBody>
+      </p:sp>
+      <p:sp>
+        <p:nvSpPr>
+          <p:cNvPr id="576454811" name="Slide Number Placeholder 6"/>
           <p:cNvSpPr>
             <a:spLocks noGrp="1"/>
           </p:cNvSpPr>
@@ -2405,13 +3948,16 @@
             <p:ph type="sldNum" sz="quarter" idx="12"/>
           </p:nvPr>
         </p:nvSpPr>
-        <p:spPr/>
-        <p:txBody>
-          <a:bodyPr/>
-          <a:lstStyle/>
-          <a:p>
+        <p:spPr bwMode="auto"/>
+        <p:txBody>
+          <a:bodyPr/>
+          <a:lstStyle/>
+          <a:p>
+            <a:pPr>
+              <a:defRPr/>
+            </a:pPr>
             <a:fld id="{330EA680-D336-4FF7-8B7A-9848BB0A1C32}" type="slidenum">
-              <a:rPr lang="en-US" smtClean="0"/>
+              <a:rPr lang="en-US"/>
               <a:t>‹#›</a:t>
             </a:fld>
             <a:endParaRPr lang="en-US"/>
@@ -2419,11 +3965,6 @@
         </p:txBody>
       </p:sp>
     </p:spTree>
-    <p:extLst>
-      <p:ext uri="{BB962C8B-B14F-4D97-AF65-F5344CB8AC3E}">
-        <p14:creationId xmlns:p14="http://schemas.microsoft.com/office/powerpoint/2010/main" val="1718958274"/>
-      </p:ext>
-    </p:extLst>
   </p:cSld>
   <p:clrMapOvr>
     <a:masterClrMapping/>
@@ -2432,8 +3973,8 @@
 </file>
 
 <file path=ppt/slideMasters/slideMaster1.xml><?xml version="1.0" encoding="utf-8"?>
-<p:sldMaster xmlns:a="http://schemas.openxmlformats.org/drawingml/2006/main" xmlns:r="http://schemas.openxmlformats.org/officeDocument/2006/relationships" xmlns:p="http://schemas.openxmlformats.org/presentationml/2006/main">
-  <p:cSld>
+<p:sldMaster xmlns:a="http://schemas.openxmlformats.org/drawingml/2006/main" xmlns:r="http://schemas.openxmlformats.org/officeDocument/2006/relationships" xmlns:p="http://schemas.openxmlformats.org/presentationml/2006/main" xmlns:m="http://schemas.openxmlformats.org/officeDocument/2006/math" xmlns:w="http://schemas.openxmlformats.org/wordprocessingml/2006/main" preserve="0">
+  <p:cSld name="">
     <p:bg>
       <p:bgRef idx="1001">
         <a:schemeClr val="bg1"/>
@@ -2445,7 +3986,7 @@
         <p:cNvGrpSpPr/>
         <p:nvPr/>
       </p:nvGrpSpPr>
-      <p:grpSpPr>
+      <p:grpSpPr bwMode="auto">
         <a:xfrm>
           <a:off x="0" y="0"/>
           <a:ext cx="0" cy="0"/>
@@ -2455,7 +3996,7 @@
       </p:grpSpPr>
       <p:sp>
         <p:nvSpPr>
-          <p:cNvPr id="2" name="Title Placeholder 1"/>
+          <p:cNvPr id="656687910" name="Title Placeholder 1"/>
           <p:cNvSpPr>
             <a:spLocks noGrp="1"/>
           </p:cNvSpPr>
@@ -2463,7 +4004,7 @@
             <p:ph type="title"/>
           </p:nvPr>
         </p:nvSpPr>
-        <p:spPr>
+        <p:spPr bwMode="auto">
           <a:xfrm>
             <a:off x="838200" y="365125"/>
             <a:ext cx="10515600" cy="1325563"/>
@@ -2478,17 +4019,20 @@
           </a:bodyPr>
           <a:lstStyle/>
           <a:p>
+            <a:pPr>
+              <a:defRPr/>
+            </a:pPr>
             <a:r>
               <a:rPr lang="en-US"/>
               <a:t>Click to edit Master title style</a:t>
             </a:r>
-            <a:endParaRPr lang="en-US" dirty="0"/>
-          </a:p>
-        </p:txBody>
-      </p:sp>
-      <p:sp>
-        <p:nvSpPr>
-          <p:cNvPr id="3" name="Text Placeholder 2"/>
+            <a:endParaRPr lang="en-US"/>
+          </a:p>
+        </p:txBody>
+      </p:sp>
+      <p:sp>
+        <p:nvSpPr>
+          <p:cNvPr id="563568409" name="Text Placeholder 2"/>
           <p:cNvSpPr>
             <a:spLocks noGrp="1"/>
           </p:cNvSpPr>
@@ -2496,7 +4040,7 @@
             <p:ph type="body" idx="1"/>
           </p:nvPr>
         </p:nvSpPr>
-        <p:spPr>
+        <p:spPr bwMode="auto">
           <a:xfrm>
             <a:off x="838200" y="1825625"/>
             <a:ext cx="10515600" cy="4351338"/>
@@ -2511,46 +4055,60 @@
           </a:bodyPr>
           <a:lstStyle/>
           <a:p>
-            <a:pPr lvl="0"/>
+            <a:pPr lvl="0">
+              <a:defRPr/>
+            </a:pPr>
             <a:r>
               <a:rPr lang="en-US"/>
               <a:t>Click to edit Master text styles</a:t>
             </a:r>
-          </a:p>
-          <a:p>
-            <a:pPr lvl="1"/>
+            <a:endParaRPr/>
+          </a:p>
+          <a:p>
+            <a:pPr lvl="1">
+              <a:defRPr/>
+            </a:pPr>
             <a:r>
               <a:rPr lang="en-US"/>
               <a:t>Second level</a:t>
             </a:r>
-          </a:p>
-          <a:p>
-            <a:pPr lvl="2"/>
+            <a:endParaRPr/>
+          </a:p>
+          <a:p>
+            <a:pPr lvl="2">
+              <a:defRPr/>
+            </a:pPr>
             <a:r>
               <a:rPr lang="en-US"/>
               <a:t>Third level</a:t>
             </a:r>
-          </a:p>
-          <a:p>
-            <a:pPr lvl="3"/>
+            <a:endParaRPr/>
+          </a:p>
+          <a:p>
+            <a:pPr lvl="3">
+              <a:defRPr/>
+            </a:pPr>
             <a:r>
               <a:rPr lang="en-US"/>
               <a:t>Fourth level</a:t>
             </a:r>
-          </a:p>
-          <a:p>
-            <a:pPr lvl="4"/>
+            <a:endParaRPr/>
+          </a:p>
+          <a:p>
+            <a:pPr lvl="4">
+              <a:defRPr/>
+            </a:pPr>
             <a:r>
               <a:rPr lang="en-US"/>
               <a:t>Fifth level</a:t>
             </a:r>
-            <a:endParaRPr lang="en-US" dirty="0"/>
-          </a:p>
-        </p:txBody>
-      </p:sp>
-      <p:sp>
-        <p:nvSpPr>
-          <p:cNvPr id="4" name="Date Placeholder 3"/>
+            <a:endParaRPr lang="en-US"/>
+          </a:p>
+        </p:txBody>
+      </p:sp>
+      <p:sp>
+        <p:nvSpPr>
+          <p:cNvPr id="1326837622" name="Date Placeholder 3"/>
           <p:cNvSpPr>
             <a:spLocks noGrp="1"/>
           </p:cNvSpPr>
@@ -2558,7 +4116,7 @@
             <p:ph type="dt" sz="half" idx="2"/>
           </p:nvPr>
         </p:nvSpPr>
-        <p:spPr>
+        <p:spPr bwMode="auto">
           <a:xfrm>
             <a:off x="838200" y="6356350"/>
             <a:ext cx="2743200" cy="365125"/>
@@ -2581,8 +4139,11 @@
             </a:lvl1pPr>
           </a:lstStyle>
           <a:p>
+            <a:pPr>
+              <a:defRPr/>
+            </a:pPr>
             <a:fld id="{846CE7D5-CF57-46EF-B807-FDD0502418D4}" type="datetimeFigureOut">
-              <a:rPr lang="en-US" smtClean="0"/>
+              <a:rPr lang="en-US"/>
               <a:t>5/16/2026</a:t>
             </a:fld>
             <a:endParaRPr lang="en-US"/>
@@ -2591,7 +4152,7 @@
       </p:sp>
       <p:sp>
         <p:nvSpPr>
-          <p:cNvPr id="5" name="Footer Placeholder 4"/>
+          <p:cNvPr id="73889053" name="Footer Placeholder 4"/>
           <p:cNvSpPr>
             <a:spLocks noGrp="1"/>
           </p:cNvSpPr>
@@ -2599,7 +4160,7 @@
             <p:ph type="ftr" sz="quarter" idx="3"/>
           </p:nvPr>
         </p:nvSpPr>
-        <p:spPr>
+        <p:spPr bwMode="auto">
           <a:xfrm>
             <a:off x="4038600" y="6356350"/>
             <a:ext cx="4114800" cy="365125"/>
@@ -2622,13 +4183,16 @@
             </a:lvl1pPr>
           </a:lstStyle>
           <a:p>
-            <a:endParaRPr lang="en-US"/>
-          </a:p>
-        </p:txBody>
-      </p:sp>
-      <p:sp>
-        <p:nvSpPr>
-          <p:cNvPr id="6" name="Slide Number Placeholder 5"/>
+            <a:pPr>
+              <a:defRPr/>
+            </a:pPr>
+            <a:endParaRPr lang="en-US"/>
+          </a:p>
+        </p:txBody>
+      </p:sp>
+      <p:sp>
+        <p:nvSpPr>
+          <p:cNvPr id="1065683462" name="Slide Number Placeholder 5"/>
           <p:cNvSpPr>
             <a:spLocks noGrp="1"/>
           </p:cNvSpPr>
@@ -2636,7 +4200,7 @@
             <p:ph type="sldNum" sz="quarter" idx="4"/>
           </p:nvPr>
         </p:nvSpPr>
-        <p:spPr>
+        <p:spPr bwMode="auto">
           <a:xfrm>
             <a:off x="8610600" y="6356350"/>
             <a:ext cx="2743200" cy="365125"/>
@@ -2659,8 +4223,11 @@
             </a:lvl1pPr>
           </a:lstStyle>
           <a:p>
+            <a:pPr>
+              <a:defRPr/>
+            </a:pPr>
             <a:fld id="{330EA680-D336-4FF7-8B7A-9848BB0A1C32}" type="slidenum">
-              <a:rPr lang="en-US" smtClean="0"/>
+              <a:rPr lang="en-US"/>
               <a:t>‹#›</a:t>
             </a:fld>
             <a:endParaRPr lang="en-US"/>
@@ -2668,37 +4235,32 @@
         </p:txBody>
       </p:sp>
     </p:spTree>
-    <p:extLst>
-      <p:ext uri="{BB962C8B-B14F-4D97-AF65-F5344CB8AC3E}">
-        <p14:creationId xmlns:p14="http://schemas.microsoft.com/office/powerpoint/2010/main" val="2460954070"/>
-      </p:ext>
-    </p:extLst>
   </p:cSld>
   <p:clrMap bg1="lt1" tx1="dk1" bg2="lt2" tx2="dk2" accent1="accent1" accent2="accent2" accent3="accent3" accent4="accent4" accent5="accent5" accent6="accent6" hlink="hlink" folHlink="folHlink"/>
   <p:sldLayoutIdLst>
-    <p:sldLayoutId id="2147483661" r:id="rId1"/>
-    <p:sldLayoutId id="2147483662" r:id="rId2"/>
-    <p:sldLayoutId id="2147483663" r:id="rId3"/>
-    <p:sldLayoutId id="2147483664" r:id="rId4"/>
-    <p:sldLayoutId id="2147483665" r:id="rId5"/>
-    <p:sldLayoutId id="2147483666" r:id="rId6"/>
-    <p:sldLayoutId id="2147483667" r:id="rId7"/>
-    <p:sldLayoutId id="2147483668" r:id="rId8"/>
-    <p:sldLayoutId id="2147483669" r:id="rId9"/>
-    <p:sldLayoutId id="2147483670" r:id="rId10"/>
-    <p:sldLayoutId id="2147483671" r:id="rId11"/>
+    <p:sldLayoutId id="2147483649" r:id="rId1"/>
+    <p:sldLayoutId id="2147483650" r:id="rId2"/>
+    <p:sldLayoutId id="2147483651" r:id="rId3"/>
+    <p:sldLayoutId id="2147483652" r:id="rId4"/>
+    <p:sldLayoutId id="2147483653" r:id="rId5"/>
+    <p:sldLayoutId id="2147483654" r:id="rId6"/>
+    <p:sldLayoutId id="2147483655" r:id="rId7"/>
+    <p:sldLayoutId id="2147483656" r:id="rId8"/>
+    <p:sldLayoutId id="2147483657" r:id="rId9"/>
+    <p:sldLayoutId id="2147483658" r:id="rId10"/>
+    <p:sldLayoutId id="2147483659" r:id="rId11"/>
   </p:sldLayoutIdLst>
   <p:txStyles>
     <p:titleStyle>
-      <a:lvl1pPr algn="l" defTabSz="914400" rtl="0" eaLnBrk="1" latinLnBrk="0" hangingPunct="1">
+      <a:lvl1pPr algn="l" defTabSz="914400" rtl="0">
         <a:lnSpc>
           <a:spcPct val="90000"/>
         </a:lnSpc>
         <a:spcBef>
-          <a:spcPct val="0"/>
+          <a:spcPts val="0"/>
         </a:spcBef>
         <a:buNone/>
-        <a:defRPr sz="4400" kern="1200">
+        <a:defRPr sz="4400">
           <a:solidFill>
             <a:schemeClr val="tx1"/>
           </a:solidFill>
@@ -2709,16 +4271,16 @@
       </a:lvl1pPr>
     </p:titleStyle>
     <p:bodyStyle>
-      <a:lvl1pPr marL="228600" indent="-228600" algn="l" defTabSz="914400" rtl="0" eaLnBrk="1" latinLnBrk="0" hangingPunct="1">
+      <a:lvl1pPr marL="228600" indent="-228600" algn="l" defTabSz="914400" rtl="0">
         <a:lnSpc>
           <a:spcPct val="90000"/>
         </a:lnSpc>
         <a:spcBef>
           <a:spcPts val="1000"/>
         </a:spcBef>
-        <a:buFont typeface="Arial" panose="020B0604020202020204" pitchFamily="34" charset="0"/>
+        <a:buFont typeface="Arial"/>
         <a:buChar char="•"/>
-        <a:defRPr sz="2800" kern="1200">
+        <a:defRPr sz="2800">
           <a:solidFill>
             <a:schemeClr val="tx1"/>
           </a:solidFill>
@@ -2727,16 +4289,16 @@
           <a:cs typeface="+mn-cs"/>
         </a:defRPr>
       </a:lvl1pPr>
-      <a:lvl2pPr marL="685800" indent="-228600" algn="l" defTabSz="914400" rtl="0" eaLnBrk="1" latinLnBrk="0" hangingPunct="1">
+      <a:lvl2pPr marL="685800" indent="-228600" algn="l" defTabSz="914400" rtl="0">
         <a:lnSpc>
           <a:spcPct val="90000"/>
         </a:lnSpc>
         <a:spcBef>
           <a:spcPts val="500"/>
         </a:spcBef>
-        <a:buFont typeface="Arial" panose="020B0604020202020204" pitchFamily="34" charset="0"/>
+        <a:buFont typeface="Arial"/>
         <a:buChar char="•"/>
-        <a:defRPr sz="2400" kern="1200">
+        <a:defRPr sz="2400">
           <a:solidFill>
             <a:schemeClr val="tx1"/>
           </a:solidFill>
@@ -2745,16 +4307,16 @@
           <a:cs typeface="+mn-cs"/>
         </a:defRPr>
       </a:lvl2pPr>
-      <a:lvl3pPr marL="1143000" indent="-228600" algn="l" defTabSz="914400" rtl="0" eaLnBrk="1" latinLnBrk="0" hangingPunct="1">
+      <a:lvl3pPr marL="1143000" indent="-228600" algn="l" defTabSz="914400" rtl="0">
         <a:lnSpc>
           <a:spcPct val="90000"/>
         </a:lnSpc>
         <a:spcBef>
           <a:spcPts val="500"/>
         </a:spcBef>
-        <a:buFont typeface="Arial" panose="020B0604020202020204" pitchFamily="34" charset="0"/>
+        <a:buFont typeface="Arial"/>
         <a:buChar char="•"/>
-        <a:defRPr sz="2000" kern="1200">
+        <a:defRPr sz="2000">
           <a:solidFill>
             <a:schemeClr val="tx1"/>
           </a:solidFill>
@@ -2763,16 +4325,16 @@
           <a:cs typeface="+mn-cs"/>
         </a:defRPr>
       </a:lvl3pPr>
-      <a:lvl4pPr marL="1600200" indent="-228600" algn="l" defTabSz="914400" rtl="0" eaLnBrk="1" latinLnBrk="0" hangingPunct="1">
+      <a:lvl4pPr marL="1600200" indent="-228600" algn="l" defTabSz="914400" rtl="0">
         <a:lnSpc>
           <a:spcPct val="90000"/>
         </a:lnSpc>
         <a:spcBef>
           <a:spcPts val="500"/>
         </a:spcBef>
-        <a:buFont typeface="Arial" panose="020B0604020202020204" pitchFamily="34" charset="0"/>
+        <a:buFont typeface="Arial"/>
         <a:buChar char="•"/>
-        <a:defRPr sz="1800" kern="1200">
+        <a:defRPr sz="1800">
           <a:solidFill>
             <a:schemeClr val="tx1"/>
           </a:solidFill>
@@ -2781,16 +4343,16 @@
           <a:cs typeface="+mn-cs"/>
         </a:defRPr>
       </a:lvl4pPr>
-      <a:lvl5pPr marL="2057400" indent="-228600" algn="l" defTabSz="914400" rtl="0" eaLnBrk="1" latinLnBrk="0" hangingPunct="1">
+      <a:lvl5pPr marL="2057400" indent="-228600" algn="l" defTabSz="914400" rtl="0">
         <a:lnSpc>
           <a:spcPct val="90000"/>
         </a:lnSpc>
         <a:spcBef>
           <a:spcPts val="500"/>
         </a:spcBef>
-        <a:buFont typeface="Arial" panose="020B0604020202020204" pitchFamily="34" charset="0"/>
+        <a:buFont typeface="Arial"/>
         <a:buChar char="•"/>
-        <a:defRPr sz="1800" kern="1200">
+        <a:defRPr sz="1800">
           <a:solidFill>
             <a:schemeClr val="tx1"/>
           </a:solidFill>
@@ -2799,16 +4361,16 @@
           <a:cs typeface="+mn-cs"/>
         </a:defRPr>
       </a:lvl5pPr>
-      <a:lvl6pPr marL="2514600" indent="-228600" algn="l" defTabSz="914400" rtl="0" eaLnBrk="1" latinLnBrk="0" hangingPunct="1">
+      <a:lvl6pPr marL="2514600" indent="-228600" algn="l" defTabSz="914400" rtl="0">
         <a:lnSpc>
           <a:spcPct val="90000"/>
         </a:lnSpc>
         <a:spcBef>
           <a:spcPts val="500"/>
         </a:spcBef>
-        <a:buFont typeface="Arial" panose="020B0604020202020204" pitchFamily="34" charset="0"/>
+        <a:buFont typeface="Arial"/>
         <a:buChar char="•"/>
-        <a:defRPr sz="1800" kern="1200">
+        <a:defRPr sz="1800">
           <a:solidFill>
             <a:schemeClr val="tx1"/>
           </a:solidFill>
@@ -2817,16 +4379,16 @@
           <a:cs typeface="+mn-cs"/>
         </a:defRPr>
       </a:lvl6pPr>
-      <a:lvl7pPr marL="2971800" indent="-228600" algn="l" defTabSz="914400" rtl="0" eaLnBrk="1" latinLnBrk="0" hangingPunct="1">
+      <a:lvl7pPr marL="2971800" indent="-228600" algn="l" defTabSz="914400" rtl="0">
         <a:lnSpc>
           <a:spcPct val="90000"/>
         </a:lnSpc>
         <a:spcBef>
           <a:spcPts val="500"/>
         </a:spcBef>
-        <a:buFont typeface="Arial" panose="020B0604020202020204" pitchFamily="34" charset="0"/>
+        <a:buFont typeface="Arial"/>
         <a:buChar char="•"/>
-        <a:defRPr sz="1800" kern="1200">
+        <a:defRPr sz="1800">
           <a:solidFill>
             <a:schemeClr val="tx1"/>
           </a:solidFill>
@@ -2835,16 +4397,16 @@
           <a:cs typeface="+mn-cs"/>
         </a:defRPr>
       </a:lvl7pPr>
-      <a:lvl8pPr marL="3429000" indent="-228600" algn="l" defTabSz="914400" rtl="0" eaLnBrk="1" latinLnBrk="0" hangingPunct="1">
+      <a:lvl8pPr marL="3429000" indent="-228600" algn="l" defTabSz="914400" rtl="0">
         <a:lnSpc>
           <a:spcPct val="90000"/>
         </a:lnSpc>
         <a:spcBef>
           <a:spcPts val="500"/>
         </a:spcBef>
-        <a:buFont typeface="Arial" panose="020B0604020202020204" pitchFamily="34" charset="0"/>
+        <a:buFont typeface="Arial"/>
         <a:buChar char="•"/>
-        <a:defRPr sz="1800" kern="1200">
+        <a:defRPr sz="1800">
           <a:solidFill>
             <a:schemeClr val="tx1"/>
           </a:solidFill>
@@ -2853,16 +4415,16 @@
           <a:cs typeface="+mn-cs"/>
         </a:defRPr>
       </a:lvl8pPr>
-      <a:lvl9pPr marL="3886200" indent="-228600" algn="l" defTabSz="914400" rtl="0" eaLnBrk="1" latinLnBrk="0" hangingPunct="1">
+      <a:lvl9pPr marL="3886200" indent="-228600" algn="l" defTabSz="914400" rtl="0">
         <a:lnSpc>
           <a:spcPct val="90000"/>
         </a:lnSpc>
         <a:spcBef>
           <a:spcPts val="500"/>
         </a:spcBef>
-        <a:buFont typeface="Arial" panose="020B0604020202020204" pitchFamily="34" charset="0"/>
+        <a:buFont typeface="Arial"/>
         <a:buChar char="•"/>
-        <a:defRPr sz="1800" kern="1200">
+        <a:defRPr sz="1800">
           <a:solidFill>
             <a:schemeClr val="tx1"/>
           </a:solidFill>
@@ -2876,8 +4438,8 @@
       <a:defPPr>
         <a:defRPr lang="en-US"/>
       </a:defPPr>
-      <a:lvl1pPr marL="0" algn="l" defTabSz="914400" rtl="0" eaLnBrk="1" latinLnBrk="0" hangingPunct="1">
-        <a:defRPr sz="1800" kern="1200">
+      <a:lvl1pPr marL="0" algn="l" defTabSz="914400" rtl="0">
+        <a:defRPr sz="1800">
           <a:solidFill>
             <a:schemeClr val="tx1"/>
           </a:solidFill>
@@ -2886,8 +4448,8 @@
           <a:cs typeface="+mn-cs"/>
         </a:defRPr>
       </a:lvl1pPr>
-      <a:lvl2pPr marL="457200" algn="l" defTabSz="914400" rtl="0" eaLnBrk="1" latinLnBrk="0" hangingPunct="1">
-        <a:defRPr sz="1800" kern="1200">
+      <a:lvl2pPr marL="457200" algn="l" defTabSz="914400" rtl="0">
+        <a:defRPr sz="1800">
           <a:solidFill>
             <a:schemeClr val="tx1"/>
           </a:solidFill>
@@ -2896,8 +4458,8 @@
           <a:cs typeface="+mn-cs"/>
         </a:defRPr>
       </a:lvl2pPr>
-      <a:lvl3pPr marL="914400" algn="l" defTabSz="914400" rtl="0" eaLnBrk="1" latinLnBrk="0" hangingPunct="1">
-        <a:defRPr sz="1800" kern="1200">
+      <a:lvl3pPr marL="914400" algn="l" defTabSz="914400" rtl="0">
+        <a:defRPr sz="1800">
           <a:solidFill>
             <a:schemeClr val="tx1"/>
           </a:solidFill>
@@ -2906,8 +4468,8 @@
           <a:cs typeface="+mn-cs"/>
         </a:defRPr>
       </a:lvl3pPr>
-      <a:lvl4pPr marL="1371600" algn="l" defTabSz="914400" rtl="0" eaLnBrk="1" latinLnBrk="0" hangingPunct="1">
-        <a:defRPr sz="1800" kern="1200">
+      <a:lvl4pPr marL="1371600" algn="l" defTabSz="914400" rtl="0">
+        <a:defRPr sz="1800">
           <a:solidFill>
             <a:schemeClr val="tx1"/>
           </a:solidFill>
@@ -2916,8 +4478,8 @@
           <a:cs typeface="+mn-cs"/>
         </a:defRPr>
       </a:lvl4pPr>
-      <a:lvl5pPr marL="1828800" algn="l" defTabSz="914400" rtl="0" eaLnBrk="1" latinLnBrk="0" hangingPunct="1">
-        <a:defRPr sz="1800" kern="1200">
+      <a:lvl5pPr marL="1828800" algn="l" defTabSz="914400" rtl="0">
+        <a:defRPr sz="1800">
           <a:solidFill>
             <a:schemeClr val="tx1"/>
           </a:solidFill>
@@ -2926,8 +4488,8 @@
           <a:cs typeface="+mn-cs"/>
         </a:defRPr>
       </a:lvl5pPr>
-      <a:lvl6pPr marL="2286000" algn="l" defTabSz="914400" rtl="0" eaLnBrk="1" latinLnBrk="0" hangingPunct="1">
-        <a:defRPr sz="1800" kern="1200">
+      <a:lvl6pPr marL="2286000" algn="l" defTabSz="914400" rtl="0">
+        <a:defRPr sz="1800">
           <a:solidFill>
             <a:schemeClr val="tx1"/>
           </a:solidFill>
@@ -2936,8 +4498,8 @@
           <a:cs typeface="+mn-cs"/>
         </a:defRPr>
       </a:lvl6pPr>
-      <a:lvl7pPr marL="2743200" algn="l" defTabSz="914400" rtl="0" eaLnBrk="1" latinLnBrk="0" hangingPunct="1">
-        <a:defRPr sz="1800" kern="1200">
+      <a:lvl7pPr marL="2743200" algn="l" defTabSz="914400" rtl="0">
+        <a:defRPr sz="1800">
           <a:solidFill>
             <a:schemeClr val="tx1"/>
           </a:solidFill>
@@ -2946,8 +4508,8 @@
           <a:cs typeface="+mn-cs"/>
         </a:defRPr>
       </a:lvl7pPr>
-      <a:lvl8pPr marL="3200400" algn="l" defTabSz="914400" rtl="0" eaLnBrk="1" latinLnBrk="0" hangingPunct="1">
-        <a:defRPr sz="1800" kern="1200">
+      <a:lvl8pPr marL="3200400" algn="l" defTabSz="914400" rtl="0">
+        <a:defRPr sz="1800">
           <a:solidFill>
             <a:schemeClr val="tx1"/>
           </a:solidFill>
@@ -2956,8 +4518,8 @@
           <a:cs typeface="+mn-cs"/>
         </a:defRPr>
       </a:lvl8pPr>
-      <a:lvl9pPr marL="3657600" algn="l" defTabSz="914400" rtl="0" eaLnBrk="1" latinLnBrk="0" hangingPunct="1">
-        <a:defRPr sz="1800" kern="1200">
+      <a:lvl9pPr marL="3657600" algn="l" defTabSz="914400" rtl="0">
+        <a:defRPr sz="1800">
           <a:solidFill>
             <a:schemeClr val="tx1"/>
           </a:solidFill>
@@ -2972,15 +4534,15 @@
 </file>
 
 <file path=ppt/slides/slide1.xml><?xml version="1.0" encoding="utf-8"?>
-<p:sld xmlns:a="http://schemas.openxmlformats.org/drawingml/2006/main" xmlns:r="http://schemas.openxmlformats.org/officeDocument/2006/relationships" xmlns:p="http://schemas.openxmlformats.org/presentationml/2006/main">
-  <p:cSld>
+<p:sld xmlns:a="http://schemas.openxmlformats.org/drawingml/2006/main" xmlns:r="http://schemas.openxmlformats.org/officeDocument/2006/relationships" xmlns:p="http://schemas.openxmlformats.org/presentationml/2006/main" xmlns:m="http://schemas.openxmlformats.org/officeDocument/2006/math" xmlns:w="http://schemas.openxmlformats.org/wordprocessingml/2006/main" xmlns:mc="http://schemas.openxmlformats.org/markup-compatibility/2006" showMasterPhAnim="0" showMasterSp="1" show="1">
+  <p:cSld name="">
     <p:spTree>
       <p:nvGrpSpPr>
         <p:cNvPr id="1" name=""/>
         <p:cNvGrpSpPr/>
         <p:nvPr/>
       </p:nvGrpSpPr>
-      <p:grpSpPr>
+      <p:grpSpPr bwMode="auto">
         <a:xfrm>
           <a:off x="0" y="0"/>
           <a:ext cx="0" cy="0"/>
@@ -2990,7 +4552,7 @@
       </p:grpSpPr>
       <p:sp>
         <p:nvSpPr>
-          <p:cNvPr id="2" name="Title 1"/>
+          <p:cNvPr id="1676814346" name="Title 1"/>
           <p:cNvSpPr>
             <a:spLocks noGrp="1"/>
           </p:cNvSpPr>
@@ -2998,9 +4560,9 @@
             <p:ph type="ctrTitle"/>
           </p:nvPr>
         </p:nvSpPr>
-        <p:spPr>
+        <p:spPr bwMode="auto">
           <a:xfrm>
-            <a:off x="659027" y="3428957"/>
+            <a:off x="659027" y="3428956"/>
             <a:ext cx="10873945" cy="2325817"/>
           </a:xfrm>
         </p:spPr>
@@ -3010,8 +4572,11 @@
           </a:bodyPr>
           <a:lstStyle/>
           <a:p>
-            <a:r>
-              <a:rPr lang="en-US" sz="4800" b="1" dirty="0">
+            <a:pPr>
+              <a:defRPr/>
+            </a:pPr>
+            <a:r>
+              <a:rPr lang="en-US" sz="4800" b="1">
                 <a:solidFill>
                   <a:srgbClr val="1F2328"/>
                 </a:solidFill>
@@ -3022,7 +4587,7 @@
               <a:t>Greenhouse-Gas-Emission-Aware Optimization </a:t>
             </a:r>
             <a:br>
-              <a:rPr lang="en-US" sz="4800" b="1" dirty="0">
+              <a:rPr lang="en-US" sz="4800" b="1">
                 <a:solidFill>
                   <a:srgbClr val="1F2328"/>
                 </a:solidFill>
@@ -3032,7 +4597,7 @@
               </a:rPr>
             </a:br>
             <a:r>
-              <a:rPr lang="en-US" sz="3600" b="1" dirty="0">
+              <a:rPr lang="en-US" sz="3600" b="1">
                 <a:solidFill>
                   <a:srgbClr val="1F2328"/>
                 </a:solidFill>
@@ -3043,7 +4608,7 @@
               <a:t>of </a:t>
             </a:r>
             <a:br>
-              <a:rPr lang="en-US" sz="4800" b="1" dirty="0">
+              <a:rPr lang="en-US" sz="4800" b="1">
                 <a:highlight>
                   <a:srgbClr val="FFFFFF"/>
                 </a:highlight>
@@ -3061,7 +4626,7 @@
               <a:t>Large-Language-Model Training</a:t>
             </a:r>
             <a:br>
-              <a:rPr lang="en-US" sz="4800" b="1" dirty="0">
+              <a:rPr lang="en-US" sz="4800" b="1">
                 <a:solidFill>
                   <a:srgbClr val="1F2328"/>
                 </a:solidFill>
@@ -3071,7 +4636,7 @@
               </a:rPr>
             </a:br>
             <a:br>
-              <a:rPr lang="en-US" sz="4800" b="1" dirty="0">
+              <a:rPr lang="en-US" sz="4800" b="1">
                 <a:highlight>
                   <a:srgbClr val="FFFFFF"/>
                 </a:highlight>
@@ -3088,36 +4653,42 @@
               </a:rPr>
               <a:t>(Simulation and Modeling II)</a:t>
             </a:r>
-            <a:endParaRPr lang="en-US" sz="4000" dirty="0"/>
-          </a:p>
-          <a:p>
-            <a:endParaRPr lang="en-US" sz="4000" dirty="0"/>
+            <a:endParaRPr lang="en-US" sz="4000"/>
+          </a:p>
+          <a:p>
+            <a:pPr>
+              <a:defRPr/>
+            </a:pPr>
+            <a:endParaRPr lang="en-US" sz="4000"/>
           </a:p>
         </p:txBody>
       </p:sp>
     </p:spTree>
-    <p:extLst>
-      <p:ext uri="{BB962C8B-B14F-4D97-AF65-F5344CB8AC3E}">
-        <p14:creationId xmlns:p14="http://schemas.microsoft.com/office/powerpoint/2010/main" val="109857222"/>
-      </p:ext>
-    </p:extLst>
   </p:cSld>
   <p:clrMapOvr>
     <a:masterClrMapping/>
   </p:clrMapOvr>
+  <mc:AlternateContent xmlns:mc="http://schemas.openxmlformats.org/markup-compatibility/2006">
+    <mc:Choice xmlns:p159="http://schemas.microsoft.com/office/powerpoint/2015/09/main" xmlns:p14="http://schemas.microsoft.com/office/powerpoint/2010/main" Requires="p159">
+      <p:transition p14:dur="2000" advClick="1"/>
+    </mc:Choice>
+    <mc:Fallback>
+      <p:transition advClick="1"/>
+    </mc:Fallback>
+  </mc:AlternateContent>
 </p:sld>
 </file>
 
-<file path=ppt/slides/slide2.xml><?xml version="1.0" encoding="utf-8"?>
-<p:sld xmlns:a="http://schemas.openxmlformats.org/drawingml/2006/main" xmlns:r="http://schemas.openxmlformats.org/officeDocument/2006/relationships" xmlns:p="http://schemas.openxmlformats.org/presentationml/2006/main">
-  <p:cSld>
+<file path=ppt/slides/slide10.xml><?xml version="1.0" encoding="utf-8"?>
+<p:sld xmlns:a="http://schemas.openxmlformats.org/drawingml/2006/main" xmlns:r="http://schemas.openxmlformats.org/officeDocument/2006/relationships" xmlns:p="http://schemas.openxmlformats.org/presentationml/2006/main" xmlns:m="http://schemas.openxmlformats.org/officeDocument/2006/math" xmlns:w="http://schemas.openxmlformats.org/wordprocessingml/2006/main" xmlns:mc="http://schemas.openxmlformats.org/markup-compatibility/2006" showMasterPhAnim="0" showMasterSp="1" show="1">
+  <p:cSld name="">
     <p:spTree>
       <p:nvGrpSpPr>
         <p:cNvPr id="1" name=""/>
         <p:cNvGrpSpPr/>
         <p:nvPr/>
       </p:nvGrpSpPr>
-      <p:grpSpPr>
+      <p:grpSpPr bwMode="auto">
         <a:xfrm>
           <a:off x="0" y="0"/>
           <a:ext cx="0" cy="0"/>
@@ -3127,13 +4698,7 @@
       </p:grpSpPr>
       <p:sp>
         <p:nvSpPr>
-          <p:cNvPr id="2" name="Title 1">
-            <a:extLst>
-              <a:ext uri="{FF2B5EF4-FFF2-40B4-BE49-F238E27FC236}">
-                <a16:creationId xmlns:a16="http://schemas.microsoft.com/office/drawing/2014/main" id="{36537D33-A64E-F1C6-80E6-5A94FECD49D6}"/>
-              </a:ext>
-            </a:extLst>
-          </p:cNvPr>
+          <p:cNvPr id="325859692" name="Title 1"/>
           <p:cNvSpPr>
             <a:spLocks noGrp="1"/>
           </p:cNvSpPr>
@@ -3141,27 +4706,25 @@
             <p:ph type="title"/>
           </p:nvPr>
         </p:nvSpPr>
-        <p:spPr/>
-        <p:txBody>
-          <a:bodyPr/>
-          <a:lstStyle/>
-          <a:p>
-            <a:r>
-              <a:rPr lang="en-US"/>
-              <a:t>Background</a:t>
-            </a:r>
-          </a:p>
-        </p:txBody>
-      </p:sp>
-      <p:sp>
-        <p:nvSpPr>
-          <p:cNvPr id="3" name="Content Placeholder 2">
-            <a:extLst>
-              <a:ext uri="{FF2B5EF4-FFF2-40B4-BE49-F238E27FC236}">
-                <a16:creationId xmlns:a16="http://schemas.microsoft.com/office/drawing/2014/main" id="{8F60BAEC-3D9E-DDE5-BB3C-0F8EFEDC96B7}"/>
-              </a:ext>
-            </a:extLst>
-          </p:cNvPr>
+        <p:spPr bwMode="auto"/>
+        <p:txBody>
+          <a:bodyPr/>
+          <a:lstStyle/>
+          <a:p>
+            <a:pPr>
+              <a:defRPr/>
+            </a:pPr>
+            <a:r>
+              <a:rPr lang="en-US"/>
+              <a:t>Result Evaluation</a:t>
+            </a:r>
+            <a:endParaRPr/>
+          </a:p>
+        </p:txBody>
+      </p:sp>
+      <p:sp>
+        <p:nvSpPr>
+          <p:cNvPr id="2019119357" name="Content Placeholder 2"/>
           <p:cNvSpPr>
             <a:spLocks noGrp="1"/>
           </p:cNvSpPr>
@@ -3169,14 +4732,446 @@
             <p:ph idx="1"/>
           </p:nvPr>
         </p:nvSpPr>
-        <p:spPr/>
+        <p:spPr bwMode="auto"/>
         <p:txBody>
           <a:bodyPr vert="horz" lIns="91440" tIns="45720" rIns="91440" bIns="45720" rtlCol="0" anchor="t">
             <a:normAutofit/>
           </a:bodyPr>
           <a:lstStyle/>
           <a:p>
-            <a:pPr algn="just"/>
+            <a:pPr marL="0" indent="0">
+              <a:buNone/>
+              <a:defRPr/>
+            </a:pPr>
+            <a:r>
+              <a:rPr lang="en-US"/>
+              <a:t>Verification</a:t>
+            </a:r>
+            <a:endParaRPr lang="en-US"/>
+          </a:p>
+          <a:p>
+            <a:pPr>
+              <a:buFont typeface="Arial"/>
+              <a:buChar char="•"/>
+              <a:defRPr/>
+            </a:pPr>
+            <a:r>
+              <a:rPr lang="en-US" sz="1800">
+                <a:highlight>
+                  <a:srgbClr val="FFFFFF"/>
+                </a:highlight>
+                <a:ea typeface="+mn-lt"/>
+                <a:cs typeface="+mn-lt"/>
+              </a:rPr>
+              <a:t>Measure the average and 95th percentile batch delay, and total CO2 saving.</a:t>
+            </a:r>
+            <a:endParaRPr lang="en-US" sz="1800"/>
+          </a:p>
+          <a:p>
+            <a:pPr>
+              <a:buFont typeface="Arial"/>
+              <a:buChar char="•"/>
+              <a:defRPr/>
+            </a:pPr>
+            <a:r>
+              <a:rPr lang="en-US" sz="1800">
+                <a:highlight>
+                  <a:srgbClr val="FFFFFF"/>
+                </a:highlight>
+                <a:ea typeface="+mn-lt"/>
+                <a:cs typeface="+mn-lt"/>
+              </a:rPr>
+              <a:t>Vary training duration, energy consumption, starting </a:t>
+            </a:r>
+            <a:r>
+              <a:rPr lang="en-US" sz="1800">
+                <a:highlight>
+                  <a:srgbClr val="FFFFFF"/>
+                </a:highlight>
+                <a:ea typeface="+mn-lt"/>
+                <a:cs typeface="+mn-lt"/>
+              </a:rPr>
+              <a:t>time, region, season, and CO2 threshold.</a:t>
+            </a:r>
+            <a:endParaRPr lang="en-US" sz="1800">
+              <a:highlight>
+                <a:srgbClr val="FFFFFF"/>
+              </a:highlight>
+            </a:endParaRPr>
+          </a:p>
+          <a:p>
+            <a:pPr>
+              <a:buFont typeface="Arial"/>
+              <a:buChar char="•"/>
+              <a:defRPr/>
+            </a:pPr>
+            <a:endParaRPr lang="en-US" sz="1600">
+              <a:solidFill>
+                <a:srgbClr val="1F2328"/>
+              </a:solidFill>
+              <a:highlight>
+                <a:srgbClr val="FFFFFF"/>
+              </a:highlight>
+            </a:endParaRPr>
+          </a:p>
+          <a:p>
+            <a:pPr marL="0" indent="0">
+              <a:buNone/>
+              <a:defRPr/>
+            </a:pPr>
+            <a:r>
+              <a:rPr lang="en-US"/>
+              <a:t>Validation</a:t>
+            </a:r>
+            <a:endParaRPr/>
+          </a:p>
+          <a:p>
+            <a:pPr>
+              <a:defRPr/>
+            </a:pPr>
+            <a:r>
+              <a:rPr lang="en-US" sz="1800">
+                <a:highlight>
+                  <a:srgbClr val="FFFFFF"/>
+                </a:highlight>
+                <a:ea typeface="+mn-lt"/>
+                <a:cs typeface="+mn-lt"/>
+              </a:rPr>
+              <a:t>Validate against model training using the historic data.</a:t>
+            </a:r>
+            <a:endParaRPr/>
+          </a:p>
+          <a:p>
+            <a:pPr>
+              <a:defRPr/>
+            </a:pPr>
+            <a:r>
+              <a:rPr lang="en-US" sz="1800">
+                <a:highlight>
+                  <a:srgbClr val="FFFFFF"/>
+                </a:highlight>
+                <a:ea typeface="+mn-lt"/>
+                <a:cs typeface="+mn-lt"/>
+              </a:rPr>
+              <a:t>Using 'Electricity Maps' API for CO2 intensity data.</a:t>
+            </a:r>
+            <a:endParaRPr lang="en-US" sz="1800">
+              <a:highlight>
+                <a:srgbClr val="FFFFFF"/>
+              </a:highlight>
+              <a:ea typeface="Aptos"/>
+              <a:cs typeface="Aptos"/>
+            </a:endParaRPr>
+          </a:p>
+          <a:p>
+            <a:pPr>
+              <a:defRPr/>
+            </a:pPr>
+            <a:endParaRPr lang="en-US" sz="1800">
+              <a:highlight>
+                <a:srgbClr val="FFFFFF"/>
+              </a:highlight>
+            </a:endParaRPr>
+          </a:p>
+          <a:p>
+            <a:pPr>
+              <a:defRPr/>
+            </a:pPr>
+            <a:r>
+              <a:rPr lang="de-DE" sz="1800">
+                <a:ea typeface="Aptos"/>
+                <a:cs typeface="Aptos"/>
+              </a:rPr>
+              <a:t>TODO presentation: List all verification and verification methods and explain for each of them just one</a:t>
+            </a:r>
+            <a:endParaRPr lang="en-US" sz="1800">
+              <a:highlight>
+                <a:srgbClr val="FFFFFF"/>
+              </a:highlight>
+            </a:endParaRPr>
+          </a:p>
+        </p:txBody>
+      </p:sp>
+    </p:spTree>
+  </p:cSld>
+  <p:clrMapOvr>
+    <a:masterClrMapping/>
+  </p:clrMapOvr>
+  <mc:AlternateContent xmlns:mc="http://schemas.openxmlformats.org/markup-compatibility/2006">
+    <mc:Choice xmlns:p159="http://schemas.microsoft.com/office/powerpoint/2015/09/main" xmlns:p14="http://schemas.microsoft.com/office/powerpoint/2010/main" Requires="p159">
+      <p:transition p14:dur="2000" advClick="1"/>
+    </mc:Choice>
+    <mc:Fallback>
+      <p:transition advClick="1"/>
+    </mc:Fallback>
+  </mc:AlternateContent>
+</p:sld>
+</file>
+
+<file path=ppt/slides/slide11.xml><?xml version="1.0" encoding="utf-8"?>
+<p:sld xmlns:a="http://schemas.openxmlformats.org/drawingml/2006/main" xmlns:r="http://schemas.openxmlformats.org/officeDocument/2006/relationships" xmlns:p="http://schemas.openxmlformats.org/presentationml/2006/main" xmlns:m="http://schemas.openxmlformats.org/officeDocument/2006/math" xmlns:w="http://schemas.openxmlformats.org/wordprocessingml/2006/main" xmlns:mc="http://schemas.openxmlformats.org/markup-compatibility/2006" showMasterPhAnim="0" showMasterSp="1" show="1">
+  <p:cSld name="">
+    <p:spTree>
+      <p:nvGrpSpPr>
+        <p:cNvPr id="1" name=""/>
+        <p:cNvGrpSpPr/>
+        <p:nvPr/>
+      </p:nvGrpSpPr>
+      <p:grpSpPr bwMode="auto">
+        <a:xfrm>
+          <a:off x="0" y="0"/>
+          <a:ext cx="0" cy="0"/>
+          <a:chOff x="0" y="0"/>
+          <a:chExt cx="0" cy="0"/>
+        </a:xfrm>
+      </p:grpSpPr>
+      <p:sp>
+        <p:nvSpPr>
+          <p:cNvPr id="613482934" name="Title 1"/>
+          <p:cNvSpPr>
+            <a:spLocks noGrp="1"/>
+          </p:cNvSpPr>
+          <p:nvPr>
+            <p:ph type="title"/>
+          </p:nvPr>
+        </p:nvSpPr>
+        <p:spPr bwMode="auto"/>
+        <p:txBody>
+          <a:bodyPr/>
+          <a:lstStyle/>
+          <a:p>
+            <a:pPr>
+              <a:defRPr/>
+            </a:pPr>
+            <a:r>
+              <a:rPr lang="de-DE"/>
+              <a:t>GANT CHART</a:t>
+            </a:r>
+            <a:endParaRPr/>
+          </a:p>
+        </p:txBody>
+      </p:sp>
+      <p:sp>
+        <p:nvSpPr>
+          <p:cNvPr id="1957522359" name="Content Placeholder 2"/>
+          <p:cNvSpPr>
+            <a:spLocks noGrp="1"/>
+          </p:cNvSpPr>
+          <p:nvPr>
+            <p:ph idx="1"/>
+          </p:nvPr>
+        </p:nvSpPr>
+        <p:spPr bwMode="auto"/>
+        <p:txBody>
+          <a:bodyPr/>
+          <a:lstStyle/>
+          <a:p>
+            <a:pPr>
+              <a:defRPr/>
+            </a:pPr>
+            <a:endParaRPr/>
+          </a:p>
+        </p:txBody>
+      </p:sp>
+    </p:spTree>
+  </p:cSld>
+  <p:clrMapOvr>
+    <a:masterClrMapping/>
+  </p:clrMapOvr>
+  <mc:AlternateContent xmlns:mc="http://schemas.openxmlformats.org/markup-compatibility/2006">
+    <mc:Choice xmlns:p159="http://schemas.microsoft.com/office/powerpoint/2015/09/main" xmlns:p14="http://schemas.microsoft.com/office/powerpoint/2010/main" Requires="p159">
+      <p:transition p14:dur="2000" advClick="1"/>
+    </mc:Choice>
+    <mc:Fallback>
+      <p:transition advClick="1"/>
+    </mc:Fallback>
+  </mc:AlternateContent>
+</p:sld>
+</file>
+
+<file path=ppt/slides/slide12.xml><?xml version="1.0" encoding="utf-8"?>
+<p:sld xmlns:a="http://schemas.openxmlformats.org/drawingml/2006/main" xmlns:r="http://schemas.openxmlformats.org/officeDocument/2006/relationships" xmlns:p="http://schemas.openxmlformats.org/presentationml/2006/main" xmlns:m="http://schemas.openxmlformats.org/officeDocument/2006/math" xmlns:w="http://schemas.openxmlformats.org/wordprocessingml/2006/main" xmlns:mc="http://schemas.openxmlformats.org/markup-compatibility/2006" showMasterPhAnim="0" showMasterSp="1" show="1">
+  <p:cSld name="">
+    <p:spTree>
+      <p:nvGrpSpPr>
+        <p:cNvPr id="1" name=""/>
+        <p:cNvGrpSpPr/>
+        <p:nvPr/>
+      </p:nvGrpSpPr>
+      <p:grpSpPr bwMode="auto">
+        <a:xfrm>
+          <a:off x="0" y="0"/>
+          <a:ext cx="0" cy="0"/>
+          <a:chOff x="0" y="0"/>
+          <a:chExt cx="0" cy="0"/>
+        </a:xfrm>
+      </p:grpSpPr>
+      <p:sp>
+        <p:nvSpPr>
+          <p:cNvPr id="1950629388" name="Title 1"/>
+          <p:cNvSpPr>
+            <a:spLocks noGrp="1"/>
+          </p:cNvSpPr>
+          <p:nvPr>
+            <p:ph type="title"/>
+          </p:nvPr>
+        </p:nvSpPr>
+        <p:spPr bwMode="auto"/>
+        <p:txBody>
+          <a:bodyPr/>
+          <a:lstStyle/>
+          <a:p>
+            <a:pPr>
+              <a:defRPr/>
+            </a:pPr>
+            <a:r>
+              <a:rPr lang="en-US"/>
+              <a:t>Way Forward</a:t>
+            </a:r>
+            <a:endParaRPr/>
+          </a:p>
+        </p:txBody>
+      </p:sp>
+      <p:sp>
+        <p:nvSpPr>
+          <p:cNvPr id="242426235" name="Content Placeholder 2"/>
+          <p:cNvSpPr>
+            <a:spLocks noGrp="1"/>
+          </p:cNvSpPr>
+          <p:nvPr>
+            <p:ph idx="1"/>
+          </p:nvPr>
+        </p:nvSpPr>
+        <p:spPr bwMode="auto"/>
+        <p:txBody>
+          <a:bodyPr vert="horz" lIns="91440" tIns="45720" rIns="91440" bIns="45720" rtlCol="0" anchor="t">
+            <a:normAutofit/>
+          </a:bodyPr>
+          <a:lstStyle/>
+          <a:p>
+            <a:pPr marL="0" indent="0">
+              <a:buNone/>
+              <a:defRPr/>
+            </a:pPr>
+            <a:r>
+              <a:rPr lang="en-US"/>
+              <a:t>Questions?</a:t>
+            </a:r>
+            <a:endParaRPr/>
+          </a:p>
+          <a:p>
+            <a:pPr marL="0" indent="0">
+              <a:buNone/>
+              <a:defRPr/>
+            </a:pPr>
+            <a:endParaRPr lang="en-US"/>
+          </a:p>
+          <a:p>
+            <a:pPr marL="0" indent="0" algn="ctr">
+              <a:buNone/>
+              <a:defRPr/>
+            </a:pPr>
+            <a:endParaRPr lang="en-US"/>
+          </a:p>
+          <a:p>
+            <a:pPr marL="0" indent="0" algn="ctr">
+              <a:buNone/>
+              <a:defRPr/>
+            </a:pPr>
+            <a:endParaRPr lang="en-US"/>
+          </a:p>
+          <a:p>
+            <a:pPr marL="0" indent="0" algn="ctr">
+              <a:buNone/>
+              <a:defRPr/>
+            </a:pPr>
+            <a:r>
+              <a:rPr lang="en-US"/>
+              <a:t>Thank you</a:t>
+            </a:r>
+            <a:endParaRPr lang="en-US"/>
+          </a:p>
+        </p:txBody>
+      </p:sp>
+    </p:spTree>
+  </p:cSld>
+  <p:clrMapOvr>
+    <a:masterClrMapping/>
+  </p:clrMapOvr>
+  <mc:AlternateContent xmlns:mc="http://schemas.openxmlformats.org/markup-compatibility/2006">
+    <mc:Choice xmlns:p159="http://schemas.microsoft.com/office/powerpoint/2015/09/main" xmlns:p14="http://schemas.microsoft.com/office/powerpoint/2010/main" Requires="p159">
+      <p:transition p14:dur="2000" advClick="1"/>
+    </mc:Choice>
+    <mc:Fallback>
+      <p:transition advClick="1"/>
+    </mc:Fallback>
+  </mc:AlternateContent>
+</p:sld>
+</file>
+
+<file path=ppt/slides/slide2.xml><?xml version="1.0" encoding="utf-8"?>
+<p:sld xmlns:a="http://schemas.openxmlformats.org/drawingml/2006/main" xmlns:r="http://schemas.openxmlformats.org/officeDocument/2006/relationships" xmlns:p="http://schemas.openxmlformats.org/presentationml/2006/main" xmlns:m="http://schemas.openxmlformats.org/officeDocument/2006/math" xmlns:w="http://schemas.openxmlformats.org/wordprocessingml/2006/main" xmlns:mc="http://schemas.openxmlformats.org/markup-compatibility/2006" showMasterPhAnim="0" showMasterSp="1" show="1">
+  <p:cSld name="">
+    <p:spTree>
+      <p:nvGrpSpPr>
+        <p:cNvPr id="1" name=""/>
+        <p:cNvGrpSpPr/>
+        <p:nvPr/>
+      </p:nvGrpSpPr>
+      <p:grpSpPr bwMode="auto">
+        <a:xfrm>
+          <a:off x="0" y="0"/>
+          <a:ext cx="0" cy="0"/>
+          <a:chOff x="0" y="0"/>
+          <a:chExt cx="0" cy="0"/>
+        </a:xfrm>
+      </p:grpSpPr>
+      <p:sp>
+        <p:nvSpPr>
+          <p:cNvPr id="2067561451" name="Title 1"/>
+          <p:cNvSpPr>
+            <a:spLocks noGrp="1"/>
+          </p:cNvSpPr>
+          <p:nvPr>
+            <p:ph type="title"/>
+          </p:nvPr>
+        </p:nvSpPr>
+        <p:spPr bwMode="auto"/>
+        <p:txBody>
+          <a:bodyPr/>
+          <a:lstStyle/>
+          <a:p>
+            <a:pPr>
+              <a:defRPr/>
+            </a:pPr>
+            <a:r>
+              <a:rPr lang="de-DE"/>
+              <a:t>Motivation</a:t>
+            </a:r>
+            <a:endParaRPr/>
+          </a:p>
+        </p:txBody>
+      </p:sp>
+      <p:sp>
+        <p:nvSpPr>
+          <p:cNvPr id="1217288761" name="Content Placeholder 2"/>
+          <p:cNvSpPr>
+            <a:spLocks noGrp="1"/>
+          </p:cNvSpPr>
+          <p:nvPr>
+            <p:ph idx="1"/>
+          </p:nvPr>
+        </p:nvSpPr>
+        <p:spPr bwMode="auto"/>
+        <p:txBody>
+          <a:bodyPr vertOverflow="overflow" horzOverflow="overflow" vert="horz" wrap="square" lIns="91440" tIns="45720" rIns="91440" bIns="45720" numCol="1" spcCol="0" rtlCol="0" fromWordArt="0" anchor="t" anchorCtr="0" forceAA="0" upright="0" compatLnSpc="0">
+            <a:normAutofit fontScale="95000" lnSpcReduction="1000"/>
+          </a:bodyPr>
+          <a:lstStyle/>
+          <a:p>
+            <a:pPr algn="just">
+              <a:defRPr/>
+            </a:pPr>
             <a:r>
               <a:rPr lang="en-US" sz="1800">
                 <a:highlight>
@@ -3193,7 +5188,9 @@
             </a:endParaRPr>
           </a:p>
           <a:p>
-            <a:pPr algn="just"/>
+            <a:pPr algn="just">
+              <a:defRPr/>
+            </a:pPr>
             <a:r>
               <a:rPr lang="en-US" sz="1800">
                 <a:highlight>
@@ -3204,11 +5201,14 @@
               </a:rPr>
               <a:t>CO2 consumption from LLM is immense, resulting in high amount of CO2 emission.</a:t>
             </a:r>
-          </a:p>
-          <a:p>
-            <a:pPr algn="just"/>
-            <a:r>
-              <a:rPr lang="en-US" sz="1800" dirty="0">
+            <a:endParaRPr/>
+          </a:p>
+          <a:p>
+            <a:pPr algn="just">
+              <a:defRPr/>
+            </a:pPr>
+            <a:r>
+              <a:rPr lang="en-US" sz="1800">
                 <a:highlight>
                   <a:srgbClr val="FFFFFF"/>
                 </a:highlight>
@@ -3228,7 +5228,7 @@
               <a:t>used during</a:t>
             </a:r>
             <a:r>
-              <a:rPr lang="en-US" sz="1800" dirty="0">
+              <a:rPr lang="en-US" sz="1800">
                 <a:highlight>
                   <a:srgbClr val="FFFFFF"/>
                 </a:highlight>
@@ -3237,13 +5237,15 @@
               </a:rPr>
               <a:t> training in an area.</a:t>
             </a:r>
-            <a:endParaRPr lang="en-US" sz="1800" dirty="0">
+            <a:endParaRPr lang="en-US" sz="1800">
               <a:ea typeface="+mn-lt"/>
               <a:cs typeface="+mn-lt"/>
             </a:endParaRPr>
           </a:p>
           <a:p>
-            <a:pPr algn="just"/>
+            <a:pPr algn="just">
+              <a:defRPr/>
+            </a:pPr>
             <a:r>
               <a:rPr lang="en-US" sz="1800">
                 <a:highlight>
@@ -3260,7 +5262,9 @@
             </a:endParaRPr>
           </a:p>
           <a:p>
-            <a:pPr algn="just"/>
+            <a:pPr algn="just">
+              <a:defRPr/>
+            </a:pPr>
             <a:r>
               <a:rPr lang="en-US" sz="1800">
                 <a:highlight>
@@ -3274,22 +5278,49 @@
             <a:endParaRPr lang="en-US" sz="1800"/>
           </a:p>
           <a:p>
-            <a:endParaRPr lang="en-US" dirty="0">
+            <a:pPr>
+              <a:defRPr/>
+            </a:pPr>
+            <a:r>
+              <a:rPr lang="de-DE">
+                <a:solidFill>
+                  <a:srgbClr val="000000"/>
+                </a:solidFill>
+              </a:rPr>
+              <a:t>TODO: Were only simulating the pretraining phase</a:t>
+            </a:r>
+            <a:r>
+              <a:rPr lang="de-DE">
+                <a:solidFill>
+                  <a:srgbClr val="000000"/>
+                </a:solidFill>
+              </a:rPr>
+              <a:t> (and show diagram that it is the most time/energy consuming phase)</a:t>
+            </a:r>
+            <a:endParaRPr lang="de-DE">
               <a:solidFill>
                 <a:srgbClr val="000000"/>
               </a:solidFill>
             </a:endParaRPr>
           </a:p>
           <a:p>
-            <a:pPr marL="0" indent="0">
-              <a:buNone/>
+            <a:pPr>
+              <a:defRPr/>
             </a:pPr>
             <a:r>
               <a:rPr lang="en-US" sz="2000"/>
-              <a:t> Citations:</a:t>
-            </a:r>
-          </a:p>
-          <a:p>
+              <a:t>Citations:</a:t>
+            </a:r>
+            <a:endParaRPr lang="en-US">
+              <a:solidFill>
+                <a:srgbClr val="000000"/>
+              </a:solidFill>
+            </a:endParaRPr>
+          </a:p>
+          <a:p>
+            <a:pPr>
+              <a:defRPr/>
+            </a:pPr>
             <a:r>
               <a:rPr lang="en-US" sz="1800">
                 <a:ea typeface="+mn-lt"/>
@@ -3297,12 +5328,15 @@
               </a:rPr>
               <a:t>KIMI K2: OPEN AGENTIC INTELLIGENCE, 2023</a:t>
             </a:r>
-            <a:endParaRPr lang="en-US" sz="1800" dirty="0">
+            <a:endParaRPr lang="en-US" sz="1800">
               <a:ea typeface="+mn-lt"/>
               <a:cs typeface="+mn-lt"/>
             </a:endParaRPr>
           </a:p>
           <a:p>
+            <a:pPr>
+              <a:defRPr/>
+            </a:pPr>
             <a:r>
               <a:rPr lang="en-US" sz="1800">
                 <a:ea typeface="+mn-lt"/>
@@ -3310,35 +5344,42 @@
               </a:rPr>
               <a:t>DeepSeek-V3 Technical Report, 2026</a:t>
             </a:r>
-          </a:p>
-          <a:p>
-            <a:endParaRPr lang="en-US" dirty="0"/>
+            <a:endParaRPr/>
+          </a:p>
+          <a:p>
+            <a:pPr>
+              <a:defRPr/>
+            </a:pPr>
+            <a:endParaRPr lang="en-US"/>
           </a:p>
         </p:txBody>
       </p:sp>
     </p:spTree>
-    <p:extLst>
-      <p:ext uri="{BB962C8B-B14F-4D97-AF65-F5344CB8AC3E}">
-        <p14:creationId xmlns:p14="http://schemas.microsoft.com/office/powerpoint/2010/main" val="4007773417"/>
-      </p:ext>
-    </p:extLst>
   </p:cSld>
   <p:clrMapOvr>
     <a:masterClrMapping/>
   </p:clrMapOvr>
+  <mc:AlternateContent xmlns:mc="http://schemas.openxmlformats.org/markup-compatibility/2006">
+    <mc:Choice xmlns:p159="http://schemas.microsoft.com/office/powerpoint/2015/09/main" xmlns:p14="http://schemas.microsoft.com/office/powerpoint/2010/main" Requires="p159">
+      <p:transition p14:dur="2000" advClick="1"/>
+    </mc:Choice>
+    <mc:Fallback>
+      <p:transition advClick="1"/>
+    </mc:Fallback>
+  </mc:AlternateContent>
 </p:sld>
 </file>
 
 <file path=ppt/slides/slide3.xml><?xml version="1.0" encoding="utf-8"?>
-<p:sld xmlns:a="http://schemas.openxmlformats.org/drawingml/2006/main" xmlns:r="http://schemas.openxmlformats.org/officeDocument/2006/relationships" xmlns:p="http://schemas.openxmlformats.org/presentationml/2006/main">
-  <p:cSld>
+<p:sld xmlns:a="http://schemas.openxmlformats.org/drawingml/2006/main" xmlns:r="http://schemas.openxmlformats.org/officeDocument/2006/relationships" xmlns:p="http://schemas.openxmlformats.org/presentationml/2006/main" xmlns:m="http://schemas.openxmlformats.org/officeDocument/2006/math" xmlns:w="http://schemas.openxmlformats.org/wordprocessingml/2006/main" xmlns:mc="http://schemas.openxmlformats.org/markup-compatibility/2006" showMasterPhAnim="0" showMasterSp="1" show="1">
+  <p:cSld name="">
     <p:spTree>
       <p:nvGrpSpPr>
         <p:cNvPr id="1" name=""/>
         <p:cNvGrpSpPr/>
         <p:nvPr/>
       </p:nvGrpSpPr>
-      <p:grpSpPr>
+      <p:grpSpPr bwMode="auto">
         <a:xfrm>
           <a:off x="0" y="0"/>
           <a:ext cx="0" cy="0"/>
@@ -3348,13 +5389,7 @@
       </p:grpSpPr>
       <p:sp>
         <p:nvSpPr>
-          <p:cNvPr id="2" name="Title 1">
-            <a:extLst>
-              <a:ext uri="{FF2B5EF4-FFF2-40B4-BE49-F238E27FC236}">
-                <a16:creationId xmlns:a16="http://schemas.microsoft.com/office/drawing/2014/main" id="{77EA3B6A-33E8-E6E1-43C9-6826FD2841BE}"/>
-              </a:ext>
-            </a:extLst>
-          </p:cNvPr>
+          <p:cNvPr id="930723487" name="Title 1"/>
           <p:cNvSpPr>
             <a:spLocks noGrp="1"/>
           </p:cNvSpPr>
@@ -3362,27 +5397,25 @@
             <p:ph type="title"/>
           </p:nvPr>
         </p:nvSpPr>
-        <p:spPr/>
-        <p:txBody>
-          <a:bodyPr/>
-          <a:lstStyle/>
-          <a:p>
+        <p:spPr bwMode="auto"/>
+        <p:txBody>
+          <a:bodyPr/>
+          <a:lstStyle/>
+          <a:p>
+            <a:pPr>
+              <a:defRPr/>
+            </a:pPr>
             <a:r>
               <a:rPr lang="en-US"/>
               <a:t>Project Objectives</a:t>
             </a:r>
-          </a:p>
-        </p:txBody>
-      </p:sp>
-      <p:sp>
-        <p:nvSpPr>
-          <p:cNvPr id="3" name="Content Placeholder 2">
-            <a:extLst>
-              <a:ext uri="{FF2B5EF4-FFF2-40B4-BE49-F238E27FC236}">
-                <a16:creationId xmlns:a16="http://schemas.microsoft.com/office/drawing/2014/main" id="{D55C439F-FE8E-A66D-DF60-60B90B31B69F}"/>
-              </a:ext>
-            </a:extLst>
-          </p:cNvPr>
+            <a:endParaRPr/>
+          </a:p>
+        </p:txBody>
+      </p:sp>
+      <p:sp>
+        <p:nvSpPr>
+          <p:cNvPr id="1985476924" name="Content Placeholder 2"/>
           <p:cNvSpPr>
             <a:spLocks noGrp="1"/>
           </p:cNvSpPr>
@@ -3390,7 +5423,7 @@
             <p:ph idx="1"/>
           </p:nvPr>
         </p:nvSpPr>
-        <p:spPr/>
+        <p:spPr bwMode="auto"/>
         <p:txBody>
           <a:bodyPr vert="horz" lIns="91440" tIns="45720" rIns="91440" bIns="45720" rtlCol="0" anchor="t">
             <a:normAutofit fontScale="92500" lnSpcReduction="20000"/>
@@ -3399,114 +5432,139 @@
           <a:p>
             <a:pPr marL="0" indent="0">
               <a:buNone/>
+              <a:defRPr/>
             </a:pPr>
             <a:r>
               <a:rPr lang="en-US"/>
               <a:t>Obligatory:</a:t>
             </a:r>
-          </a:p>
-          <a:p>
-            <a:pPr marL="514350" indent="-514350"/>
+            <a:endParaRPr/>
+          </a:p>
+          <a:p>
+            <a:pPr marL="514350" indent="-514350">
+              <a:defRPr/>
+            </a:pPr>
             <a:r>
               <a:rPr lang="en-US"/>
               <a:t>Carbon Intensity and Temporal Trade-offs.</a:t>
             </a:r>
-          </a:p>
-          <a:p>
-            <a:pPr marL="514350" indent="-514350"/>
-            <a:r>
-              <a:rPr lang="en-US" dirty="0"/>
+            <a:endParaRPr/>
+          </a:p>
+          <a:p>
+            <a:pPr marL="514350" indent="-514350">
+              <a:defRPr/>
+            </a:pPr>
+            <a:r>
+              <a:rPr lang="en-US"/>
               <a:t>Impact Assessment on SOTA </a:t>
             </a:r>
             <a:r>
               <a:rPr lang="en-US"/>
               <a:t>Architectures.</a:t>
             </a:r>
-            <a:endParaRPr lang="en-US" dirty="0"/>
+            <a:endParaRPr lang="en-US"/>
           </a:p>
           <a:p>
             <a:pPr marL="0" indent="0">
               <a:buNone/>
-            </a:pPr>
-            <a:endParaRPr lang="en-US" dirty="0"/>
+              <a:defRPr/>
+            </a:pPr>
+            <a:endParaRPr lang="en-US"/>
           </a:p>
           <a:p>
             <a:pPr marL="0" indent="0">
               <a:buNone/>
+              <a:defRPr/>
             </a:pPr>
             <a:r>
               <a:rPr lang="en-US"/>
               <a:t>Wishful:</a:t>
             </a:r>
-            <a:endParaRPr lang="en-US" dirty="0"/>
-          </a:p>
-          <a:p>
-            <a:pPr marL="514350" indent="-514350"/>
+            <a:endParaRPr lang="en-US"/>
+          </a:p>
+          <a:p>
+            <a:pPr marL="514350" indent="-514350">
+              <a:defRPr/>
+            </a:pPr>
             <a:r>
               <a:rPr lang="en-US"/>
               <a:t>Spatiotemporal Optimization.</a:t>
             </a:r>
-          </a:p>
-          <a:p>
-            <a:pPr marL="514350" indent="-514350"/>
+            <a:endParaRPr/>
+          </a:p>
+          <a:p>
+            <a:pPr marL="514350" indent="-514350">
+              <a:defRPr/>
+            </a:pPr>
             <a:r>
               <a:rPr lang="en-US"/>
               <a:t>Geospatial Grid Analysis.</a:t>
             </a:r>
+            <a:endParaRPr/>
           </a:p>
           <a:p>
             <a:pPr marL="0" indent="0">
               <a:buNone/>
-            </a:pPr>
-            <a:endParaRPr lang="en-US" dirty="0"/>
+              <a:defRPr/>
+            </a:pPr>
+            <a:endParaRPr lang="en-US"/>
           </a:p>
           <a:p>
             <a:pPr marL="0" indent="0">
               <a:buNone/>
+              <a:defRPr/>
             </a:pPr>
             <a:r>
               <a:rPr lang="en-US"/>
               <a:t>Optional:</a:t>
             </a:r>
-          </a:p>
-          <a:p>
-            <a:pPr marL="514350" indent="-514350"/>
+            <a:endParaRPr/>
+          </a:p>
+          <a:p>
+            <a:pPr marL="514350" indent="-514350">
+              <a:defRPr/>
+            </a:pPr>
             <a:r>
               <a:rPr lang="en-US"/>
               <a:t>Computational Granularity and Resumption Logic</a:t>
             </a:r>
+            <a:endParaRPr/>
           </a:p>
           <a:p>
             <a:pPr marL="0" indent="0">
               <a:buNone/>
-            </a:pPr>
-            <a:endParaRPr lang="en-US" dirty="0"/>
+              <a:defRPr/>
+            </a:pPr>
+            <a:endParaRPr lang="en-US"/>
           </a:p>
         </p:txBody>
       </p:sp>
     </p:spTree>
-    <p:extLst>
-      <p:ext uri="{BB962C8B-B14F-4D97-AF65-F5344CB8AC3E}">
-        <p14:creationId xmlns:p14="http://schemas.microsoft.com/office/powerpoint/2010/main" val="2083558958"/>
-      </p:ext>
-    </p:extLst>
   </p:cSld>
   <p:clrMapOvr>
     <a:masterClrMapping/>
   </p:clrMapOvr>
+  <mc:AlternateContent xmlns:mc="http://schemas.openxmlformats.org/markup-compatibility/2006">
+    <mc:Choice xmlns:p159="http://schemas.microsoft.com/office/powerpoint/2015/09/main" xmlns:p14="http://schemas.microsoft.com/office/powerpoint/2010/main" Requires="p159">
+      <p:transition p14:dur="2000" advClick="1"/>
+    </mc:Choice>
+    <mc:Fallback>
+      <p:transition advClick="1"/>
+    </mc:Fallback>
+  </mc:AlternateContent>
 </p:sld>
 </file>
 
 <file path=ppt/slides/slide4.xml><?xml version="1.0" encoding="utf-8"?>
-<p:sld xmlns:a="http://schemas.openxmlformats.org/drawingml/2006/main" xmlns:r="http://schemas.openxmlformats.org/officeDocument/2006/relationships" xmlns:p="http://schemas.openxmlformats.org/presentationml/2006/main">
-  <p:cSld>
+<p:sld xmlns:a="http://schemas.openxmlformats.org/drawingml/2006/main" xmlns:r="http://schemas.openxmlformats.org/officeDocument/2006/relationships" xmlns:p="http://schemas.openxmlformats.org/presentationml/2006/main" xmlns:m="http://schemas.openxmlformats.org/officeDocument/2006/math" xmlns:w="http://schemas.openxmlformats.org/wordprocessingml/2006/main" xmlns:mc="http://schemas.openxmlformats.org/markup-compatibility/2006" showMasterPhAnim="0" showMasterSp="1" show="1">
+  <p:cSld name="">
     <p:spTree>
       <p:nvGrpSpPr>
         <p:cNvPr id="1" name=""/>
         <p:cNvGrpSpPr/>
         <p:nvPr/>
       </p:nvGrpSpPr>
-      <p:grpSpPr>
+      <p:grpSpPr bwMode="auto">
         <a:xfrm>
           <a:off x="0" y="0"/>
           <a:ext cx="0" cy="0"/>
@@ -3516,13 +5574,7 @@
       </p:grpSpPr>
       <p:sp>
         <p:nvSpPr>
-          <p:cNvPr id="2" name="Title 1">
-            <a:extLst>
-              <a:ext uri="{FF2B5EF4-FFF2-40B4-BE49-F238E27FC236}">
-                <a16:creationId xmlns:a16="http://schemas.microsoft.com/office/drawing/2014/main" id="{9B1AD3BD-BDC5-7278-CBBE-B51DD3AF9BC1}"/>
-              </a:ext>
-            </a:extLst>
-          </p:cNvPr>
+          <p:cNvPr id="739587308" name="Title 1"/>
           <p:cNvSpPr>
             <a:spLocks noGrp="1"/>
           </p:cNvSpPr>
@@ -3530,11 +5582,182 @@
             <p:ph type="title"/>
           </p:nvPr>
         </p:nvSpPr>
-        <p:spPr/>
-        <p:txBody>
-          <a:bodyPr/>
-          <a:lstStyle/>
-          <a:p>
+        <p:spPr bwMode="auto"/>
+        <p:txBody>
+          <a:bodyPr/>
+          <a:lstStyle/>
+          <a:p>
+            <a:pPr>
+              <a:defRPr/>
+            </a:pPr>
+            <a:r>
+              <a:rPr lang="de-DE"/>
+              <a:t>Show Electricity Map</a:t>
+            </a:r>
+            <a:endParaRPr/>
+          </a:p>
+        </p:txBody>
+      </p:sp>
+      <p:sp>
+        <p:nvSpPr>
+          <p:cNvPr id="1470450200" name="Content Placeholder 2"/>
+          <p:cNvSpPr>
+            <a:spLocks noGrp="1"/>
+          </p:cNvSpPr>
+          <p:nvPr>
+            <p:ph idx="1"/>
+          </p:nvPr>
+        </p:nvSpPr>
+        <p:spPr bwMode="auto"/>
+        <p:txBody>
+          <a:bodyPr/>
+          <a:lstStyle/>
+          <a:p>
+            <a:pPr>
+              <a:defRPr/>
+            </a:pPr>
+            <a:endParaRPr/>
+          </a:p>
+        </p:txBody>
+      </p:sp>
+    </p:spTree>
+  </p:cSld>
+  <p:clrMapOvr>
+    <a:masterClrMapping/>
+  </p:clrMapOvr>
+  <mc:AlternateContent xmlns:mc="http://schemas.openxmlformats.org/markup-compatibility/2006">
+    <mc:Choice xmlns:p159="http://schemas.microsoft.com/office/powerpoint/2015/09/main" xmlns:p14="http://schemas.microsoft.com/office/powerpoint/2010/main" Requires="p159">
+      <p:transition p14:dur="2000" advClick="1"/>
+    </mc:Choice>
+    <mc:Fallback>
+      <p:transition advClick="1"/>
+    </mc:Fallback>
+  </mc:AlternateContent>
+</p:sld>
+</file>
+
+<file path=ppt/slides/slide5.xml><?xml version="1.0" encoding="utf-8"?>
+<p:sld xmlns:a="http://schemas.openxmlformats.org/drawingml/2006/main" xmlns:r="http://schemas.openxmlformats.org/officeDocument/2006/relationships" xmlns:p="http://schemas.openxmlformats.org/presentationml/2006/main" xmlns:m="http://schemas.openxmlformats.org/officeDocument/2006/math" xmlns:w="http://schemas.openxmlformats.org/wordprocessingml/2006/main" xmlns:mc="http://schemas.openxmlformats.org/markup-compatibility/2006" showMasterPhAnim="0" showMasterSp="1" show="1">
+  <p:cSld name="">
+    <p:spTree>
+      <p:nvGrpSpPr>
+        <p:cNvPr id="1" name=""/>
+        <p:cNvGrpSpPr/>
+        <p:nvPr/>
+      </p:nvGrpSpPr>
+      <p:grpSpPr bwMode="auto">
+        <a:xfrm>
+          <a:off x="0" y="0"/>
+          <a:ext cx="0" cy="0"/>
+          <a:chOff x="0" y="0"/>
+          <a:chExt cx="0" cy="0"/>
+        </a:xfrm>
+      </p:grpSpPr>
+      <p:sp>
+        <p:nvSpPr>
+          <p:cNvPr id="2074262743" name="Title 1"/>
+          <p:cNvSpPr>
+            <a:spLocks noGrp="1"/>
+          </p:cNvSpPr>
+          <p:nvPr>
+            <p:ph type="title"/>
+          </p:nvPr>
+        </p:nvSpPr>
+        <p:spPr bwMode="auto"/>
+        <p:txBody>
+          <a:bodyPr/>
+          <a:lstStyle/>
+          <a:p>
+            <a:pPr>
+              <a:defRPr/>
+            </a:pPr>
+            <a:r>
+              <a:rPr lang="de-DE"/>
+              <a:t>Parameters</a:t>
+            </a:r>
+            <a:endParaRPr/>
+          </a:p>
+        </p:txBody>
+      </p:sp>
+      <p:sp>
+        <p:nvSpPr>
+          <p:cNvPr id="455902993" name="Content Placeholder 2"/>
+          <p:cNvSpPr>
+            <a:spLocks noGrp="1"/>
+          </p:cNvSpPr>
+          <p:nvPr>
+            <p:ph idx="1"/>
+          </p:nvPr>
+        </p:nvSpPr>
+        <p:spPr bwMode="auto"/>
+        <p:txBody>
+          <a:bodyPr/>
+          <a:lstStyle/>
+          <a:p>
+            <a:pPr marL="0" indent="0">
+              <a:buFont typeface="Arial"/>
+              <a:buNone/>
+              <a:defRPr/>
+            </a:pPr>
+            <a:r>
+              <a:rPr lang="de-DE"/>
+              <a:t>Table with most important parameters that are necessary for the activity diagram</a:t>
+            </a:r>
+            <a:endParaRPr/>
+          </a:p>
+        </p:txBody>
+      </p:sp>
+    </p:spTree>
+  </p:cSld>
+  <p:clrMapOvr>
+    <a:masterClrMapping/>
+  </p:clrMapOvr>
+  <mc:AlternateContent xmlns:mc="http://schemas.openxmlformats.org/markup-compatibility/2006">
+    <mc:Choice xmlns:p159="http://schemas.microsoft.com/office/powerpoint/2015/09/main" xmlns:p14="http://schemas.microsoft.com/office/powerpoint/2010/main" Requires="p159">
+      <p:transition p14:dur="2000" advClick="1"/>
+    </mc:Choice>
+    <mc:Fallback>
+      <p:transition advClick="1"/>
+    </mc:Fallback>
+  </mc:AlternateContent>
+</p:sld>
+</file>
+
+<file path=ppt/slides/slide6.xml><?xml version="1.0" encoding="utf-8"?>
+<p:sld xmlns:a="http://schemas.openxmlformats.org/drawingml/2006/main" xmlns:r="http://schemas.openxmlformats.org/officeDocument/2006/relationships" xmlns:p="http://schemas.openxmlformats.org/presentationml/2006/main" xmlns:m="http://schemas.openxmlformats.org/officeDocument/2006/math" xmlns:w="http://schemas.openxmlformats.org/wordprocessingml/2006/main" xmlns:mc="http://schemas.openxmlformats.org/markup-compatibility/2006" showMasterPhAnim="0" showMasterSp="1" show="1">
+  <p:cSld name="">
+    <p:spTree>
+      <p:nvGrpSpPr>
+        <p:cNvPr id="1" name=""/>
+        <p:cNvGrpSpPr/>
+        <p:nvPr/>
+      </p:nvGrpSpPr>
+      <p:grpSpPr bwMode="auto">
+        <a:xfrm>
+          <a:off x="0" y="0"/>
+          <a:ext cx="0" cy="0"/>
+          <a:chOff x="0" y="0"/>
+          <a:chExt cx="0" cy="0"/>
+        </a:xfrm>
+      </p:grpSpPr>
+      <p:sp>
+        <p:nvSpPr>
+          <p:cNvPr id="1042702676" name="Title 1"/>
+          <p:cNvSpPr>
+            <a:spLocks noGrp="1"/>
+          </p:cNvSpPr>
+          <p:nvPr>
+            <p:ph type="title"/>
+          </p:nvPr>
+        </p:nvSpPr>
+        <p:spPr bwMode="auto"/>
+        <p:txBody>
+          <a:bodyPr/>
+          <a:lstStyle/>
+          <a:p>
+            <a:pPr>
+              <a:defRPr/>
+            </a:pPr>
             <a:r>
               <a:rPr lang="en-US">
                 <a:solidFill>
@@ -3552,13 +5775,7 @@
       </p:sp>
       <p:sp>
         <p:nvSpPr>
-          <p:cNvPr id="3" name="Content Placeholder 2">
-            <a:extLst>
-              <a:ext uri="{FF2B5EF4-FFF2-40B4-BE49-F238E27FC236}">
-                <a16:creationId xmlns:a16="http://schemas.microsoft.com/office/drawing/2014/main" id="{1B9AADD0-398A-2C95-1120-7163C9E1F39C}"/>
-              </a:ext>
-            </a:extLst>
-          </p:cNvPr>
+          <p:cNvPr id="706589885" name="Content Placeholder 2"/>
           <p:cNvSpPr>
             <a:spLocks noGrp="1"/>
           </p:cNvSpPr>
@@ -3566,13 +5783,16 @@
             <p:ph idx="1"/>
           </p:nvPr>
         </p:nvSpPr>
-        <p:spPr/>
+        <p:spPr bwMode="auto"/>
         <p:txBody>
           <a:bodyPr vert="horz" lIns="91440" tIns="45720" rIns="91440" bIns="45720" rtlCol="0" anchor="t">
             <a:normAutofit/>
           </a:bodyPr>
           <a:lstStyle/>
           <a:p>
+            <a:pPr>
+              <a:defRPr/>
+            </a:pPr>
             <a:r>
               <a:rPr lang="en-US">
                 <a:ea typeface="+mn-lt"/>
@@ -3580,21 +5800,26 @@
               </a:rPr>
               <a:t>Primary key performance indicators (KPIs):</a:t>
             </a:r>
+            <a:endParaRPr/>
           </a:p>
           <a:p>
             <a:pPr marL="457200" lvl="1" indent="0">
               <a:buNone/>
+              <a:defRPr/>
             </a:pPr>
             <a:r>
               <a:rPr lang="en-US"/>
               <a:t>&lt;Formula&gt;</a:t>
             </a:r>
             <a:br>
-              <a:rPr lang="en-US" dirty="0"/>
+              <a:rPr lang="en-US"/>
             </a:br>
             <a:endParaRPr lang="en-US" sz="1600"/>
           </a:p>
           <a:p>
+            <a:pPr>
+              <a:defRPr/>
+            </a:pPr>
             <a:r>
               <a:rPr lang="en-US">
                 <a:solidFill>
@@ -3608,10 +5833,12 @@
               </a:rPr>
               <a:t>Composite score used for ranking policies:</a:t>
             </a:r>
+            <a:endParaRPr/>
           </a:p>
           <a:p>
             <a:pPr marL="0" indent="0">
               <a:buNone/>
+              <a:defRPr/>
             </a:pPr>
             <a:r>
               <a:rPr lang="en-US" sz="2400">
@@ -3624,7 +5851,7 @@
               </a:rPr>
               <a:t>   &lt;Formula&gt;</a:t>
             </a:r>
-            <a:endParaRPr lang="en-US" dirty="0">
+            <a:endParaRPr lang="en-US">
               <a:solidFill>
                 <a:srgbClr val="1F2328"/>
               </a:solidFill>
@@ -3636,8 +5863,9 @@
           <a:p>
             <a:pPr marL="0" indent="0">
               <a:buNone/>
-            </a:pPr>
-            <a:endParaRPr lang="en-US" sz="1400" dirty="0">
+              <a:defRPr/>
+            </a:pPr>
+            <a:endParaRPr lang="en-US" sz="1400">
               <a:solidFill>
                 <a:srgbClr val="000000"/>
               </a:solidFill>
@@ -3649,6 +5877,9 @@
             </a:endParaRPr>
           </a:p>
           <a:p>
+            <a:pPr>
+              <a:defRPr/>
+            </a:pPr>
             <a:r>
               <a:rPr lang="en-US">
                 <a:solidFill>
@@ -3662,10 +5893,12 @@
               </a:rPr>
               <a:t>Optional constraint for practical recommendations:</a:t>
             </a:r>
+            <a:endParaRPr/>
           </a:p>
           <a:p>
             <a:pPr marL="0" indent="0">
               <a:buNone/>
+              <a:defRPr/>
             </a:pPr>
             <a:r>
               <a:rPr lang="en-US" sz="2400">
@@ -3678,7 +5911,7 @@
               </a:rPr>
               <a:t>   &lt;Formula&gt;</a:t>
             </a:r>
-            <a:endParaRPr lang="en-US" dirty="0">
+            <a:endParaRPr lang="en-US">
               <a:solidFill>
                 <a:srgbClr val="1F2328"/>
               </a:solidFill>
@@ -3690,28 +5923,31 @@
         </p:txBody>
       </p:sp>
     </p:spTree>
-    <p:extLst>
-      <p:ext uri="{BB962C8B-B14F-4D97-AF65-F5344CB8AC3E}">
-        <p14:creationId xmlns:p14="http://schemas.microsoft.com/office/powerpoint/2010/main" val="679488052"/>
-      </p:ext>
-    </p:extLst>
   </p:cSld>
   <p:clrMapOvr>
     <a:masterClrMapping/>
   </p:clrMapOvr>
+  <mc:AlternateContent xmlns:mc="http://schemas.openxmlformats.org/markup-compatibility/2006">
+    <mc:Choice xmlns:p159="http://schemas.microsoft.com/office/powerpoint/2015/09/main" xmlns:p14="http://schemas.microsoft.com/office/powerpoint/2010/main" Requires="p159">
+      <p:transition p14:dur="2000" advClick="1"/>
+    </mc:Choice>
+    <mc:Fallback>
+      <p:transition advClick="1"/>
+    </mc:Fallback>
+  </mc:AlternateContent>
 </p:sld>
 </file>
 
-<file path=ppt/slides/slide5.xml><?xml version="1.0" encoding="utf-8"?>
-<p:sld xmlns:a="http://schemas.openxmlformats.org/drawingml/2006/main" xmlns:r="http://schemas.openxmlformats.org/officeDocument/2006/relationships" xmlns:p="http://schemas.openxmlformats.org/presentationml/2006/main">
-  <p:cSld>
+<file path=ppt/slides/slide7.xml><?xml version="1.0" encoding="utf-8"?>
+<p:sld xmlns:a="http://schemas.openxmlformats.org/drawingml/2006/main" xmlns:r="http://schemas.openxmlformats.org/officeDocument/2006/relationships" xmlns:p="http://schemas.openxmlformats.org/presentationml/2006/main" xmlns:m="http://schemas.openxmlformats.org/officeDocument/2006/math" xmlns:w="http://schemas.openxmlformats.org/wordprocessingml/2006/main" xmlns:mc="http://schemas.openxmlformats.org/markup-compatibility/2006" showMasterPhAnim="0" showMasterSp="1" show="1">
+  <p:cSld name="">
     <p:spTree>
       <p:nvGrpSpPr>
         <p:cNvPr id="1" name=""/>
         <p:cNvGrpSpPr/>
         <p:nvPr/>
       </p:nvGrpSpPr>
-      <p:grpSpPr>
+      <p:grpSpPr bwMode="auto">
         <a:xfrm>
           <a:off x="0" y="0"/>
           <a:ext cx="0" cy="0"/>
@@ -3721,13 +5957,7 @@
       </p:grpSpPr>
       <p:sp>
         <p:nvSpPr>
-          <p:cNvPr id="2" name="Title 1">
-            <a:extLst>
-              <a:ext uri="{FF2B5EF4-FFF2-40B4-BE49-F238E27FC236}">
-                <a16:creationId xmlns:a16="http://schemas.microsoft.com/office/drawing/2014/main" id="{37F04A92-3EB8-BD66-8E64-23D76E275E9E}"/>
-              </a:ext>
-            </a:extLst>
-          </p:cNvPr>
+          <p:cNvPr id="478047903" name="Title 1"/>
           <p:cNvSpPr>
             <a:spLocks noGrp="1"/>
           </p:cNvSpPr>
@@ -3735,80 +5965,76 @@
             <p:ph type="title"/>
           </p:nvPr>
         </p:nvSpPr>
-        <p:spPr/>
-        <p:txBody>
-          <a:bodyPr/>
-          <a:lstStyle/>
-          <a:p>
-            <a:r>
-              <a:rPr lang="en-US"/>
-              <a:t>Project Design</a:t>
-            </a:r>
-            <a:endParaRPr lang="en-US" dirty="0"/>
-          </a:p>
-        </p:txBody>
-      </p:sp>
-      <p:pic>
-        <p:nvPicPr>
-          <p:cNvPr id="12" name="Content Placeholder 11" descr="A screenshot of a computer&#10;&#10;AI-generated content may be incorrect.">
-            <a:extLst>
-              <a:ext uri="{FF2B5EF4-FFF2-40B4-BE49-F238E27FC236}">
-                <a16:creationId xmlns:a16="http://schemas.microsoft.com/office/drawing/2014/main" id="{25467D02-11A5-8B2C-1798-E86C3EC92308}"/>
-              </a:ext>
-            </a:extLst>
-          </p:cNvPr>
-          <p:cNvPicPr>
-            <a:picLocks noGrp="1" noChangeAspect="1"/>
-          </p:cNvPicPr>
+        <p:spPr bwMode="auto"/>
+        <p:txBody>
+          <a:bodyPr/>
+          <a:lstStyle/>
+          <a:p>
+            <a:pPr>
+              <a:defRPr/>
+            </a:pPr>
+            <a:r>
+              <a:rPr lang="de-DE"/>
+              <a:t>Hysteresis</a:t>
+            </a:r>
+            <a:endParaRPr/>
+          </a:p>
+        </p:txBody>
+      </p:sp>
+      <p:sp>
+        <p:nvSpPr>
+          <p:cNvPr id="1682514917" name="Content Placeholder 2"/>
+          <p:cNvSpPr>
+            <a:spLocks noGrp="1"/>
+          </p:cNvSpPr>
           <p:nvPr>
             <p:ph idx="1"/>
           </p:nvPr>
-        </p:nvPicPr>
-        <p:blipFill>
-          <a:blip r:embed="rId2"/>
-          <a:stretch>
-            <a:fillRect/>
-          </a:stretch>
-        </p:blipFill>
-        <p:spPr>
-          <a:xfrm>
-            <a:off x="2590718" y="1362246"/>
-            <a:ext cx="7360670" cy="5298690"/>
-          </a:xfrm>
-          <a:prstGeom prst="rect">
-            <a:avLst/>
-          </a:prstGeom>
-        </p:spPr>
-      </p:pic>
+        </p:nvSpPr>
+        <p:spPr bwMode="auto"/>
+        <p:txBody>
+          <a:bodyPr/>
+          <a:lstStyle/>
+          <a:p>
+            <a:pPr marL="0" indent="0">
+              <a:buFont typeface="Arial"/>
+              <a:buNone/>
+              <a:defRPr/>
+            </a:pPr>
+            <a:r>
+              <a:rPr lang="de-DE"/>
+              <a:t>Short explanation of the principle</a:t>
+            </a:r>
+            <a:endParaRPr/>
+          </a:p>
+        </p:txBody>
+      </p:sp>
     </p:spTree>
-    <p:extLst>
-      <p:ext uri="{BB962C8B-B14F-4D97-AF65-F5344CB8AC3E}">
-        <p14:creationId xmlns:p14="http://schemas.microsoft.com/office/powerpoint/2010/main" val="19714615"/>
-      </p:ext>
-    </p:extLst>
   </p:cSld>
   <p:clrMapOvr>
     <a:masterClrMapping/>
   </p:clrMapOvr>
+  <mc:AlternateContent xmlns:mc="http://schemas.openxmlformats.org/markup-compatibility/2006">
+    <mc:Choice xmlns:p159="http://schemas.microsoft.com/office/powerpoint/2015/09/main" xmlns:p14="http://schemas.microsoft.com/office/powerpoint/2010/main" Requires="p159">
+      <p:transition p14:dur="2000" advClick="1"/>
+    </mc:Choice>
+    <mc:Fallback>
+      <p:transition advClick="1"/>
+    </mc:Fallback>
+  </mc:AlternateContent>
 </p:sld>
 </file>
 
-<file path=ppt/slides/slide6.xml><?xml version="1.0" encoding="utf-8"?>
-<p:sld xmlns:a="http://schemas.openxmlformats.org/drawingml/2006/main" xmlns:r="http://schemas.openxmlformats.org/officeDocument/2006/relationships" xmlns:p="http://schemas.openxmlformats.org/presentationml/2006/main">
-  <p:cSld>
+<file path=ppt/slides/slide8.xml><?xml version="1.0" encoding="utf-8"?>
+<p:sld xmlns:a="http://schemas.openxmlformats.org/drawingml/2006/main" xmlns:r="http://schemas.openxmlformats.org/officeDocument/2006/relationships" xmlns:p="http://schemas.openxmlformats.org/presentationml/2006/main" xmlns:m="http://schemas.openxmlformats.org/officeDocument/2006/math" xmlns:w="http://schemas.openxmlformats.org/wordprocessingml/2006/main" xmlns:mc="http://schemas.openxmlformats.org/markup-compatibility/2006" showMasterPhAnim="0" showMasterSp="1" show="1">
+  <p:cSld name="">
     <p:spTree>
       <p:nvGrpSpPr>
-        <p:cNvPr id="1" name="">
-          <a:extLst>
-            <a:ext uri="{FF2B5EF4-FFF2-40B4-BE49-F238E27FC236}">
-              <a16:creationId xmlns:a16="http://schemas.microsoft.com/office/drawing/2014/main" id="{2C4CBAFF-C9C7-1DD6-5C47-B084E17CE05B}"/>
-            </a:ext>
-          </a:extLst>
-        </p:cNvPr>
+        <p:cNvPr id="1" name=""/>
         <p:cNvGrpSpPr/>
         <p:nvPr/>
       </p:nvGrpSpPr>
-      <p:grpSpPr>
+      <p:grpSpPr bwMode="auto">
         <a:xfrm>
           <a:off x="0" y="0"/>
           <a:ext cx="0" cy="0"/>
@@ -3818,13 +6044,7 @@
       </p:grpSpPr>
       <p:sp>
         <p:nvSpPr>
-          <p:cNvPr id="2" name="Title 1">
-            <a:extLst>
-              <a:ext uri="{FF2B5EF4-FFF2-40B4-BE49-F238E27FC236}">
-                <a16:creationId xmlns:a16="http://schemas.microsoft.com/office/drawing/2014/main" id="{A77851F9-CCA1-14AB-8363-9AAC1AAF6925}"/>
-              </a:ext>
-            </a:extLst>
-          </p:cNvPr>
+          <p:cNvPr id="1360380397" name="Title 1"/>
           <p:cNvSpPr>
             <a:spLocks noGrp="1"/>
           </p:cNvSpPr>
@@ -3832,175 +6052,104 @@
             <p:ph type="title"/>
           </p:nvPr>
         </p:nvSpPr>
-        <p:spPr/>
-        <p:txBody>
-          <a:bodyPr/>
-          <a:lstStyle/>
-          <a:p>
-            <a:r>
-              <a:rPr lang="en-US"/>
-              <a:t>Result Evaluation</a:t>
-            </a:r>
-          </a:p>
-        </p:txBody>
-      </p:sp>
-      <p:sp>
-        <p:nvSpPr>
-          <p:cNvPr id="3" name="Content Placeholder 2">
-            <a:extLst>
-              <a:ext uri="{FF2B5EF4-FFF2-40B4-BE49-F238E27FC236}">
-                <a16:creationId xmlns:a16="http://schemas.microsoft.com/office/drawing/2014/main" id="{AA660259-3A35-571F-0F64-8B8878B22A5A}"/>
-              </a:ext>
-            </a:extLst>
-          </p:cNvPr>
-          <p:cNvSpPr>
-            <a:spLocks noGrp="1"/>
-          </p:cNvSpPr>
+        <p:spPr bwMode="auto"/>
+        <p:txBody>
+          <a:bodyPr/>
+          <a:lstStyle/>
+          <a:p>
+            <a:pPr>
+              <a:defRPr/>
+            </a:pPr>
+            <a:r>
+              <a:rPr lang="en-US"/>
+              <a:t>Project Design</a:t>
+            </a:r>
+            <a:endParaRPr lang="en-US"/>
+          </a:p>
+        </p:txBody>
+      </p:sp>
+      <p:pic>
+        <p:nvPicPr>
+          <p:cNvPr id="1373713542" name="Content Placeholder 11" descr="A screenshot of a computer&#10;&#10;AI-generated content may be incorrect."/>
+          <p:cNvPicPr>
+            <a:picLocks noChangeAspect="1" noGrp="1"/>
+          </p:cNvPicPr>
           <p:nvPr>
             <p:ph idx="1"/>
           </p:nvPr>
-        </p:nvSpPr>
-        <p:spPr/>
-        <p:txBody>
-          <a:bodyPr vert="horz" lIns="91440" tIns="45720" rIns="91440" bIns="45720" rtlCol="0" anchor="t">
-            <a:normAutofit/>
+        </p:nvPicPr>
+        <p:blipFill rotWithShape="1">
+          <a:blip r:embed="rId3"/>
+          <a:stretch/>
+        </p:blipFill>
+        <p:spPr bwMode="auto">
+          <a:xfrm>
+            <a:off x="2590718" y="1362246"/>
+            <a:ext cx="7360669" cy="5298690"/>
+          </a:xfrm>
+          <a:prstGeom prst="rect">
+            <a:avLst/>
+          </a:prstGeom>
+        </p:spPr>
+      </p:pic>
+      <p:sp>
+        <p:nvSpPr>
+          <p:cNvPr id="712173005" name=""/>
+          <p:cNvSpPr txBox="1"/>
+          <p:nvPr/>
+        </p:nvSpPr>
+        <p:spPr bwMode="auto">
+          <a:xfrm rot="0" flipH="0" flipV="0">
+            <a:off x="6187898" y="185442"/>
+            <a:ext cx="4689367" cy="366119"/>
+          </a:xfrm>
+          <a:prstGeom prst="rect">
+            <a:avLst/>
+          </a:prstGeom>
+          <a:noFill/>
+        </p:spPr>
+        <p:txBody>
+          <a:bodyPr vertOverflow="overflow" horzOverflow="overflow" vert="horz" wrap="square" lIns="91440" tIns="45720" rIns="91440" bIns="45720" numCol="1" spcCol="0" rtlCol="0" fromWordArt="0" anchor="t" anchorCtr="0" forceAA="0" upright="0" compatLnSpc="0">
+            <a:spAutoFit/>
           </a:bodyPr>
-          <a:lstStyle/>
-          <a:p>
-            <a:pPr marL="0" indent="0">
-              <a:buNone/>
-            </a:pPr>
-            <a:r>
-              <a:rPr lang="en-US"/>
-              <a:t>Verification</a:t>
-            </a:r>
-            <a:endParaRPr lang="en-US" dirty="0"/>
-          </a:p>
-          <a:p>
-            <a:pPr>
-              <a:buFont typeface="Arial"/>
-              <a:buChar char="•"/>
-            </a:pPr>
-            <a:r>
-              <a:rPr lang="en-US" sz="1800">
-                <a:highlight>
-                  <a:srgbClr val="FFFFFF"/>
-                </a:highlight>
-                <a:ea typeface="+mn-lt"/>
-                <a:cs typeface="+mn-lt"/>
-              </a:rPr>
-              <a:t>Measure the average and 95th percentile batch delay, and total CO2 saving.</a:t>
-            </a:r>
-            <a:endParaRPr lang="en-US" sz="1800"/>
-          </a:p>
-          <a:p>
-            <a:pPr>
-              <a:buFont typeface="Arial"/>
-              <a:buChar char="•"/>
-            </a:pPr>
-            <a:r>
-              <a:rPr lang="en-US" sz="1800" dirty="0">
-                <a:highlight>
-                  <a:srgbClr val="FFFFFF"/>
-                </a:highlight>
-                <a:ea typeface="+mn-lt"/>
-                <a:cs typeface="+mn-lt"/>
-              </a:rPr>
-              <a:t>Vary training duration, energy consumption, starting </a:t>
-            </a:r>
-            <a:r>
-              <a:rPr lang="en-US" sz="1800">
-                <a:highlight>
-                  <a:srgbClr val="FFFFFF"/>
-                </a:highlight>
-                <a:ea typeface="+mn-lt"/>
-                <a:cs typeface="+mn-lt"/>
-              </a:rPr>
-              <a:t>time, region, season, and CO2 threshold.</a:t>
-            </a:r>
-            <a:endParaRPr lang="en-US" sz="1800">
-              <a:highlight>
-                <a:srgbClr val="FFFFFF"/>
-              </a:highlight>
-            </a:endParaRPr>
-          </a:p>
-          <a:p>
-            <a:pPr>
-              <a:buFont typeface="Arial"/>
-              <a:buChar char="•"/>
-            </a:pPr>
-            <a:endParaRPr lang="en-US" sz="1600" dirty="0">
-              <a:solidFill>
-                <a:srgbClr val="1F2328"/>
-              </a:solidFill>
-              <a:highlight>
-                <a:srgbClr val="FFFFFF"/>
-              </a:highlight>
-            </a:endParaRPr>
-          </a:p>
-          <a:p>
-            <a:pPr marL="0" indent="0">
-              <a:buNone/>
-            </a:pPr>
-            <a:r>
-              <a:rPr lang="en-US"/>
-              <a:t>Validation</a:t>
-            </a:r>
-          </a:p>
-          <a:p>
-            <a:r>
-              <a:rPr lang="en-US" sz="1800">
-                <a:highlight>
-                  <a:srgbClr val="FFFFFF"/>
-                </a:highlight>
-                <a:ea typeface="+mn-lt"/>
-                <a:cs typeface="+mn-lt"/>
-              </a:rPr>
-              <a:t>Validate against model training using the historic data.</a:t>
-            </a:r>
-          </a:p>
-          <a:p>
-            <a:r>
-              <a:rPr lang="en-US" sz="1800">
-                <a:highlight>
-                  <a:srgbClr val="FFFFFF"/>
-                </a:highlight>
-                <a:ea typeface="+mn-lt"/>
-                <a:cs typeface="+mn-lt"/>
-              </a:rPr>
-              <a:t>Using 'Electricity Maps' API for CO2 intensity data.</a:t>
-            </a:r>
-            <a:endParaRPr lang="en-US" sz="1800">
-              <a:highlight>
-                <a:srgbClr val="FFFFFF"/>
-              </a:highlight>
-            </a:endParaRPr>
+          <a:p>
+            <a:pPr>
+              <a:defRPr/>
+            </a:pPr>
+            <a:r>
+              <a:rPr lang="de-DE"/>
+              <a:t>TODO: Update with new svg</a:t>
+            </a:r>
+            <a:endParaRPr/>
           </a:p>
         </p:txBody>
       </p:sp>
     </p:spTree>
-    <p:extLst>
-      <p:ext uri="{BB962C8B-B14F-4D97-AF65-F5344CB8AC3E}">
-        <p14:creationId xmlns:p14="http://schemas.microsoft.com/office/powerpoint/2010/main" val="4269066174"/>
-      </p:ext>
-    </p:extLst>
   </p:cSld>
   <p:clrMapOvr>
     <a:masterClrMapping/>
   </p:clrMapOvr>
+  <mc:AlternateContent xmlns:mc="http://schemas.openxmlformats.org/markup-compatibility/2006">
+    <mc:Choice xmlns:p159="http://schemas.microsoft.com/office/powerpoint/2015/09/main" xmlns:p14="http://schemas.microsoft.com/office/powerpoint/2010/main" Requires="p159">
+      <p:transition p14:dur="2000" advClick="1"/>
+    </mc:Choice>
+    <mc:Fallback>
+      <p:transition advClick="1"/>
+    </mc:Fallback>
+  </mc:AlternateContent>
 </p:sld>
 </file>
 
-<file path=ppt/slides/slide7.xml><?xml version="1.0" encoding="utf-8"?>
-<p:sld xmlns:a="http://schemas.openxmlformats.org/drawingml/2006/main" xmlns:r="http://schemas.openxmlformats.org/officeDocument/2006/relationships" xmlns:p="http://schemas.openxmlformats.org/presentationml/2006/main">
-  <p:cSld>
+<file path=ppt/slides/slide9.xml><?xml version="1.0" encoding="utf-8"?>
+<p:sld xmlns:a="http://schemas.openxmlformats.org/drawingml/2006/main" xmlns:r="http://schemas.openxmlformats.org/officeDocument/2006/relationships" xmlns:p="http://schemas.openxmlformats.org/presentationml/2006/main" xmlns:m="http://schemas.openxmlformats.org/officeDocument/2006/math" xmlns:w="http://schemas.openxmlformats.org/wordprocessingml/2006/main" xmlns:mc="http://schemas.openxmlformats.org/markup-compatibility/2006" showMasterPhAnim="0" showMasterSp="1" show="1">
+  <p:cSld name="">
     <p:spTree>
       <p:nvGrpSpPr>
         <p:cNvPr id="1" name=""/>
         <p:cNvGrpSpPr/>
         <p:nvPr/>
       </p:nvGrpSpPr>
-      <p:grpSpPr>
+      <p:grpSpPr bwMode="auto">
         <a:xfrm>
           <a:off x="0" y="0"/>
           <a:ext cx="0" cy="0"/>
@@ -4010,13 +6159,7 @@
       </p:grpSpPr>
       <p:sp>
         <p:nvSpPr>
-          <p:cNvPr id="2" name="Title 1">
-            <a:extLst>
-              <a:ext uri="{FF2B5EF4-FFF2-40B4-BE49-F238E27FC236}">
-                <a16:creationId xmlns:a16="http://schemas.microsoft.com/office/drawing/2014/main" id="{3DC6F067-778B-6826-07BB-D6A5F9C11BAA}"/>
-              </a:ext>
-            </a:extLst>
-          </p:cNvPr>
+          <p:cNvPr id="414349726" name="Title 1"/>
           <p:cNvSpPr>
             <a:spLocks noGrp="1"/>
           </p:cNvSpPr>
@@ -4024,27 +6167,25 @@
             <p:ph type="title"/>
           </p:nvPr>
         </p:nvSpPr>
-        <p:spPr/>
-        <p:txBody>
-          <a:bodyPr/>
-          <a:lstStyle/>
-          <a:p>
-            <a:r>
-              <a:rPr lang="en-US"/>
-              <a:t>Way Forward</a:t>
-            </a:r>
-          </a:p>
-        </p:txBody>
-      </p:sp>
-      <p:sp>
-        <p:nvSpPr>
-          <p:cNvPr id="3" name="Content Placeholder 2">
-            <a:extLst>
-              <a:ext uri="{FF2B5EF4-FFF2-40B4-BE49-F238E27FC236}">
-                <a16:creationId xmlns:a16="http://schemas.microsoft.com/office/drawing/2014/main" id="{AF5A600D-23A4-4E35-D04E-4CE859FC4104}"/>
-              </a:ext>
-            </a:extLst>
-          </p:cNvPr>
+        <p:spPr bwMode="auto"/>
+        <p:txBody>
+          <a:bodyPr/>
+          <a:lstStyle/>
+          <a:p>
+            <a:pPr>
+              <a:defRPr/>
+            </a:pPr>
+            <a:r>
+              <a:rPr lang="de-DE"/>
+              <a:t>Scenarios (67)</a:t>
+            </a:r>
+            <a:endParaRPr/>
+          </a:p>
+        </p:txBody>
+      </p:sp>
+      <p:sp>
+        <p:nvSpPr>
+          <p:cNvPr id="520537336" name="Content Placeholder 2"/>
           <p:cNvSpPr>
             <a:spLocks noGrp="1"/>
           </p:cNvSpPr>
@@ -4052,66 +6193,42 @@
             <p:ph idx="1"/>
           </p:nvPr>
         </p:nvSpPr>
-        <p:spPr/>
-        <p:txBody>
-          <a:bodyPr vert="horz" lIns="91440" tIns="45720" rIns="91440" bIns="45720" rtlCol="0" anchor="t">
-            <a:normAutofit/>
-          </a:bodyPr>
+        <p:spPr bwMode="auto"/>
+        <p:txBody>
+          <a:bodyPr/>
           <a:lstStyle/>
           <a:p>
             <a:pPr marL="0" indent="0">
-              <a:buNone/>
-            </a:pPr>
-            <a:r>
-              <a:rPr lang="en-US"/>
-              <a:t>Questions?</a:t>
-            </a:r>
-          </a:p>
-          <a:p>
-            <a:pPr marL="0" indent="0">
-              <a:buNone/>
-            </a:pPr>
-            <a:endParaRPr lang="en-US" dirty="0"/>
-          </a:p>
-          <a:p>
-            <a:pPr marL="0" indent="0" algn="ctr">
-              <a:buNone/>
-            </a:pPr>
-            <a:endParaRPr lang="en-US" dirty="0"/>
-          </a:p>
-          <a:p>
-            <a:pPr marL="0" indent="0" algn="ctr">
-              <a:buNone/>
-            </a:pPr>
-            <a:endParaRPr lang="en-US" dirty="0"/>
-          </a:p>
-          <a:p>
-            <a:pPr marL="0" indent="0" algn="ctr">
-              <a:buNone/>
-            </a:pPr>
-            <a:r>
-              <a:rPr lang="en-US"/>
-              <a:t>Thank you</a:t>
-            </a:r>
-            <a:endParaRPr lang="en-US" dirty="0"/>
+              <a:buFont typeface="Arial"/>
+              <a:buNone/>
+              <a:defRPr/>
+            </a:pPr>
+            <a:r>
+              <a:rPr lang="de-DE"/>
+              <a:t>Add booleans csv</a:t>
+            </a:r>
+            <a:endParaRPr/>
           </a:p>
         </p:txBody>
       </p:sp>
     </p:spTree>
-    <p:extLst>
-      <p:ext uri="{BB962C8B-B14F-4D97-AF65-F5344CB8AC3E}">
-        <p14:creationId xmlns:p14="http://schemas.microsoft.com/office/powerpoint/2010/main" val="251219007"/>
-      </p:ext>
-    </p:extLst>
   </p:cSld>
   <p:clrMapOvr>
     <a:masterClrMapping/>
   </p:clrMapOvr>
+  <mc:AlternateContent xmlns:mc="http://schemas.openxmlformats.org/markup-compatibility/2006">
+    <mc:Choice xmlns:p159="http://schemas.microsoft.com/office/powerpoint/2015/09/main" xmlns:p14="http://schemas.microsoft.com/office/powerpoint/2010/main" Requires="p159">
+      <p:transition p14:dur="2000" advClick="1"/>
+    </mc:Choice>
+    <mc:Fallback>
+      <p:transition advClick="1"/>
+    </mc:Fallback>
+  </mc:AlternateContent>
 </p:sld>
 </file>
 
 <file path=ppt/theme/theme1.xml><?xml version="1.0" encoding="utf-8"?>
-<a:theme xmlns:a="http://schemas.openxmlformats.org/drawingml/2006/main" name="office theme">
+<a:theme xmlns:a="http://schemas.openxmlformats.org/drawingml/2006/main" xmlns:r="http://schemas.openxmlformats.org/officeDocument/2006/relationships" xmlns:p="http://schemas.openxmlformats.org/presentationml/2006/main" name="office theme">
   <a:themeElements>
     <a:clrScheme name="Office">
       <a:dk1>
@@ -4153,74 +6270,14 @@
     </a:clrScheme>
     <a:fontScheme name="Office Theme">
       <a:majorFont>
-        <a:latin typeface="Aptos Display" panose="020F0302020204030204"/>
-        <a:ea typeface=""/>
-        <a:cs typeface=""/>
-        <a:font script="Jpan" typeface="ＭＳ Ｐゴシック"/>
-        <a:font script="Hang" typeface="맑은 고딕"/>
-        <a:font script="Hans" typeface="宋体"/>
-        <a:font script="Hant" typeface="新細明體"/>
-        <a:font script="Arab" typeface="Times New Roman"/>
-        <a:font script="Hebr" typeface="Times New Roman"/>
-        <a:font script="Thai" typeface="Angsana New"/>
-        <a:font script="Ethi" typeface="Nyala"/>
-        <a:font script="Beng" typeface="Vrinda"/>
-        <a:font script="Gujr" typeface="Shruti"/>
-        <a:font script="Khmr" typeface="MoolBoran"/>
-        <a:font script="Knda" typeface="Tunga"/>
-        <a:font script="Guru" typeface="Raavi"/>
-        <a:font script="Cans" typeface="Euphemia"/>
-        <a:font script="Cher" typeface="Plantagenet Cherokee"/>
-        <a:font script="Yiii" typeface="Microsoft Yi Baiti"/>
-        <a:font script="Tibt" typeface="Microsoft Himalaya"/>
-        <a:font script="Thaa" typeface="MV Boli"/>
-        <a:font script="Deva" typeface="Mangal"/>
-        <a:font script="Telu" typeface="Gautami"/>
-        <a:font script="Taml" typeface="Latha"/>
-        <a:font script="Syrc" typeface="Estrangelo Edessa"/>
-        <a:font script="Orya" typeface="Kalinga"/>
-        <a:font script="Mlym" typeface="Kartika"/>
-        <a:font script="Laoo" typeface="DokChampa"/>
-        <a:font script="Sinh" typeface="Iskoola Pota"/>
-        <a:font script="Mong" typeface="Mongolian Baiti"/>
-        <a:font script="Viet" typeface="Times New Roman"/>
-        <a:font script="Uigh" typeface="Microsoft Uighur"/>
-        <a:font script="Geor" typeface="Sylfaen"/>
+        <a:latin typeface="Aptos Display"/>
+        <a:ea typeface="Arial"/>
+        <a:cs typeface="Arial"/>
       </a:majorFont>
       <a:minorFont>
-        <a:latin typeface="Aptos" panose="020B0004020202020204"/>
-        <a:ea typeface=""/>
-        <a:cs typeface=""/>
-        <a:font script="Jpan" typeface="ＭＳ Ｐゴシック"/>
-        <a:font script="Hang" typeface="맑은 고딕"/>
-        <a:font script="Hans" typeface="宋体"/>
-        <a:font script="Hant" typeface="新細明體"/>
-        <a:font script="Arab" typeface="Arial"/>
-        <a:font script="Hebr" typeface="Arial"/>
-        <a:font script="Thai" typeface="Cordia New"/>
-        <a:font script="Ethi" typeface="Nyala"/>
-        <a:font script="Beng" typeface="Vrinda"/>
-        <a:font script="Gujr" typeface="Shruti"/>
-        <a:font script="Khmr" typeface="DaunPenh"/>
-        <a:font script="Knda" typeface="Tunga"/>
-        <a:font script="Guru" typeface="Raavi"/>
-        <a:font script="Cans" typeface="Euphemia"/>
-        <a:font script="Cher" typeface="Plantagenet Cherokee"/>
-        <a:font script="Yiii" typeface="Microsoft Yi Baiti"/>
-        <a:font script="Tibt" typeface="Microsoft Himalaya"/>
-        <a:font script="Thaa" typeface="MV Boli"/>
-        <a:font script="Deva" typeface="Mangal"/>
-        <a:font script="Telu" typeface="Gautami"/>
-        <a:font script="Taml" typeface="Latha"/>
-        <a:font script="Syrc" typeface="Estrangelo Edessa"/>
-        <a:font script="Orya" typeface="Kalinga"/>
-        <a:font script="Mlym" typeface="Kartika"/>
-        <a:font script="Laoo" typeface="DokChampa"/>
-        <a:font script="Sinh" typeface="Iskoola Pota"/>
-        <a:font script="Mong" typeface="Mongolian Baiti"/>
-        <a:font script="Viet" typeface="Arial"/>
-        <a:font script="Uigh" typeface="Microsoft Uighur"/>
-        <a:font script="Geor" typeface="Sylfaen"/>
+        <a:latin typeface="Aptos"/>
+        <a:ea typeface="Arial"/>
+        <a:cs typeface="Arial"/>
       </a:minorFont>
     </a:fontScheme>
     <a:fmtScheme name="Office Theme">
@@ -4228,7 +6285,7 @@
         <a:solidFill>
           <a:schemeClr val="phClr"/>
         </a:solidFill>
-        <a:gradFill rotWithShape="1">
+        <a:gradFill>
           <a:gsLst>
             <a:gs pos="0">
               <a:schemeClr val="phClr">
@@ -4254,7 +6311,7 @@
           </a:gsLst>
           <a:lin ang="5400000" scaled="0"/>
         </a:gradFill>
-        <a:gradFill rotWithShape="1">
+        <a:gradFill>
           <a:gsLst>
             <a:gs pos="0">
               <a:schemeClr val="phClr">
@@ -4331,7 +6388,7 @@
             <a:satMod val="170000"/>
           </a:schemeClr>
         </a:solidFill>
-        <a:gradFill rotWithShape="1">
+        <a:gradFill>
           <a:gsLst>
             <a:gs pos="0">
               <a:schemeClr val="phClr">
@@ -4363,7 +6420,7 @@
   </a:themeElements>
   <a:objectDefaults>
     <a:lnDef>
-      <a:spPr/>
+      <a:spPr bwMode="auto"/>
       <a:bodyPr/>
       <a:lstStyle/>
       <a:style>
@@ -4382,11 +6439,220 @@
       </a:style>
     </a:lnDef>
   </a:objectDefaults>
-  <a:extraClrSchemeLst/>
-  <a:extLst>
-    <a:ext uri="{05A4C25C-085E-4340-85A3-A5531E510DB2}">
-      <thm15:themeFamily xmlns:thm15="http://schemas.microsoft.com/office/thememl/2012/main" name="Office Theme" id="{2E142A2C-CD16-42D6-873A-C26D2A0506FA}" vid="{1BDDFF52-6CD6-40A5-AB3C-68EB2F1E4D0A}"/>
-    </a:ext>
-  </a:extLst>
+</a:theme>
+</file>
+
+<file path=ppt/theme/theme2.xml><?xml version="1.0" encoding="utf-8"?>
+<a:theme xmlns:a="http://schemas.openxmlformats.org/drawingml/2006/main" xmlns:r="http://schemas.openxmlformats.org/officeDocument/2006/relationships" xmlns:p="http://schemas.openxmlformats.org/presentationml/2006/main" name="office theme">
+  <a:themeElements>
+    <a:clrScheme name="Office">
+      <a:dk1>
+        <a:sysClr val="windowText" lastClr="000000"/>
+      </a:dk1>
+      <a:lt1>
+        <a:sysClr val="window" lastClr="FFFFFF"/>
+      </a:lt1>
+      <a:dk2>
+        <a:srgbClr val="0E2841"/>
+      </a:dk2>
+      <a:lt2>
+        <a:srgbClr val="E8E8E8"/>
+      </a:lt2>
+      <a:accent1>
+        <a:srgbClr val="156082"/>
+      </a:accent1>
+      <a:accent2>
+        <a:srgbClr val="E97132"/>
+      </a:accent2>
+      <a:accent3>
+        <a:srgbClr val="196B24"/>
+      </a:accent3>
+      <a:accent4>
+        <a:srgbClr val="0F9ED5"/>
+      </a:accent4>
+      <a:accent5>
+        <a:srgbClr val="A02B93"/>
+      </a:accent5>
+      <a:accent6>
+        <a:srgbClr val="4EA72E"/>
+      </a:accent6>
+      <a:hlink>
+        <a:srgbClr val="467886"/>
+      </a:hlink>
+      <a:folHlink>
+        <a:srgbClr val="96607D"/>
+      </a:folHlink>
+    </a:clrScheme>
+    <a:fontScheme name="">
+      <a:majorFont>
+        <a:latin typeface="Aptos Display"/>
+        <a:ea typeface="Arial"/>
+        <a:cs typeface="Arial"/>
+      </a:majorFont>
+      <a:minorFont>
+        <a:latin typeface="Aptos"/>
+        <a:ea typeface="Arial"/>
+        <a:cs typeface="Arial"/>
+      </a:minorFont>
+    </a:fontScheme>
+    <a:fmtScheme name="Office Theme">
+      <a:fillStyleLst>
+        <a:solidFill>
+          <a:schemeClr val="phClr"/>
+        </a:solidFill>
+        <a:gradFill>
+          <a:gsLst>
+            <a:gs pos="0">
+              <a:schemeClr val="phClr">
+                <a:lumMod val="110000"/>
+                <a:satMod val="105000"/>
+                <a:tint val="67000"/>
+              </a:schemeClr>
+            </a:gs>
+            <a:gs pos="50000">
+              <a:schemeClr val="phClr">
+                <a:lumMod val="105000"/>
+                <a:satMod val="103000"/>
+                <a:tint val="73000"/>
+              </a:schemeClr>
+            </a:gs>
+            <a:gs pos="100000">
+              <a:schemeClr val="phClr">
+                <a:lumMod val="105000"/>
+                <a:satMod val="109000"/>
+                <a:tint val="81000"/>
+              </a:schemeClr>
+            </a:gs>
+          </a:gsLst>
+          <a:lin ang="5400000" scaled="0"/>
+        </a:gradFill>
+        <a:gradFill>
+          <a:gsLst>
+            <a:gs pos="0">
+              <a:schemeClr val="phClr">
+                <a:satMod val="103000"/>
+                <a:lumMod val="102000"/>
+                <a:tint val="94000"/>
+              </a:schemeClr>
+            </a:gs>
+            <a:gs pos="50000">
+              <a:schemeClr val="phClr">
+                <a:satMod val="110000"/>
+                <a:lumMod val="100000"/>
+                <a:shade val="100000"/>
+              </a:schemeClr>
+            </a:gs>
+            <a:gs pos="100000">
+              <a:schemeClr val="phClr">
+                <a:lumMod val="99000"/>
+                <a:satMod val="120000"/>
+                <a:shade val="78000"/>
+              </a:schemeClr>
+            </a:gs>
+          </a:gsLst>
+          <a:lin ang="5400000" scaled="0"/>
+        </a:gradFill>
+      </a:fillStyleLst>
+      <a:lnStyleLst>
+        <a:ln w="12700" cap="flat" cmpd="sng" algn="ctr">
+          <a:solidFill>
+            <a:schemeClr val="phClr"/>
+          </a:solidFill>
+          <a:prstDash val="solid"/>
+          <a:miter lim="800000"/>
+        </a:ln>
+        <a:ln w="19050" cap="flat" cmpd="sng" algn="ctr">
+          <a:solidFill>
+            <a:schemeClr val="phClr"/>
+          </a:solidFill>
+          <a:prstDash val="solid"/>
+          <a:miter lim="800000"/>
+        </a:ln>
+        <a:ln w="25400" cap="flat" cmpd="sng" algn="ctr">
+          <a:solidFill>
+            <a:schemeClr val="phClr"/>
+          </a:solidFill>
+          <a:prstDash val="solid"/>
+          <a:miter lim="800000"/>
+        </a:ln>
+      </a:lnStyleLst>
+      <a:effectStyleLst>
+        <a:effectStyle>
+          <a:effectLst/>
+        </a:effectStyle>
+        <a:effectStyle>
+          <a:effectLst/>
+        </a:effectStyle>
+        <a:effectStyle>
+          <a:effectLst>
+            <a:outerShdw blurRad="57150" dist="19050" dir="5400000" algn="ctr" rotWithShape="0">
+              <a:srgbClr val="000000">
+                <a:alpha val="63000"/>
+              </a:srgbClr>
+            </a:outerShdw>
+          </a:effectLst>
+        </a:effectStyle>
+      </a:effectStyleLst>
+      <a:bgFillStyleLst>
+        <a:solidFill>
+          <a:schemeClr val="phClr"/>
+        </a:solidFill>
+        <a:solidFill>
+          <a:schemeClr val="phClr">
+            <a:tint val="95000"/>
+            <a:satMod val="170000"/>
+          </a:schemeClr>
+        </a:solidFill>
+        <a:gradFill>
+          <a:gsLst>
+            <a:gs pos="0">
+              <a:schemeClr val="phClr">
+                <a:tint val="93000"/>
+                <a:satMod val="150000"/>
+                <a:shade val="98000"/>
+                <a:lumMod val="102000"/>
+              </a:schemeClr>
+            </a:gs>
+            <a:gs pos="50000">
+              <a:schemeClr val="phClr">
+                <a:tint val="98000"/>
+                <a:satMod val="130000"/>
+                <a:shade val="90000"/>
+                <a:lumMod val="103000"/>
+              </a:schemeClr>
+            </a:gs>
+            <a:gs pos="100000">
+              <a:schemeClr val="phClr">
+                <a:shade val="63000"/>
+                <a:satMod val="120000"/>
+              </a:schemeClr>
+            </a:gs>
+          </a:gsLst>
+          <a:lin ang="5400000" scaled="0"/>
+        </a:gradFill>
+      </a:bgFillStyleLst>
+    </a:fmtScheme>
+  </a:themeElements>
+  <a:objectDefaults>
+    <a:lnDef>
+      <a:spPr bwMode="auto"/>
+      <a:bodyPr/>
+      <a:lstStyle/>
+      <a:style>
+        <a:lnRef idx="2">
+          <a:schemeClr val="accent1"/>
+        </a:lnRef>
+        <a:fillRef idx="0">
+          <a:schemeClr val="accent1"/>
+        </a:fillRef>
+        <a:effectRef idx="1">
+          <a:schemeClr val="accent1"/>
+        </a:effectRef>
+        <a:fontRef idx="minor">
+          <a:schemeClr val="tx1"/>
+        </a:fontRef>
+      </a:style>
+    </a:lnDef>
+  </a:objectDefaults>
 </a:theme>
 </file>